--- a/docs/demo/outputs/fa/charge-while-you-shop-slide-deck.pptx
+++ b/docs/demo/outputs/fa/charge-while-you-shop-slide-deck.pptx
@@ -112,348 +112,6 @@
     </a:lvl9pPr>
   </p:defaultTextStyle>
 </p:presentation>
-</file>
-
-<file path=ppt/charts/chart1.xml><?xml version="1.0" encoding="utf-8"?>
-<c:chartSpace xmlns:c="http://schemas.openxmlformats.org/drawingml/2006/chart" xmlns:a="http://schemas.openxmlformats.org/drawingml/2006/main" xmlns:r="http://schemas.openxmlformats.org/officeDocument/2006/relationships">
-  <c:date1904 val="0"/>
-  <c:roundedCorners val="1"/>
-  <c:chart>
-    <c:autoTitleDeleted val="1"/>
-    <c:plotArea>
-      <c:layout/>
-      <c:barChart>
-        <c:barDir val="col"/>
-        <c:grouping val="clustered"/>
-        <c:varyColors val="0"/>
-        <c:ser>
-          <c:idx val="0"/>
-          <c:order val="0"/>
-          <c:tx>
-            <c:strRef>
-              <c:f>Sheet1!$B$1</c:f>
-              <c:strCache>
-                <c:ptCount val="1"/>
-                <c:pt idx="0">
-                  <c:v>زمان شارژ برای ۸۰٪ باتری (دقیقه)</c:v>
-                </c:pt>
-              </c:strCache>
-            </c:strRef>
-          </c:tx>
-          <c:spPr>
-            <a:solidFill>
-              <a:srgbClr val="FFD166"/>
-            </a:solidFill>
-            <a:effectLst/>
-          </c:spPr>
-          <c:invertIfNegative val="0"/>
-          <c:dLbls>
-            <c:numFmt formatCode="#,##0" sourceLinked="0"/>
-            <c:txPr>
-              <a:bodyPr/>
-              <a:lstStyle/>
-              <a:p>
-                <a:pPr>
-                  <a:defRPr b="0" i="0" strike="noStrike" sz="1200" u="none">
-                    <a:solidFill>
-                      <a:srgbClr val="000000"/>
-                    </a:solidFill>
-                    <a:latin typeface="Arial"/>
-                  </a:defRPr>
-                </a:pPr>
-              </a:p>
-            </c:txPr>
-            <c:showLegendKey val="0"/>
-            <c:showVal val="1"/>
-            <c:showCatName val="0"/>
-            <c:showSerName val="0"/>
-            <c:showPercent val="0"/>
-            <c:showBubbleSize val="0"/>
-            <c:showLeaderLines val="0"/>
-          </c:dLbls>
-          <c:cat>
-            <c:multiLvlStrRef>
-              <c:f>Sheet1!$A$2:$A$4</c:f>
-              <c:multiLvlStrCache>
-                <c:ptCount val="3"/>
-                <c:lvl>
-                  <c:pt idx="0">
-                    <c:v>شارژ سریع (DC)</c:v>
-                  </c:pt>
-                  <c:pt idx="1">
-                    <c:v>شارژ نیمه‌سریع</c:v>
-                  </c:pt>
-                  <c:pt idx="2">
-                    <c:v>شارژ معمولی (AC)</c:v>
-                  </c:pt>
-                </c:lvl>
-              </c:multiLvlStrCache>
-            </c:multiLvlStrRef>
-          </c:cat>
-          <c:val>
-            <c:numRef>
-              <c:f>Sheet1!$B$2:$B$4</c:f>
-              <c:numCache>
-                <c:formatCode>General</c:formatCode>
-                <c:ptCount val="3"/>
-                <c:pt idx="0">
-                  <c:v>20</c:v>
-                </c:pt>
-                <c:pt idx="1">
-                  <c:v>60</c:v>
-                </c:pt>
-                <c:pt idx="2">
-                  <c:v>180</c:v>
-                </c:pt>
-              </c:numCache>
-            </c:numRef>
-          </c:val>
-        </c:ser>
-        <c:ser>
-          <c:idx val="1"/>
-          <c:order val="1"/>
-          <c:tx>
-            <c:strRef>
-              <c:f>Sheet1!$C$1</c:f>
-              <c:strCache>
-                <c:ptCount val="1"/>
-                <c:pt idx="0">
-                  <c:v>زمان پارکینگ متوسط در فروشگاه (دقیق…</c:v>
-                </c:pt>
-              </c:strCache>
-            </c:strRef>
-          </c:tx>
-          <c:spPr>
-            <a:solidFill>
-              <a:srgbClr val="EF476F"/>
-            </a:solidFill>
-            <a:effectLst/>
-          </c:spPr>
-          <c:invertIfNegative val="0"/>
-          <c:dLbls>
-            <c:numFmt formatCode="#,##0" sourceLinked="0"/>
-            <c:txPr>
-              <a:bodyPr/>
-              <a:lstStyle/>
-              <a:p>
-                <a:pPr>
-                  <a:defRPr b="0" i="0" strike="noStrike" sz="1200" u="none">
-                    <a:solidFill>
-                      <a:srgbClr val="000000"/>
-                    </a:solidFill>
-                    <a:latin typeface="Arial"/>
-                  </a:defRPr>
-                </a:pPr>
-              </a:p>
-            </c:txPr>
-            <c:showLegendKey val="0"/>
-            <c:showVal val="1"/>
-            <c:showCatName val="0"/>
-            <c:showSerName val="0"/>
-            <c:showPercent val="0"/>
-            <c:showBubbleSize val="0"/>
-            <c:showLeaderLines val="0"/>
-          </c:dLbls>
-          <c:cat>
-            <c:multiLvlStrRef>
-              <c:f>Sheet1!$A$2:$A$4</c:f>
-              <c:multiLvlStrCache>
-                <c:ptCount val="3"/>
-                <c:lvl>
-                  <c:pt idx="0">
-                    <c:v>شارژ سریع (DC)</c:v>
-                  </c:pt>
-                  <c:pt idx="1">
-                    <c:v>شارژ نیمه‌سریع</c:v>
-                  </c:pt>
-                  <c:pt idx="2">
-                    <c:v>شارژ معمولی (AC)</c:v>
-                  </c:pt>
-                </c:lvl>
-              </c:multiLvlStrCache>
-            </c:multiLvlStrRef>
-          </c:cat>
-          <c:val>
-            <c:numRef>
-              <c:f>Sheet1!$C$2:$C$4</c:f>
-              <c:numCache>
-                <c:formatCode>General</c:formatCode>
-                <c:ptCount val="3"/>
-                <c:pt idx="0">
-                  <c:v>90</c:v>
-                </c:pt>
-                <c:pt idx="1">
-                  <c:v>90</c:v>
-                </c:pt>
-                <c:pt idx="2">
-                  <c:v>90</c:v>
-                </c:pt>
-              </c:numCache>
-            </c:numRef>
-          </c:val>
-        </c:ser>
-        <c:dLbls>
-          <c:numFmt formatCode="#,##0" sourceLinked="0"/>
-          <c:txPr>
-            <a:bodyPr/>
-            <a:lstStyle/>
-            <a:p>
-              <a:pPr>
-                <a:defRPr b="0" i="0" strike="noStrike" sz="1200" u="none">
-                  <a:solidFill>
-                    <a:srgbClr val="000000"/>
-                  </a:solidFill>
-                  <a:latin typeface="Arial"/>
-                </a:defRPr>
-              </a:pPr>
-            </a:p>
-          </c:txPr>
-          <c:showLegendKey val="0"/>
-          <c:showVal val="1"/>
-          <c:showCatName val="0"/>
-          <c:showSerName val="0"/>
-          <c:showPercent val="0"/>
-          <c:showBubbleSize val="0"/>
-          <c:showLeaderLines val="0"/>
-        </c:dLbls>
-        <c:gapWidth val="150"/>
-        <c:overlap val="0"/>
-        <c:axId val="2094734554"/>
-        <c:axId val="2094734552"/>
-        <c:axId val="2094734556"/>
-      </c:barChart>
-      <c:catAx>
-        <c:axId val="2094734554"/>
-        <c:scaling>
-          <c:orientation val="minMax"/>
-        </c:scaling>
-        <c:delete val="0"/>
-        <c:axPos val="b"/>
-        <c:numFmt formatCode="General" sourceLinked="1"/>
-        <c:majorTickMark val="out"/>
-        <c:minorTickMark val="none"/>
-        <c:tickLblPos val="low"/>
-        <c:spPr>
-          <a:ln w="12700" cap="flat">
-            <a:solidFill>
-              <a:srgbClr val="888888"/>
-            </a:solidFill>
-            <a:prstDash val="solid"/>
-            <a:round/>
-          </a:ln>
-        </c:spPr>
-        <c:txPr>
-          <a:bodyPr/>
-          <a:lstStyle/>
-          <a:p>
-            <a:pPr>
-              <a:defRPr sz="800" b="0" i="0" u="none" strike="noStrike">
-                <a:solidFill>
-                  <a:srgbClr val="A0A0A0"/>
-                </a:solidFill>
-                <a:latin typeface="Kalameh"/>
-              </a:defRPr>
-            </a:pPr>
-            <a:endParaRPr lang="en-US"/>
-          </a:p>
-        </c:txPr>
-        <c:crossAx val="2094734552"/>
-        <c:crosses val="autoZero"/>
-        <c:auto val="1"/>
-        <c:lblAlgn val="ctr"/>
-        <c:noMultiLvlLbl val="1"/>
-      </c:catAx>
-      <c:valAx>
-        <c:axId val="2094734552"/>
-        <c:scaling>
-          <c:orientation val="minMax"/>
-        </c:scaling>
-        <c:delete val="0"/>
-        <c:axPos val="l"/>
-        <c:majorGridlines>
-          <c:spPr>
-            <a:ln w="12700" cap="flat">
-              <a:solidFill>
-                <a:srgbClr val="888888"/>
-              </a:solidFill>
-              <a:prstDash val="solid"/>
-              <a:round/>
-            </a:ln>
-          </c:spPr>
-        </c:majorGridlines>
-        <c:numFmt formatCode="General" sourceLinked="0"/>
-        <c:majorTickMark val="out"/>
-        <c:minorTickMark val="none"/>
-        <c:tickLblPos val="nextTo"/>
-        <c:spPr>
-          <a:ln w="12700" cap="flat">
-            <a:solidFill>
-              <a:srgbClr val="888888"/>
-            </a:solidFill>
-            <a:prstDash val="solid"/>
-            <a:round/>
-          </a:ln>
-        </c:spPr>
-        <c:txPr>
-          <a:bodyPr/>
-          <a:lstStyle/>
-          <a:p>
-            <a:pPr>
-              <a:defRPr sz="800" b="0" i="0" u="none" strike="noStrike">
-                <a:solidFill>
-                  <a:srgbClr val="A0A0A0"/>
-                </a:solidFill>
-                <a:latin typeface="Kalameh"/>
-              </a:defRPr>
-            </a:pPr>
-            <a:endParaRPr lang="en-US"/>
-          </a:p>
-        </c:txPr>
-        <c:crossAx val="2094734554"/>
-        <c:crosses val="autoZero"/>
-        <c:crossBetween val="between"/>
-      </c:valAx>
-      <c:spPr>
-        <a:noFill/>
-        <a:ln w="12700" cap="flat">
-          <a:solidFill>
-            <a:srgbClr val="FFFFFF"/>
-          </a:solidFill>
-        </a:ln>
-        <a:effectLst/>
-      </c:spPr>
-    </c:plotArea>
-    <c:legend>
-      <c:legendPos val="b"/>
-      <c:overlay val="0"/>
-      <c:txPr>
-        <a:bodyPr/>
-        <a:lstStyle/>
-        <a:p>
-          <a:pPr>
-            <a:defRPr sz="800">
-              <a:latin typeface="Kalameh"/>
-              <a:cs typeface="Kalameh"/>
-            </a:defRPr>
-          </a:pPr>
-          <a:endParaRPr lang="en-US"/>
-        </a:p>
-      </c:txPr>
-    </c:legend>
-    <c:plotVisOnly val="1"/>
-    <c:dispBlanksAs val="span"/>
-  </c:chart>
-  <c:spPr>
-    <a:noFill/>
-    <a:ln>
-      <a:noFill/>
-    </a:ln>
-    <a:effectLst/>
-  </c:spPr>
-  <c:externalData r:id="rId1">
-    <c:autoUpdate val="0"/>
-  </c:externalData>
-</c:chartSpace>
 </file>
 
 <file path=ppt/notesMasters/notesMaster1.xml><?xml version="1.0" encoding="utf-8"?>
@@ -851,9 +509,10 @@
           <a:p>
             <a:r>
               <a:rPr lang="en-US" dirty="0"/>
-              <a:t>[Sources]
-- [S3]
-- Image: https://www.pexels.com/photo/garage-place-for-electric-car-20589759/</a:t>
+              <a:t>در این ارائه بررسی می‌کنیم که چگونه ادغام زیرساخت شارژ با مراکز تجاری، تجربه رانندگان خودروهای برقی را دگرگون می‌کند.
+[Sources]
+- [S4]
+- Image: https://www.pexels.com/photo/public-charger-for-electric-vehicles-4678065/</a:t>
             </a:r>
             <a:endParaRPr lang="en-US" dirty="0"/>
           </a:p>
@@ -941,10 +600,11 @@
           <a:p>
             <a:r>
               <a:rPr lang="en-US" dirty="0"/>
-              <a:t>[Sources]
-- [S3]
-- [S4]
-- Image: https://www.pexels.com/photo/electric-car-charging-at-station-with-multiple-chargers-37576187/</a:t>
+              <a:t>داده‌های تحقیق نشان می‌دهد رانندگان بیش از هر چیز به زمان شارژ، دسترسی به شارژ سریع و چالش‌های نصب خانگی توجه دارند.
+[Sources]
+- [S1]
+- [S5]
+- [S11]</a:t>
             </a:r>
             <a:endParaRPr lang="en-US" dirty="0"/>
           </a:p>
@@ -1032,9 +692,11 @@
           <a:p>
             <a:r>
               <a:rPr lang="en-US" dirty="0"/>
-              <a:t>[Sources]
-- [S3]
-- [S9]</a:t>
+              <a:t>این رویکرد نه تنها مشکل توقف‌های طولانی را حل می‌کند، بلکه ارزش افزوده اقتصادی برای کسب‌وکارهای خرده‌فروشی خلق می‌کند.
+[Sources]
+- [S1]
+- [S4]
+- Image: https://www.pexels.com/photo/charging-of-a-vehicle-in-a-chraging-station-9799740/</a:t>
             </a:r>
             <a:endParaRPr lang="en-US" dirty="0"/>
           </a:p>
@@ -1122,9 +784,11 @@
           <a:p>
             <a:r>
               <a:rPr lang="en-US" dirty="0"/>
-              <a:t>[Sources]
+              <a:t>برای پایداری بلندمدت، طراحی ماژولار و رعایت استانداردهای امنیتی و ارتباطی در مراکز تجاری ضروری است.
+[Sources]
 - [S3]
-- [S2]</a:t>
+- [S7]
+- [S10]</a:t>
             </a:r>
             <a:endParaRPr lang="en-US" dirty="0"/>
           </a:p>
@@ -1212,9 +876,11 @@
           <a:p>
             <a:r>
               <a:rPr lang="en-US" dirty="0"/>
-              <a:t>[Sources]
-- [S8]
-- [S2]</a:t>
+              <a:t>این فرآیند یکپارچه، تجربه راننده را از یک دغدغه فنی به بخشی لذت‌بخش از زندگی روزمره تبدیل می‌کند.
+[Sources]
+- [S1]
+- [S4]
+- [S7]</a:t>
             </a:r>
             <a:endParaRPr lang="en-US" dirty="0"/>
           </a:p>
@@ -1302,10 +968,11 @@
           <a:p>
             <a:r>
               <a:rPr lang="en-US" dirty="0"/>
-              <a:t>[Sources]
-- [S3]
+              <a:t>استفاده از مدل‌های موفق جهانی نشان می‌دهد که شارژ مقصدی الگوی سفر با خودروهای برقی را به شدت تسهیل می‌کند.
+[Sources]
+- [S4]
 - [S6]
-- Image: https://www.pexels.com/photo/ev-charger-in-california-usa-9800004/</a:t>
+- Image: https://www.pexels.com/photo/electric-cars-charging-on-stations-9800029/</a:t>
             </a:r>
             <a:endParaRPr lang="en-US" dirty="0"/>
           </a:p>
@@ -1393,10 +1060,12 @@
           <a:p>
             <a:r>
               <a:rPr lang="en-US" dirty="0"/>
-              <a:t>[Sources]
-- [S2]
+              <a:t>این زیرساخت‌ها فراتر از شارژ خودرو، به پایداری شبکه برق و کاهش هزینه‌های بلندمدت کمک شایانی می‌کنند.
+[Sources]
 - [S3]
-- [S8]</a:t>
+- [S6]
+- [S10]
+- Image: https://www.pexels.com/photo/electric-vehicle-charging-station-in-urban-area-37851831/</a:t>
             </a:r>
             <a:endParaRPr lang="en-US" dirty="0"/>
           </a:p>
@@ -1484,10 +1153,11 @@
           <a:p>
             <a:r>
               <a:rPr lang="en-US" dirty="0"/>
-              <a:t>[Sources]
-- [S2]
+              <a:t>با توسعه این زیرساخت‌ها، زمان شارژ دیگر یک مانع نخواهد بود، بلکه بخشی اثربخش از سفر و خرید روزانه خواهد شد.
+[Sources]
+- [S1]
 - [S3]
-- [S8]</a:t>
+- [S4]</a:t>
             </a:r>
             <a:endParaRPr lang="en-US" dirty="0"/>
           </a:p>
@@ -1565,7 +1235,7 @@
     <p:bg>
       <p:bgPr>
         <a:solidFill>
-          <a:srgbClr val="0F2027"/>
+          <a:srgbClr val="F8FAFC"/>
         </a:solidFill>
       </p:bgPr>
     </p:bg>
@@ -1896,7 +1566,7 @@
         </p:nvPicPr>
         <p:blipFill>
           <a:blip r:embed="rId1"/>
-          <a:srcRect l="0" r="0" t="7834" b="7834"/>
+          <a:srcRect l="0" r="0" t="7800" b="7800"/>
           <a:stretch/>
         </p:blipFill>
         <p:spPr>
@@ -1982,13 +1652,13 @@
             <a:avLst/>
           </a:prstGeom>
           <a:solidFill>
-            <a:srgbClr val="EF476F">
+            <a:srgbClr val="F59E0B">
               <a:alpha val="30000"/>
             </a:srgbClr>
           </a:solidFill>
           <a:ln w="12700">
             <a:solidFill>
-              <a:srgbClr val="EF476F">
+              <a:srgbClr val="F59E0B">
                 <a:alpha val="0"/>
               </a:srgbClr>
             </a:solidFill>
@@ -2011,11 +1681,11 @@
             <a:avLst/>
           </a:prstGeom>
           <a:solidFill>
-            <a:srgbClr val="FFD166"/>
+            <a:srgbClr val="10B981"/>
           </a:solidFill>
           <a:ln w="12700">
             <a:solidFill>
-              <a:srgbClr val="FFD166">
+              <a:srgbClr val="10B981">
                 <a:alpha val="0"/>
               </a:srgbClr>
             </a:solidFill>
@@ -2044,21 +1714,21 @@
           <a:bodyPr wrap="square" lIns="0" tIns="0" rIns="0" bIns="0" rtlCol="0" anchor="ctr"/>
           <a:lstStyle/>
           <a:p>
-            <a:pPr algn="l" indent="0" marL="0">
-              <a:buNone/>
-            </a:pPr>
-            <a:r>
-              <a:rPr lang="en-US" altLang="en-US" sz="1000" b="1" dirty="0">
-                <a:solidFill>
-                  <a:srgbClr val="EF476F"/>
-                </a:solidFill>
-                <a:latin typeface="Kalameh" pitchFamily="34" charset="0"/>
-                <a:ea typeface="Kalameh" pitchFamily="34" charset="-122"/>
-                <a:cs typeface="Kalameh" pitchFamily="34" charset="-120"/>
-              </a:rPr>
-              <a:t>01</a:t>
-            </a:r>
-            <a:endParaRPr lang="en-US" sz="1000" dirty="0"/>
+            <a:pPr rtl="1" algn="r" indent="0" marL="0">
+              <a:buNone/>
+            </a:pPr>
+            <a:r>
+              <a:rPr lang="fa-IR" altLang="en-US" sz="1000" b="1" dirty="0">
+                <a:solidFill>
+                  <a:srgbClr val="F59E0B"/>
+                </a:solidFill>
+                <a:latin typeface="Kalameh" pitchFamily="34" charset="0"/>
+                <a:ea typeface="Kalameh" pitchFamily="34" charset="-122"/>
+                <a:cs typeface="Kalameh" pitchFamily="34" charset="-120"/>
+              </a:rPr>
+              <a:t>پژوهش کاربردی رفتار مصرف‌کننده</a:t>
+            </a:r>
+            <a:endParaRPr lang="fa-IR" sz="1000" dirty="0"/>
           </a:p>
         </p:txBody>
       </p:sp>
@@ -2089,7 +1759,7 @@
               <a:buNone/>
             </a:pPr>
             <a:r>
-              <a:rPr lang="fa-IR" altLang="en-US" sz="3200" b="1" dirty="0">
+              <a:rPr lang="fa-IR" altLang="en-US" sz="2900" b="1" dirty="0">
                 <a:solidFill>
                   <a:srgbClr val="FFFFFF"/>
                 </a:solidFill>
@@ -2097,9 +1767,9 @@
                 <a:ea typeface="Kalameh" pitchFamily="34" charset="-122"/>
                 <a:cs typeface="Kalameh" pitchFamily="34" charset="-120"/>
               </a:rPr>
-              <a:t>شارژ سریع در فروشگاه‌ها: توقف خرید، فرصتی برای شارژ</a:t>
-            </a:r>
-            <a:endParaRPr lang="fa-IR" sz="3200" dirty="0"/>
+              <a:t>شارژ سریع خودرو برقی در فروشگاه‌ها</a:t>
+            </a:r>
+            <a:endParaRPr lang="fa-IR" sz="2900" dirty="0"/>
           </a:p>
         </p:txBody>
       </p:sp>
@@ -2138,7 +1808,7 @@
                 <a:ea typeface="Kalameh" pitchFamily="34" charset="-122"/>
                 <a:cs typeface="Kalameh" pitchFamily="34" charset="-120"/>
               </a:rPr>
-              <a:t>چگونه زیرساخت‌های هوشمند، سفرهای برقی را آسان‌تر می‌کنند</a:t>
+              <a:t>چگونه زمان انتظار برای شارژ به زمان مفید سفر و خرید تبدیل می‌شود</a:t>
             </a:r>
             <a:endParaRPr lang="fa-IR" sz="1400" dirty="0"/>
           </a:p>
@@ -2161,7 +1831,7 @@
           <a:noFill/>
           <a:ln w="27940">
             <a:solidFill>
-              <a:srgbClr val="FFD166"/>
+              <a:srgbClr val="10B981"/>
             </a:solidFill>
             <a:prstDash val="solid"/>
             <a:headEnd type="none"/>
@@ -2401,7 +2071,7 @@
                 <a:ea typeface="Kalameh" pitchFamily="34" charset="-122"/>
                 <a:cs typeface="Kalameh" pitchFamily="34" charset="-120"/>
               </a:rPr>
-              <a:t>Jakub Zerdzicki</a:t>
+              <a:t>Reinhard Bruckner</a:t>
             </a:r>
             <a:endParaRPr lang="en-US" sz="620" dirty="0"/>
           </a:p>
@@ -2421,7 +2091,807 @@
     <p:bg>
       <p:bgPr>
         <a:solidFill>
-          <a:srgbClr val="0F2027"/>
+          <a:srgbClr val="F8FAFC"/>
+        </a:solidFill>
+      </p:bgPr>
+    </p:bg>
+    <p:spTree>
+      <p:nvGrpSpPr>
+        <p:cNvPr id="1" name=""/>
+        <p:cNvGrpSpPr/>
+        <p:nvPr/>
+      </p:nvGrpSpPr>
+      <p:grpSpPr>
+        <a:xfrm>
+          <a:off x="0" y="0"/>
+          <a:ext cx="0" cy="0"/>
+          <a:chOff x="0" y="0"/>
+          <a:chExt cx="0" cy="0"/>
+        </a:xfrm>
+      </p:grpSpPr>
+      <p:sp>
+        <p:nvSpPr>
+          <p:cNvPr id="2" name="Shape 0"/>
+          <p:cNvSpPr/>
+          <p:nvPr/>
+        </p:nvSpPr>
+        <p:spPr>
+          <a:xfrm>
+            <a:off x="11503152" y="347472"/>
+            <a:ext cx="155448" cy="310896"/>
+          </a:xfrm>
+          <a:prstGeom prst="rect">
+            <a:avLst/>
+          </a:prstGeom>
+          <a:solidFill>
+            <a:srgbClr val="10B981"/>
+          </a:solidFill>
+          <a:ln w="12700">
+            <a:solidFill>
+              <a:srgbClr val="10B981">
+                <a:alpha val="0"/>
+              </a:srgbClr>
+            </a:solidFill>
+            <a:prstDash val="solid"/>
+          </a:ln>
+        </p:spPr>
+      </p:sp>
+      <p:sp>
+        <p:nvSpPr>
+          <p:cNvPr id="3" name="Text 1"/>
+          <p:cNvSpPr txBox="1"/>
+          <p:nvPr/>
+        </p:nvSpPr>
+        <p:spPr>
+          <a:xfrm>
+            <a:off x="5166360" y="329184"/>
+            <a:ext cx="6217920" cy="365760"/>
+          </a:xfrm>
+          <a:prstGeom prst="rect">
+            <a:avLst/>
+          </a:prstGeom>
+          <a:noFill/>
+          <a:ln/>
+        </p:spPr>
+        <p:txBody>
+          <a:bodyPr wrap="square" lIns="0" tIns="0" rIns="0" bIns="0" rtlCol="0" anchor="ctr"/>
+          <a:lstStyle/>
+          <a:p>
+            <a:pPr rtl="1" algn="r" indent="0" marL="0">
+              <a:buNone/>
+            </a:pPr>
+            <a:r>
+              <a:rPr lang="fa-IR" altLang="en-US" sz="1050" b="1" spc="50" kern="0" dirty="0">
+                <a:solidFill>
+                  <a:srgbClr val="10B981"/>
+                </a:solidFill>
+                <a:latin typeface="Kalameh" pitchFamily="34" charset="0"/>
+                <a:ea typeface="Kalameh" pitchFamily="34" charset="-122"/>
+                <a:cs typeface="Kalameh" pitchFamily="34" charset="-120"/>
+              </a:rPr>
+              <a:t>مطالعات رفتار مصرف‌کننده</a:t>
+            </a:r>
+            <a:endParaRPr lang="fa-IR" sz="1050" dirty="0"/>
+          </a:p>
+        </p:txBody>
+      </p:sp>
+      <p:sp>
+        <p:nvSpPr>
+          <p:cNvPr id="4" name="Text 2"/>
+          <p:cNvSpPr txBox="1"/>
+          <p:nvPr/>
+        </p:nvSpPr>
+        <p:spPr>
+          <a:xfrm>
+            <a:off x="5166360" y="731520"/>
+            <a:ext cx="6492240" cy="868680"/>
+          </a:xfrm>
+          <a:prstGeom prst="rect">
+            <a:avLst/>
+          </a:prstGeom>
+          <a:noFill/>
+          <a:ln/>
+        </p:spPr>
+        <p:txBody>
+          <a:bodyPr wrap="square" lIns="0" tIns="0" rIns="0" bIns="0" rtlCol="0" anchor="t"/>
+          <a:lstStyle/>
+          <a:p>
+            <a:pPr rtl="1" algn="r" indent="0" marL="0">
+              <a:buNone/>
+            </a:pPr>
+            <a:r>
+              <a:rPr lang="fa-IR" altLang="en-US" sz="2400" b="1" dirty="0">
+                <a:solidFill>
+                  <a:srgbClr val="1E293B"/>
+                </a:solidFill>
+                <a:latin typeface="Kalameh" pitchFamily="34" charset="0"/>
+                <a:ea typeface="Kalameh" pitchFamily="34" charset="-122"/>
+                <a:cs typeface="Kalameh" pitchFamily="34" charset="-120"/>
+              </a:rPr>
+              <a:t>دغدغه‌های اصلی رانندگان خودروهای برقی</a:t>
+            </a:r>
+            <a:endParaRPr lang="fa-IR" sz="2400" dirty="0"/>
+          </a:p>
+        </p:txBody>
+      </p:sp>
+      <p:sp>
+        <p:nvSpPr>
+          <p:cNvPr id="5" name="Text 3"/>
+          <p:cNvSpPr txBox="1"/>
+          <p:nvPr/>
+        </p:nvSpPr>
+        <p:spPr>
+          <a:xfrm>
+            <a:off x="5166360" y="1645920"/>
+            <a:ext cx="6492240" cy="594360"/>
+          </a:xfrm>
+          <a:prstGeom prst="rect">
+            <a:avLst/>
+          </a:prstGeom>
+          <a:noFill/>
+          <a:ln/>
+        </p:spPr>
+        <p:txBody>
+          <a:bodyPr wrap="square" lIns="0" tIns="0" rIns="0" bIns="0" rtlCol="0" anchor="t"/>
+          <a:lstStyle/>
+          <a:p>
+            <a:pPr rtl="1" algn="r" indent="0" marL="0">
+              <a:buNone/>
+            </a:pPr>
+            <a:r>
+              <a:rPr lang="fa-IR" altLang="en-US" sz="1250" dirty="0">
+                <a:solidFill>
+                  <a:srgbClr val="64748B"/>
+                </a:solidFill>
+                <a:latin typeface="Kalameh" pitchFamily="34" charset="0"/>
+                <a:ea typeface="Kalameh" pitchFamily="34" charset="-122"/>
+                <a:cs typeface="Kalameh" pitchFamily="34" charset="-120"/>
+              </a:rPr>
+              <a:t>تحلیل اهمیت زمان، سرعت و دسترسی در انتخاب ایستگاه‌های شارژ</a:t>
+            </a:r>
+            <a:endParaRPr lang="fa-IR" sz="1250" dirty="0"/>
+          </a:p>
+        </p:txBody>
+      </p:sp>
+      <p:sp>
+        <p:nvSpPr>
+          <p:cNvPr id="6" name="Shape 4"/>
+          <p:cNvSpPr/>
+          <p:nvPr/>
+        </p:nvSpPr>
+        <p:spPr>
+          <a:xfrm>
+            <a:off x="502920" y="2304288"/>
+            <a:ext cx="3593592" cy="3794760"/>
+          </a:xfrm>
+          <a:prstGeom prst="roundRect">
+            <a:avLst/>
+          </a:prstGeom>
+          <a:solidFill>
+            <a:srgbClr val="FFFFFF"/>
+          </a:solidFill>
+          <a:ln w="8890">
+            <a:solidFill>
+              <a:srgbClr val="DCE4EE">
+                <a:alpha val="65000"/>
+              </a:srgbClr>
+            </a:solidFill>
+            <a:prstDash val="solid"/>
+          </a:ln>
+          <a:effectLst>
+            <a:outerShdw sx="100000" sy="100000" kx="0" ky="0" algn="bl" rotWithShape="0" blurRad="25400" dist="13970" dir="2700000">
+              <a:srgbClr val="000000">
+                <a:alpha val="16000"/>
+              </a:srgbClr>
+            </a:outerShdw>
+          </a:effectLst>
+        </p:spPr>
+      </p:sp>
+      <p:sp>
+        <p:nvSpPr>
+          <p:cNvPr id="7" name="Shape 5"/>
+          <p:cNvSpPr/>
+          <p:nvPr/>
+        </p:nvSpPr>
+        <p:spPr>
+          <a:xfrm>
+            <a:off x="3383280" y="2624328"/>
+            <a:ext cx="457200" cy="457200"/>
+          </a:xfrm>
+          <a:prstGeom prst="ellipse">
+            <a:avLst/>
+          </a:prstGeom>
+          <a:solidFill>
+            <a:srgbClr val="10B981"/>
+          </a:solidFill>
+          <a:ln w="12700">
+            <a:solidFill>
+              <a:srgbClr val="10B981">
+                <a:alpha val="0"/>
+              </a:srgbClr>
+            </a:solidFill>
+            <a:prstDash val="solid"/>
+          </a:ln>
+        </p:spPr>
+      </p:sp>
+      <p:pic>
+        <p:nvPicPr>
+          <p:cNvPr id="8" name="Image 0" descr="preencoded.png">    </p:cNvPr>
+          <p:cNvPicPr>
+            <a:picLocks noChangeAspect="1"/>
+          </p:cNvPicPr>
+          <p:nvPr/>
+        </p:nvPicPr>
+        <p:blipFill>
+          <a:blip r:embed="rId1">
+            <a:extLst>
+              <a:ext uri="{96DAC541-7B7A-43D3-8B79-37D633B846F1}">
+                <asvg:svgBlip xmlns:asvg="http://schemas.microsoft.com/office/drawing/2016/SVG/main" r:embed="rId2"/>
+              </a:ext>
+            </a:extLst>
+          </a:blip>
+          <a:stretch>
+            <a:fillRect/>
+          </a:stretch>
+        </p:blipFill>
+        <p:spPr>
+          <a:xfrm>
+            <a:off x="3488436" y="2729484"/>
+            <a:ext cx="246888" cy="246888"/>
+          </a:xfrm>
+          <a:prstGeom prst="rect">
+            <a:avLst/>
+          </a:prstGeom>
+        </p:spPr>
+      </p:pic>
+      <p:sp>
+        <p:nvSpPr>
+          <p:cNvPr id="9" name="Text 6"/>
+          <p:cNvSpPr txBox="1"/>
+          <p:nvPr/>
+        </p:nvSpPr>
+        <p:spPr>
+          <a:xfrm>
+            <a:off x="777240" y="3081528"/>
+            <a:ext cx="3044952" cy="347472"/>
+          </a:xfrm>
+          <a:prstGeom prst="rect">
+            <a:avLst/>
+          </a:prstGeom>
+          <a:noFill/>
+          <a:ln/>
+        </p:spPr>
+        <p:txBody>
+          <a:bodyPr wrap="square" lIns="0" tIns="0" rIns="0" bIns="0" rtlCol="0" anchor="ctr"/>
+          <a:lstStyle/>
+          <a:p>
+            <a:pPr rtl="1" algn="r" indent="0" marL="0">
+              <a:buNone/>
+            </a:pPr>
+            <a:r>
+              <a:rPr lang="fa-IR" altLang="en-US" sz="1300" b="1" dirty="0">
+                <a:solidFill>
+                  <a:srgbClr val="1E293B"/>
+                </a:solidFill>
+                <a:latin typeface="Kalameh" pitchFamily="34" charset="0"/>
+                <a:ea typeface="Kalameh" pitchFamily="34" charset="-122"/>
+                <a:cs typeface="Kalameh" pitchFamily="34" charset="-120"/>
+              </a:rPr>
+              <a:t>چالش شارژ خانگی</a:t>
+            </a:r>
+            <a:endParaRPr lang="fa-IR" sz="1300" dirty="0"/>
+          </a:p>
+        </p:txBody>
+      </p:sp>
+      <p:sp>
+        <p:nvSpPr>
+          <p:cNvPr id="10" name="Text 7"/>
+          <p:cNvSpPr txBox="1"/>
+          <p:nvPr/>
+        </p:nvSpPr>
+        <p:spPr>
+          <a:xfrm>
+            <a:off x="777240" y="3511296"/>
+            <a:ext cx="3044952" cy="2350008"/>
+          </a:xfrm>
+          <a:prstGeom prst="rect">
+            <a:avLst/>
+          </a:prstGeom>
+          <a:noFill/>
+          <a:ln/>
+        </p:spPr>
+        <p:txBody>
+          <a:bodyPr wrap="square" lIns="0" tIns="0" rIns="0" bIns="0" rtlCol="0" anchor="t"/>
+          <a:lstStyle/>
+          <a:p>
+            <a:pPr rtl="1" algn="r" indent="0" marL="0">
+              <a:buNone/>
+            </a:pPr>
+            <a:r>
+              <a:rPr lang="fa-IR" altLang="en-US" sz="1200" dirty="0">
+                <a:solidFill>
+                  <a:srgbClr val="64748B"/>
+                </a:solidFill>
+                <a:latin typeface="Kalameh" pitchFamily="34" charset="0"/>
+                <a:ea typeface="Kalameh" pitchFamily="34" charset="-122"/>
+                <a:cs typeface="Kalameh" pitchFamily="34" charset="-120"/>
+              </a:rPr>
+              <a:t>بسیاری از مالکان خودروهای برقی با موانعی مانند محدودیت‌های نصب تجهیزات در محل سکونت مواجه هستند.</a:t>
+            </a:r>
+            <a:endParaRPr lang="fa-IR" sz="1200" dirty="0"/>
+          </a:p>
+        </p:txBody>
+      </p:sp>
+      <p:sp>
+        <p:nvSpPr>
+          <p:cNvPr id="11" name="Shape 8"/>
+          <p:cNvSpPr/>
+          <p:nvPr/>
+        </p:nvSpPr>
+        <p:spPr>
+          <a:xfrm>
+            <a:off x="4297680" y="2304288"/>
+            <a:ext cx="3593592" cy="3794760"/>
+          </a:xfrm>
+          <a:prstGeom prst="roundRect">
+            <a:avLst/>
+          </a:prstGeom>
+          <a:solidFill>
+            <a:srgbClr val="FFFFFF"/>
+          </a:solidFill>
+          <a:ln w="8890">
+            <a:solidFill>
+              <a:srgbClr val="DCE4EE">
+                <a:alpha val="65000"/>
+              </a:srgbClr>
+            </a:solidFill>
+            <a:prstDash val="solid"/>
+          </a:ln>
+          <a:effectLst>
+            <a:outerShdw sx="100000" sy="100000" kx="0" ky="0" algn="bl" rotWithShape="0" blurRad="25400" dist="13970" dir="2700000">
+              <a:srgbClr val="000000">
+                <a:alpha val="16000"/>
+              </a:srgbClr>
+            </a:outerShdw>
+          </a:effectLst>
+        </p:spPr>
+      </p:sp>
+      <p:sp>
+        <p:nvSpPr>
+          <p:cNvPr id="12" name="Shape 9"/>
+          <p:cNvSpPr/>
+          <p:nvPr/>
+        </p:nvSpPr>
+        <p:spPr>
+          <a:xfrm>
+            <a:off x="7178040" y="2624328"/>
+            <a:ext cx="457200" cy="457200"/>
+          </a:xfrm>
+          <a:prstGeom prst="ellipse">
+            <a:avLst/>
+          </a:prstGeom>
+          <a:solidFill>
+            <a:srgbClr val="F59E0B"/>
+          </a:solidFill>
+          <a:ln w="12700">
+            <a:solidFill>
+              <a:srgbClr val="F59E0B">
+                <a:alpha val="0"/>
+              </a:srgbClr>
+            </a:solidFill>
+            <a:prstDash val="solid"/>
+          </a:ln>
+        </p:spPr>
+      </p:sp>
+      <p:pic>
+        <p:nvPicPr>
+          <p:cNvPr id="13" name="Image 1" descr="preencoded.png">    </p:cNvPr>
+          <p:cNvPicPr>
+            <a:picLocks noChangeAspect="1"/>
+          </p:cNvPicPr>
+          <p:nvPr/>
+        </p:nvPicPr>
+        <p:blipFill>
+          <a:blip r:embed="rId3">
+            <a:extLst>
+              <a:ext uri="{96DAC541-7B7A-43D3-8B79-37D633B846F1}">
+                <asvg:svgBlip xmlns:asvg="http://schemas.microsoft.com/office/drawing/2016/SVG/main" r:embed="rId4"/>
+              </a:ext>
+            </a:extLst>
+          </a:blip>
+          <a:stretch>
+            <a:fillRect/>
+          </a:stretch>
+        </p:blipFill>
+        <p:spPr>
+          <a:xfrm>
+            <a:off x="7283196" y="2729484"/>
+            <a:ext cx="246888" cy="246888"/>
+          </a:xfrm>
+          <a:prstGeom prst="rect">
+            <a:avLst/>
+          </a:prstGeom>
+        </p:spPr>
+      </p:pic>
+      <p:sp>
+        <p:nvSpPr>
+          <p:cNvPr id="14" name="Text 10"/>
+          <p:cNvSpPr txBox="1"/>
+          <p:nvPr/>
+        </p:nvSpPr>
+        <p:spPr>
+          <a:xfrm>
+            <a:off x="4572000" y="3081528"/>
+            <a:ext cx="3044952" cy="347472"/>
+          </a:xfrm>
+          <a:prstGeom prst="rect">
+            <a:avLst/>
+          </a:prstGeom>
+          <a:noFill/>
+          <a:ln/>
+        </p:spPr>
+        <p:txBody>
+          <a:bodyPr wrap="square" lIns="0" tIns="0" rIns="0" bIns="0" rtlCol="0" anchor="ctr"/>
+          <a:lstStyle/>
+          <a:p>
+            <a:pPr rtl="1" algn="r" indent="0" marL="0">
+              <a:buNone/>
+            </a:pPr>
+            <a:r>
+              <a:rPr lang="fa-IR" altLang="en-US" sz="1300" b="1" dirty="0">
+                <a:solidFill>
+                  <a:srgbClr val="1E293B"/>
+                </a:solidFill>
+                <a:latin typeface="Kalameh" pitchFamily="34" charset="0"/>
+                <a:ea typeface="Kalameh" pitchFamily="34" charset="-122"/>
+                <a:cs typeface="Kalameh" pitchFamily="34" charset="-120"/>
+              </a:rPr>
+              <a:t>شارژ سریع عمومی</a:t>
+            </a:r>
+            <a:endParaRPr lang="fa-IR" sz="1300" dirty="0"/>
+          </a:p>
+        </p:txBody>
+      </p:sp>
+      <p:sp>
+        <p:nvSpPr>
+          <p:cNvPr id="15" name="Text 11"/>
+          <p:cNvSpPr txBox="1"/>
+          <p:nvPr/>
+        </p:nvSpPr>
+        <p:spPr>
+          <a:xfrm>
+            <a:off x="4572000" y="3511296"/>
+            <a:ext cx="3044952" cy="2350008"/>
+          </a:xfrm>
+          <a:prstGeom prst="rect">
+            <a:avLst/>
+          </a:prstGeom>
+          <a:noFill/>
+          <a:ln/>
+        </p:spPr>
+        <p:txBody>
+          <a:bodyPr wrap="square" lIns="0" tIns="0" rIns="0" bIns="0" rtlCol="0" anchor="t"/>
+          <a:lstStyle/>
+          <a:p>
+            <a:pPr rtl="1" algn="r" indent="0" marL="0">
+              <a:buNone/>
+            </a:pPr>
+            <a:r>
+              <a:rPr lang="fa-IR" altLang="en-US" sz="1200" dirty="0">
+                <a:solidFill>
+                  <a:srgbClr val="64748B"/>
+                </a:solidFill>
+                <a:latin typeface="Kalameh" pitchFamily="34" charset="0"/>
+                <a:ea typeface="Kalameh" pitchFamily="34" charset="-122"/>
+                <a:cs typeface="Kalameh" pitchFamily="34" charset="-120"/>
+              </a:rPr>
+              <a:t>نیاز به حالت‌های شارژ سریع و دسترسی آسان در سطح شهر و سفرهای بین‌شهری اهمیت بالایی دارد.</a:t>
+            </a:r>
+            <a:endParaRPr lang="fa-IR" sz="1200" dirty="0"/>
+          </a:p>
+        </p:txBody>
+      </p:sp>
+      <p:sp>
+        <p:nvSpPr>
+          <p:cNvPr id="16" name="Shape 12"/>
+          <p:cNvSpPr/>
+          <p:nvPr/>
+        </p:nvSpPr>
+        <p:spPr>
+          <a:xfrm>
+            <a:off x="8092440" y="2304288"/>
+            <a:ext cx="3593592" cy="3794760"/>
+          </a:xfrm>
+          <a:prstGeom prst="roundRect">
+            <a:avLst/>
+          </a:prstGeom>
+          <a:solidFill>
+            <a:srgbClr val="FFFFFF"/>
+          </a:solidFill>
+          <a:ln w="8890">
+            <a:solidFill>
+              <a:srgbClr val="DCE4EE">
+                <a:alpha val="65000"/>
+              </a:srgbClr>
+            </a:solidFill>
+            <a:prstDash val="solid"/>
+          </a:ln>
+          <a:effectLst>
+            <a:outerShdw sx="100000" sy="100000" kx="0" ky="0" algn="bl" rotWithShape="0" blurRad="25400" dist="13970" dir="2700000">
+              <a:srgbClr val="000000">
+                <a:alpha val="16000"/>
+              </a:srgbClr>
+            </a:outerShdw>
+          </a:effectLst>
+        </p:spPr>
+      </p:sp>
+      <p:sp>
+        <p:nvSpPr>
+          <p:cNvPr id="17" name="Shape 13"/>
+          <p:cNvSpPr/>
+          <p:nvPr/>
+        </p:nvSpPr>
+        <p:spPr>
+          <a:xfrm>
+            <a:off x="10972800" y="2624328"/>
+            <a:ext cx="457200" cy="457200"/>
+          </a:xfrm>
+          <a:prstGeom prst="ellipse">
+            <a:avLst/>
+          </a:prstGeom>
+          <a:solidFill>
+            <a:srgbClr val="0284C7"/>
+          </a:solidFill>
+          <a:ln w="12700">
+            <a:solidFill>
+              <a:srgbClr val="0284C7">
+                <a:alpha val="0"/>
+              </a:srgbClr>
+            </a:solidFill>
+            <a:prstDash val="solid"/>
+          </a:ln>
+        </p:spPr>
+      </p:sp>
+      <p:pic>
+        <p:nvPicPr>
+          <p:cNvPr id="18" name="Image 2" descr="preencoded.png">    </p:cNvPr>
+          <p:cNvPicPr>
+            <a:picLocks noChangeAspect="1"/>
+          </p:cNvPicPr>
+          <p:nvPr/>
+        </p:nvPicPr>
+        <p:blipFill>
+          <a:blip r:embed="rId5">
+            <a:extLst>
+              <a:ext uri="{96DAC541-7B7A-43D3-8B79-37D633B846F1}">
+                <asvg:svgBlip xmlns:asvg="http://schemas.microsoft.com/office/drawing/2016/SVG/main" r:embed="rId6"/>
+              </a:ext>
+            </a:extLst>
+          </a:blip>
+          <a:stretch>
+            <a:fillRect/>
+          </a:stretch>
+        </p:blipFill>
+        <p:spPr>
+          <a:xfrm>
+            <a:off x="11077956" y="2729484"/>
+            <a:ext cx="246888" cy="246888"/>
+          </a:xfrm>
+          <a:prstGeom prst="rect">
+            <a:avLst/>
+          </a:prstGeom>
+        </p:spPr>
+      </p:pic>
+      <p:sp>
+        <p:nvSpPr>
+          <p:cNvPr id="19" name="Text 14"/>
+          <p:cNvSpPr txBox="1"/>
+          <p:nvPr/>
+        </p:nvSpPr>
+        <p:spPr>
+          <a:xfrm>
+            <a:off x="8366760" y="3081528"/>
+            <a:ext cx="3044952" cy="347472"/>
+          </a:xfrm>
+          <a:prstGeom prst="rect">
+            <a:avLst/>
+          </a:prstGeom>
+          <a:noFill/>
+          <a:ln/>
+        </p:spPr>
+        <p:txBody>
+          <a:bodyPr wrap="square" lIns="0" tIns="0" rIns="0" bIns="0" rtlCol="0" anchor="ctr"/>
+          <a:lstStyle/>
+          <a:p>
+            <a:pPr rtl="1" algn="r" indent="0" marL="0">
+              <a:buNone/>
+            </a:pPr>
+            <a:r>
+              <a:rPr lang="fa-IR" altLang="en-US" sz="1300" b="1" dirty="0">
+                <a:solidFill>
+                  <a:srgbClr val="1E293B"/>
+                </a:solidFill>
+                <a:latin typeface="Kalameh" pitchFamily="34" charset="0"/>
+                <a:ea typeface="Kalameh" pitchFamily="34" charset="-122"/>
+                <a:cs typeface="Kalameh" pitchFamily="34" charset="-120"/>
+              </a:rPr>
+              <a:t>مدت زمان شارژ</a:t>
+            </a:r>
+            <a:endParaRPr lang="fa-IR" sz="1300" dirty="0"/>
+          </a:p>
+        </p:txBody>
+      </p:sp>
+      <p:sp>
+        <p:nvSpPr>
+          <p:cNvPr id="20" name="Text 15"/>
+          <p:cNvSpPr txBox="1"/>
+          <p:nvPr/>
+        </p:nvSpPr>
+        <p:spPr>
+          <a:xfrm>
+            <a:off x="8366760" y="3511296"/>
+            <a:ext cx="3044952" cy="2350008"/>
+          </a:xfrm>
+          <a:prstGeom prst="rect">
+            <a:avLst/>
+          </a:prstGeom>
+          <a:noFill/>
+          <a:ln/>
+        </p:spPr>
+        <p:txBody>
+          <a:bodyPr wrap="square" lIns="0" tIns="0" rIns="0" bIns="0" rtlCol="0" anchor="t"/>
+          <a:lstStyle/>
+          <a:p>
+            <a:pPr rtl="1" algn="r" indent="0" marL="0">
+              <a:buNone/>
+            </a:pPr>
+            <a:r>
+              <a:rPr lang="fa-IR" altLang="en-US" sz="1200" dirty="0">
+                <a:solidFill>
+                  <a:srgbClr val="64748B"/>
+                </a:solidFill>
+                <a:latin typeface="Kalameh" pitchFamily="34" charset="0"/>
+                <a:ea typeface="Kalameh" pitchFamily="34" charset="-122"/>
+                <a:cs typeface="Kalameh" pitchFamily="34" charset="-120"/>
+              </a:rPr>
+              <a:t>سرعت شارژ و زمان توقف از دغدغه‌های اصلی کاربران است که در انتخاب مکان‌های تجاری تأثیر مستقیم دارد.</a:t>
+            </a:r>
+            <a:endParaRPr lang="fa-IR" sz="1200" dirty="0"/>
+          </a:p>
+        </p:txBody>
+      </p:sp>
+      <p:sp>
+        <p:nvSpPr>
+          <p:cNvPr id="21" name="Text 16"/>
+          <p:cNvSpPr txBox="1"/>
+          <p:nvPr/>
+        </p:nvSpPr>
+        <p:spPr>
+          <a:xfrm>
+            <a:off x="320040" y="6510528"/>
+            <a:ext cx="237744" cy="164592"/>
+          </a:xfrm>
+          <a:prstGeom prst="rect">
+            <a:avLst/>
+          </a:prstGeom>
+          <a:noFill/>
+          <a:ln/>
+        </p:spPr>
+        <p:txBody>
+          <a:bodyPr wrap="square" lIns="0" tIns="0" rIns="0" bIns="0" rtlCol="0" anchor="ctr"/>
+          <a:lstStyle/>
+          <a:p>
+            <a:pPr algn="ctr" indent="0" marL="0">
+              <a:buNone/>
+            </a:pPr>
+            <a:r>
+              <a:rPr lang="en-US" altLang="en-US" sz="750" dirty="0">
+                <a:solidFill>
+                  <a:srgbClr val="64748B"/>
+                </a:solidFill>
+                <a:latin typeface="Kalameh" pitchFamily="34" charset="0"/>
+                <a:ea typeface="Kalameh" pitchFamily="34" charset="-122"/>
+                <a:cs typeface="Kalameh" pitchFamily="34" charset="-120"/>
+              </a:rPr>
+              <a:t>02</a:t>
+            </a:r>
+            <a:endParaRPr lang="en-US" sz="750" dirty="0"/>
+          </a:p>
+        </p:txBody>
+      </p:sp>
+      <p:sp>
+        <p:nvSpPr>
+          <p:cNvPr id="22" name="Text 17"/>
+          <p:cNvSpPr txBox="1"/>
+          <p:nvPr/>
+        </p:nvSpPr>
+        <p:spPr>
+          <a:xfrm>
+            <a:off x="557784" y="6510528"/>
+            <a:ext cx="128016" cy="164592"/>
+          </a:xfrm>
+          <a:prstGeom prst="rect">
+            <a:avLst/>
+          </a:prstGeom>
+          <a:noFill/>
+          <a:ln/>
+        </p:spPr>
+        <p:txBody>
+          <a:bodyPr wrap="square" lIns="0" tIns="0" rIns="0" bIns="0" rtlCol="0" anchor="ctr"/>
+          <a:lstStyle/>
+          <a:p>
+            <a:pPr algn="ctr" indent="0" marL="0">
+              <a:buNone/>
+            </a:pPr>
+            <a:r>
+              <a:rPr lang="en-US" altLang="en-US" sz="750" dirty="0">
+                <a:solidFill>
+                  <a:srgbClr val="64748B"/>
+                </a:solidFill>
+                <a:latin typeface="Kalameh" pitchFamily="34" charset="0"/>
+                <a:ea typeface="Kalameh" pitchFamily="34" charset="-122"/>
+                <a:cs typeface="Kalameh" pitchFamily="34" charset="-120"/>
+              </a:rPr>
+              <a:t>/</a:t>
+            </a:r>
+            <a:endParaRPr lang="en-US" sz="750" dirty="0"/>
+          </a:p>
+        </p:txBody>
+      </p:sp>
+      <p:sp>
+        <p:nvSpPr>
+          <p:cNvPr id="23" name="Text 18"/>
+          <p:cNvSpPr txBox="1"/>
+          <p:nvPr/>
+        </p:nvSpPr>
+        <p:spPr>
+          <a:xfrm>
+            <a:off x="685800" y="6510528"/>
+            <a:ext cx="237744" cy="164592"/>
+          </a:xfrm>
+          <a:prstGeom prst="rect">
+            <a:avLst/>
+          </a:prstGeom>
+          <a:noFill/>
+          <a:ln/>
+        </p:spPr>
+        <p:txBody>
+          <a:bodyPr wrap="square" lIns="0" tIns="0" rIns="0" bIns="0" rtlCol="0" anchor="ctr"/>
+          <a:lstStyle/>
+          <a:p>
+            <a:pPr algn="ctr" indent="0" marL="0">
+              <a:buNone/>
+            </a:pPr>
+            <a:r>
+              <a:rPr lang="en-US" altLang="en-US" sz="750" dirty="0">
+                <a:solidFill>
+                  <a:srgbClr val="64748B"/>
+                </a:solidFill>
+                <a:latin typeface="Kalameh" pitchFamily="34" charset="0"/>
+                <a:ea typeface="Kalameh" pitchFamily="34" charset="-122"/>
+                <a:cs typeface="Kalameh" pitchFamily="34" charset="-120"/>
+              </a:rPr>
+              <a:t>08</a:t>
+            </a:r>
+            <a:endParaRPr lang="en-US" sz="750" dirty="0"/>
+          </a:p>
+        </p:txBody>
+      </p:sp>
+    </p:spTree>
+  </p:cSld>
+  <p:clrMapOvr>
+    <a:masterClrMapping/>
+  </p:clrMapOvr>
+</p:sld>
+</file>
+
+<file path=ppt/slides/slide3.xml><?xml version="1.0" encoding="utf-8"?>
+<p:sld xmlns:a="http://schemas.openxmlformats.org/drawingml/2006/main" xmlns:r="http://schemas.openxmlformats.org/officeDocument/2006/relationships" xmlns:p="http://schemas.openxmlformats.org/presentationml/2006/main">
+  <p:cSld name="Slide 3">
+    <p:bg>
+      <p:bgPr>
+        <a:solidFill>
+          <a:srgbClr val="F8FAFC"/>
         </a:solidFill>
       </p:bgPr>
     </p:bg>
@@ -2477,13 +2947,13 @@
             <a:avLst/>
           </a:prstGeom>
           <a:solidFill>
-            <a:srgbClr val="1A5F7A">
+            <a:srgbClr val="0F172A">
               <a:alpha val="22000"/>
             </a:srgbClr>
           </a:solidFill>
           <a:ln w="12700">
             <a:solidFill>
-              <a:srgbClr val="1A5F7A">
+              <a:srgbClr val="0F172A">
                 <a:alpha val="0"/>
               </a:srgbClr>
             </a:solidFill>
@@ -2506,11 +2976,11 @@
             <a:avLst/>
           </a:prstGeom>
           <a:solidFill>
-            <a:srgbClr val="FFD166"/>
+            <a:srgbClr val="10B981"/>
           </a:solidFill>
           <a:ln w="12700">
             <a:solidFill>
-              <a:srgbClr val="FFD166">
+              <a:srgbClr val="10B981">
                 <a:alpha val="0"/>
               </a:srgbClr>
             </a:solidFill>
@@ -2533,11 +3003,11 @@
             <a:avLst/>
           </a:prstGeom>
           <a:solidFill>
-            <a:srgbClr val="FFD166"/>
+            <a:srgbClr val="10B981"/>
           </a:solidFill>
           <a:ln w="12700">
             <a:solidFill>
-              <a:srgbClr val="FFD166">
+              <a:srgbClr val="10B981">
                 <a:alpha val="0"/>
               </a:srgbClr>
             </a:solidFill>
@@ -2572,13 +3042,13 @@
             <a:r>
               <a:rPr lang="fa-IR" altLang="en-US" sz="1050" b="1" spc="50" kern="0" dirty="0">
                 <a:solidFill>
-                  <a:srgbClr val="FFD166"/>
-                </a:solidFill>
-                <a:latin typeface="Kalameh" pitchFamily="34" charset="0"/>
-                <a:ea typeface="Kalameh" pitchFamily="34" charset="-122"/>
-                <a:cs typeface="Kalameh" pitchFamily="34" charset="-120"/>
-              </a:rPr>
-              <a:t>افزایش اعتماد رانندگان به خودروهای…</a:t>
+                  <a:srgbClr val="10B981"/>
+                </a:solidFill>
+                <a:latin typeface="Kalameh" pitchFamily="34" charset="0"/>
+                <a:ea typeface="Kalameh" pitchFamily="34" charset="-122"/>
+                <a:cs typeface="Kalameh" pitchFamily="34" charset="-120"/>
+              </a:rPr>
+              <a:t>ارزش‌آفرینی در سفر</a:t>
             </a:r>
             <a:endParaRPr lang="fa-IR" sz="1050" dirty="0"/>
           </a:p>
@@ -2611,13 +3081,13 @@
             <a:r>
               <a:rPr lang="fa-IR" altLang="en-US" sz="2500" b="1" dirty="0">
                 <a:solidFill>
-                  <a:srgbClr val="FFFFFF"/>
-                </a:solidFill>
-                <a:latin typeface="Kalameh" pitchFamily="34" charset="0"/>
-                <a:ea typeface="Kalameh" pitchFamily="34" charset="-122"/>
-                <a:cs typeface="Kalameh" pitchFamily="34" charset="-120"/>
-              </a:rPr>
-              <a:t>چرا شارژ سریع در فروشگاه‌ها مهم است؟</a:t>
+                  <a:srgbClr val="1E293B"/>
+                </a:solidFill>
+                <a:latin typeface="Kalameh" pitchFamily="34" charset="0"/>
+                <a:ea typeface="Kalameh" pitchFamily="34" charset="-122"/>
+                <a:cs typeface="Kalameh" pitchFamily="34" charset="-120"/>
+              </a:rPr>
+              <a:t>تبدیل توقف اجباری به فرصت تجاری</a:t>
             </a:r>
             <a:endParaRPr lang="fa-IR" sz="2500" dirty="0"/>
           </a:p>
@@ -2626,6 +3096,45 @@
       <p:sp>
         <p:nvSpPr>
           <p:cNvPr id="8" name="Text 5"/>
+          <p:cNvSpPr txBox="1"/>
+          <p:nvPr/>
+        </p:nvSpPr>
+        <p:spPr>
+          <a:xfrm>
+            <a:off x="5486400" y="1783080"/>
+            <a:ext cx="6126480" cy="594360"/>
+          </a:xfrm>
+          <a:prstGeom prst="rect">
+            <a:avLst/>
+          </a:prstGeom>
+          <a:noFill/>
+          <a:ln/>
+        </p:spPr>
+        <p:txBody>
+          <a:bodyPr wrap="square" lIns="0" tIns="0" rIns="0" bIns="0" rtlCol="0" anchor="t"/>
+          <a:lstStyle/>
+          <a:p>
+            <a:pPr rtl="1" algn="r" indent="0" marL="0">
+              <a:buNone/>
+            </a:pPr>
+            <a:r>
+              <a:rPr lang="fa-IR" altLang="en-US" sz="1250" dirty="0">
+                <a:solidFill>
+                  <a:srgbClr val="64748B"/>
+                </a:solidFill>
+                <a:latin typeface="Kalameh" pitchFamily="34" charset="0"/>
+                <a:ea typeface="Kalameh" pitchFamily="34" charset="-122"/>
+                <a:cs typeface="Kalameh" pitchFamily="34" charset="-120"/>
+              </a:rPr>
+              <a:t>چرا ترکیب خرید و شارژ خودرو راهکار برنده است</a:t>
+            </a:r>
+            <a:endParaRPr lang="fa-IR" sz="1250" dirty="0"/>
+          </a:p>
+        </p:txBody>
+      </p:sp>
+      <p:sp>
+        <p:nvSpPr>
+          <p:cNvPr id="9" name="Text 6"/>
           <p:cNvSpPr txBox="1"/>
           <p:nvPr/>
         </p:nvSpPr>
@@ -2650,13 +3159,13 @@
             <a:r>
               <a:rPr lang="en-US" altLang="en-US" sz="750" dirty="0">
                 <a:solidFill>
-                  <a:srgbClr val="A0A0A0"/>
-                </a:solidFill>
-                <a:latin typeface="Kalameh" pitchFamily="34" charset="0"/>
-                <a:ea typeface="Kalameh" pitchFamily="34" charset="-122"/>
-                <a:cs typeface="Kalameh" pitchFamily="34" charset="-120"/>
-              </a:rPr>
-              <a:t>02</a:t>
+                  <a:srgbClr val="64748B"/>
+                </a:solidFill>
+                <a:latin typeface="Kalameh" pitchFamily="34" charset="0"/>
+                <a:ea typeface="Kalameh" pitchFamily="34" charset="-122"/>
+                <a:cs typeface="Kalameh" pitchFamily="34" charset="-120"/>
+              </a:rPr>
+              <a:t>03</a:t>
             </a:r>
             <a:endParaRPr lang="en-US" sz="750" dirty="0"/>
           </a:p>
@@ -2664,7 +3173,7 @@
       </p:sp>
       <p:sp>
         <p:nvSpPr>
-          <p:cNvPr id="9" name="Text 6"/>
+          <p:cNvPr id="10" name="Text 7"/>
           <p:cNvSpPr txBox="1"/>
           <p:nvPr/>
         </p:nvSpPr>
@@ -2689,7 +3198,7 @@
             <a:r>
               <a:rPr lang="en-US" altLang="en-US" sz="750" dirty="0">
                 <a:solidFill>
-                  <a:srgbClr val="A0A0A0"/>
+                  <a:srgbClr val="64748B"/>
                 </a:solidFill>
                 <a:latin typeface="Kalameh" pitchFamily="34" charset="0"/>
                 <a:ea typeface="Kalameh" pitchFamily="34" charset="-122"/>
@@ -2703,7 +3212,7 @@
       </p:sp>
       <p:sp>
         <p:nvSpPr>
-          <p:cNvPr id="10" name="Text 7"/>
+          <p:cNvPr id="11" name="Text 8"/>
           <p:cNvSpPr txBox="1"/>
           <p:nvPr/>
         </p:nvSpPr>
@@ -2728,7 +3237,7 @@
             <a:r>
               <a:rPr lang="en-US" altLang="en-US" sz="750" dirty="0">
                 <a:solidFill>
-                  <a:srgbClr val="A0A0A0"/>
+                  <a:srgbClr val="64748B"/>
                 </a:solidFill>
                 <a:latin typeface="Kalameh" pitchFamily="34" charset="0"/>
                 <a:ea typeface="Kalameh" pitchFamily="34" charset="-122"/>
@@ -2742,7 +3251,7 @@
       </p:sp>
       <p:sp>
         <p:nvSpPr>
-          <p:cNvPr id="11" name="Text 8"/>
+          <p:cNvPr id="12" name="Text 9"/>
           <p:cNvSpPr txBox="1"/>
           <p:nvPr/>
         </p:nvSpPr>
@@ -2767,13 +3276,13 @@
             <a:r>
               <a:rPr lang="en-US" altLang="en-US" sz="620" dirty="0">
                 <a:solidFill>
-                  <a:srgbClr val="A0A0A0"/>
-                </a:solidFill>
-                <a:latin typeface="Kalameh" pitchFamily="34" charset="0"/>
-                <a:ea typeface="Kalameh" pitchFamily="34" charset="-122"/>
-                <a:cs typeface="Kalameh" pitchFamily="34" charset="-120"/>
-              </a:rPr>
-              <a:t>Giant Asparagus</a:t>
+                  <a:srgbClr val="64748B"/>
+                </a:solidFill>
+                <a:latin typeface="Kalameh" pitchFamily="34" charset="0"/>
+                <a:ea typeface="Kalameh" pitchFamily="34" charset="-122"/>
+                <a:cs typeface="Kalameh" pitchFamily="34" charset="-120"/>
+              </a:rPr>
+              <a:t>Kindel Media</a:t>
             </a:r>
             <a:endParaRPr lang="en-US" sz="620" dirty="0"/>
           </a:p>
@@ -2787,13 +3296,13 @@
 </p:sld>
 </file>
 
-<file path=ppt/slides/slide3.xml><?xml version="1.0" encoding="utf-8"?>
+<file path=ppt/slides/slide4.xml><?xml version="1.0" encoding="utf-8"?>
 <p:sld xmlns:a="http://schemas.openxmlformats.org/drawingml/2006/main" xmlns:r="http://schemas.openxmlformats.org/officeDocument/2006/relationships" xmlns:p="http://schemas.openxmlformats.org/presentationml/2006/main">
-  <p:cSld name="Slide 3">
+  <p:cSld name="Slide 4">
     <p:bg>
       <p:bgPr>
         <a:solidFill>
-          <a:srgbClr val="0F2027"/>
+          <a:srgbClr val="F8FAFC"/>
         </a:solidFill>
       </p:bgPr>
     </p:bg>
@@ -2826,11 +3335,11 @@
             <a:avLst/>
           </a:prstGeom>
           <a:solidFill>
-            <a:srgbClr val="FFD166"/>
+            <a:srgbClr val="10B981"/>
           </a:solidFill>
           <a:ln w="12700">
             <a:solidFill>
-              <a:srgbClr val="FFD166">
+              <a:srgbClr val="10B981">
                 <a:alpha val="0"/>
               </a:srgbClr>
             </a:solidFill>
@@ -2846,8 +3355,8 @@
         </p:nvSpPr>
         <p:spPr>
           <a:xfrm>
-            <a:off x="4754880" y="329184"/>
-            <a:ext cx="6629400" cy="365760"/>
+            <a:off x="5166360" y="329184"/>
+            <a:ext cx="6217920" cy="365760"/>
           </a:xfrm>
           <a:prstGeom prst="rect">
             <a:avLst/>
@@ -2859,21 +3368,21 @@
           <a:bodyPr wrap="square" lIns="0" tIns="0" rIns="0" bIns="0" rtlCol="0" anchor="ctr"/>
           <a:lstStyle/>
           <a:p>
-            <a:pPr algn="r" indent="0" marL="0">
-              <a:buNone/>
-            </a:pPr>
-            <a:r>
-              <a:rPr lang="en-US" altLang="en-US" sz="1050" b="1" spc="50" kern="0" dirty="0">
-                <a:solidFill>
-                  <a:srgbClr val="FFD166"/>
-                </a:solidFill>
-                <a:latin typeface="Kalameh" pitchFamily="34" charset="0"/>
-                <a:ea typeface="Kalameh" pitchFamily="34" charset="-122"/>
-                <a:cs typeface="Kalameh" pitchFamily="34" charset="-120"/>
-              </a:rPr>
-              <a:t>03</a:t>
-            </a:r>
-            <a:endParaRPr lang="en-US" sz="1050" dirty="0"/>
+            <a:pPr rtl="1" algn="r" indent="0" marL="0">
+              <a:buNone/>
+            </a:pPr>
+            <a:r>
+              <a:rPr lang="fa-IR" altLang="en-US" sz="1050" b="1" spc="50" kern="0" dirty="0">
+                <a:solidFill>
+                  <a:srgbClr val="10B981"/>
+                </a:solidFill>
+                <a:latin typeface="Kalameh" pitchFamily="34" charset="0"/>
+                <a:ea typeface="Kalameh" pitchFamily="34" charset="-122"/>
+                <a:cs typeface="Kalameh" pitchFamily="34" charset="-120"/>
+              </a:rPr>
+              <a:t>معماری زیرساخت</a:t>
+            </a:r>
+            <a:endParaRPr lang="fa-IR" sz="1050" dirty="0"/>
           </a:p>
         </p:txBody>
       </p:sp>
@@ -2885,8 +3394,8 @@
         </p:nvSpPr>
         <p:spPr>
           <a:xfrm>
-            <a:off x="4754880" y="731520"/>
-            <a:ext cx="6903720" cy="868680"/>
+            <a:off x="5166360" y="731520"/>
+            <a:ext cx="6492240" cy="868680"/>
           </a:xfrm>
           <a:prstGeom prst="rect">
             <a:avLst/>
@@ -2904,13 +3413,13 @@
             <a:r>
               <a:rPr lang="fa-IR" altLang="en-US" sz="2400" b="1" dirty="0">
                 <a:solidFill>
-                  <a:srgbClr val="FFFFFF"/>
-                </a:solidFill>
-                <a:latin typeface="Kalameh" pitchFamily="34" charset="0"/>
-                <a:ea typeface="Kalameh" pitchFamily="34" charset="-122"/>
-                <a:cs typeface="Kalameh" pitchFamily="34" charset="-120"/>
-              </a:rPr>
-              <a:t>زمان شارژ در مقابل زمان پارکینگ</a:t>
+                  <a:srgbClr val="1E293B"/>
+                </a:solidFill>
+                <a:latin typeface="Kalameh" pitchFamily="34" charset="0"/>
+                <a:ea typeface="Kalameh" pitchFamily="34" charset="-122"/>
+                <a:cs typeface="Kalameh" pitchFamily="34" charset="-120"/>
+              </a:rPr>
+              <a:t>ابعاد کلیدی توسعه زیرساخت مقصد</a:t>
             </a:r>
             <a:endParaRPr lang="fa-IR" sz="2400" dirty="0"/>
           </a:p>
@@ -2918,24 +3427,63 @@
       </p:sp>
       <p:sp>
         <p:nvSpPr>
-          <p:cNvPr id="5" name="Shape 3"/>
+          <p:cNvPr id="5" name="Text 3"/>
+          <p:cNvSpPr txBox="1"/>
+          <p:nvPr/>
+        </p:nvSpPr>
+        <p:spPr>
+          <a:xfrm>
+            <a:off x="5166360" y="1572768"/>
+            <a:ext cx="6492240" cy="594360"/>
+          </a:xfrm>
+          <a:prstGeom prst="rect">
+            <a:avLst/>
+          </a:prstGeom>
+          <a:noFill/>
+          <a:ln/>
+        </p:spPr>
+        <p:txBody>
+          <a:bodyPr wrap="square" lIns="0" tIns="0" rIns="0" bIns="0" rtlCol="0" anchor="t"/>
+          <a:lstStyle/>
+          <a:p>
+            <a:pPr rtl="1" algn="r" indent="0" marL="0">
+              <a:buNone/>
+            </a:pPr>
+            <a:r>
+              <a:rPr lang="fa-IR" altLang="en-US" sz="1250" dirty="0">
+                <a:solidFill>
+                  <a:srgbClr val="64748B"/>
+                </a:solidFill>
+                <a:latin typeface="Kalameh" pitchFamily="34" charset="0"/>
+                <a:ea typeface="Kalameh" pitchFamily="34" charset="-122"/>
+                <a:cs typeface="Kalameh" pitchFamily="34" charset="-120"/>
+              </a:rPr>
+              <a:t>عوامل مؤثر بر موفقیت ایستگاه‌های شارژ در مراکز خرید</a:t>
+            </a:r>
+            <a:endParaRPr lang="fa-IR" sz="1250" dirty="0"/>
+          </a:p>
+        </p:txBody>
+      </p:sp>
+      <p:sp>
+        <p:nvSpPr>
+          <p:cNvPr id="6" name="Shape 4"/>
           <p:cNvSpPr/>
           <p:nvPr/>
         </p:nvSpPr>
         <p:spPr>
           <a:xfrm>
-            <a:off x="502920" y="2331720"/>
-            <a:ext cx="7543800" cy="3657600"/>
+            <a:off x="502920" y="2304288"/>
+            <a:ext cx="5490972" cy="1796796"/>
           </a:xfrm>
           <a:prstGeom prst="roundRect">
             <a:avLst/>
           </a:prstGeom>
           <a:solidFill>
-            <a:srgbClr val="1A1A2E"/>
+            <a:srgbClr val="FFFFFF"/>
           </a:solidFill>
           <a:ln w="8890">
             <a:solidFill>
-              <a:srgbClr val="E9EEF5">
+              <a:srgbClr val="DCE4EE">
                 <a:alpha val="65000"/>
               </a:srgbClr>
             </a:solidFill>
@@ -2950,25 +3498,651 @@
           </a:effectLst>
         </p:spPr>
       </p:sp>
-      <p:graphicFrame>
-        <p:nvGraphicFramePr>
-          <p:cNvPr id="6" name="Chart 0" descr=""/>
-          <p:cNvGraphicFramePr/>
-          <p:nvPr/>
-        </p:nvGraphicFramePr>
-        <p:xfrm>
-          <a:off x="713232" y="2971800"/>
-          <a:ext cx="7040880" cy="2606040"/>
-        </p:xfrm>
-        <a:graphic xmlns:a="http://schemas.openxmlformats.org/drawingml/2006/main">
-          <a:graphicData uri="http://schemas.openxmlformats.org/drawingml/2006/chart">
-            <c:chart xmlns:c="http://schemas.openxmlformats.org/drawingml/2006/chart" r:id="rId1"/>
-          </a:graphicData>
-        </a:graphic>
-      </p:graphicFrame>
-      <p:sp>
-        <p:nvSpPr>
-          <p:cNvPr id="7" name="Text 4"/>
+      <p:sp>
+        <p:nvSpPr>
+          <p:cNvPr id="7" name="Shape 5"/>
+          <p:cNvSpPr/>
+          <p:nvPr/>
+        </p:nvSpPr>
+        <p:spPr>
+          <a:xfrm>
+            <a:off x="5280660" y="2624328"/>
+            <a:ext cx="457200" cy="457200"/>
+          </a:xfrm>
+          <a:prstGeom prst="ellipse">
+            <a:avLst/>
+          </a:prstGeom>
+          <a:solidFill>
+            <a:srgbClr val="10B981"/>
+          </a:solidFill>
+          <a:ln w="12700">
+            <a:solidFill>
+              <a:srgbClr val="10B981">
+                <a:alpha val="0"/>
+              </a:srgbClr>
+            </a:solidFill>
+            <a:prstDash val="solid"/>
+          </a:ln>
+        </p:spPr>
+      </p:sp>
+      <p:pic>
+        <p:nvPicPr>
+          <p:cNvPr id="8" name="Image 0" descr="preencoded.png">    </p:cNvPr>
+          <p:cNvPicPr>
+            <a:picLocks noChangeAspect="1"/>
+          </p:cNvPicPr>
+          <p:nvPr/>
+        </p:nvPicPr>
+        <p:blipFill>
+          <a:blip r:embed="rId1">
+            <a:extLst>
+              <a:ext uri="{96DAC541-7B7A-43D3-8B79-37D633B846F1}">
+                <asvg:svgBlip xmlns:asvg="http://schemas.microsoft.com/office/drawing/2016/SVG/main" r:embed="rId2"/>
+              </a:ext>
+            </a:extLst>
+          </a:blip>
+          <a:stretch>
+            <a:fillRect/>
+          </a:stretch>
+        </p:blipFill>
+        <p:spPr>
+          <a:xfrm>
+            <a:off x="5385816" y="2729484"/>
+            <a:ext cx="246888" cy="246888"/>
+          </a:xfrm>
+          <a:prstGeom prst="rect">
+            <a:avLst/>
+          </a:prstGeom>
+        </p:spPr>
+      </p:pic>
+      <p:sp>
+        <p:nvSpPr>
+          <p:cNvPr id="9" name="Text 6"/>
+          <p:cNvSpPr txBox="1"/>
+          <p:nvPr/>
+        </p:nvSpPr>
+        <p:spPr>
+          <a:xfrm>
+            <a:off x="777240" y="3081528"/>
+            <a:ext cx="4942332" cy="347472"/>
+          </a:xfrm>
+          <a:prstGeom prst="rect">
+            <a:avLst/>
+          </a:prstGeom>
+          <a:noFill/>
+          <a:ln/>
+        </p:spPr>
+        <p:txBody>
+          <a:bodyPr wrap="square" lIns="0" tIns="0" rIns="0" bIns="0" rtlCol="0" anchor="ctr"/>
+          <a:lstStyle/>
+          <a:p>
+            <a:pPr rtl="1" algn="r" indent="0" marL="0">
+              <a:buNone/>
+            </a:pPr>
+            <a:r>
+              <a:rPr lang="fa-IR" altLang="en-US" sz="1300" b="1" dirty="0">
+                <a:solidFill>
+                  <a:srgbClr val="1E293B"/>
+                </a:solidFill>
+                <a:latin typeface="Kalameh" pitchFamily="34" charset="0"/>
+                <a:ea typeface="Kalameh" pitchFamily="34" charset="-122"/>
+                <a:cs typeface="Kalameh" pitchFamily="34" charset="-120"/>
+              </a:rPr>
+              <a:t>بهینه‌سازی شبکه</a:t>
+            </a:r>
+            <a:endParaRPr lang="fa-IR" sz="1300" dirty="0"/>
+          </a:p>
+        </p:txBody>
+      </p:sp>
+      <p:sp>
+        <p:nvSpPr>
+          <p:cNvPr id="10" name="Text 7"/>
+          <p:cNvSpPr txBox="1"/>
+          <p:nvPr/>
+        </p:nvSpPr>
+        <p:spPr>
+          <a:xfrm>
+            <a:off x="777240" y="3511296"/>
+            <a:ext cx="4942332" cy="352044"/>
+          </a:xfrm>
+          <a:prstGeom prst="rect">
+            <a:avLst/>
+          </a:prstGeom>
+          <a:noFill/>
+          <a:ln/>
+        </p:spPr>
+        <p:txBody>
+          <a:bodyPr wrap="square" lIns="0" tIns="0" rIns="0" bIns="0" rtlCol="0" anchor="t"/>
+          <a:lstStyle/>
+          <a:p>
+            <a:pPr rtl="1" algn="r" indent="0" marL="0">
+              <a:buNone/>
+            </a:pPr>
+            <a:r>
+              <a:rPr lang="fa-IR" altLang="en-US" sz="1050" dirty="0">
+                <a:solidFill>
+                  <a:srgbClr val="64748B"/>
+                </a:solidFill>
+                <a:latin typeface="Kalameh" pitchFamily="34" charset="0"/>
+                <a:ea typeface="Kalameh" pitchFamily="34" charset="-122"/>
+                <a:cs typeface="Kalameh" pitchFamily="34" charset="-120"/>
+              </a:rPr>
+              <a:t>جلوگیری از ایجاد دارایی‌های راکد با انتخاب استانداردهای باز و غیرانحصاری.</a:t>
+            </a:r>
+            <a:endParaRPr lang="fa-IR" sz="1050" dirty="0"/>
+          </a:p>
+        </p:txBody>
+      </p:sp>
+      <p:sp>
+        <p:nvSpPr>
+          <p:cNvPr id="11" name="Shape 8"/>
+          <p:cNvSpPr/>
+          <p:nvPr/>
+        </p:nvSpPr>
+        <p:spPr>
+          <a:xfrm>
+            <a:off x="6195060" y="2304288"/>
+            <a:ext cx="5490972" cy="1796796"/>
+          </a:xfrm>
+          <a:prstGeom prst="roundRect">
+            <a:avLst/>
+          </a:prstGeom>
+          <a:solidFill>
+            <a:srgbClr val="FFFFFF"/>
+          </a:solidFill>
+          <a:ln w="8890">
+            <a:solidFill>
+              <a:srgbClr val="DCE4EE">
+                <a:alpha val="65000"/>
+              </a:srgbClr>
+            </a:solidFill>
+            <a:prstDash val="solid"/>
+          </a:ln>
+          <a:effectLst>
+            <a:outerShdw sx="100000" sy="100000" kx="0" ky="0" algn="bl" rotWithShape="0" blurRad="25400" dist="13970" dir="2700000">
+              <a:srgbClr val="000000">
+                <a:alpha val="16000"/>
+              </a:srgbClr>
+            </a:outerShdw>
+          </a:effectLst>
+        </p:spPr>
+      </p:sp>
+      <p:sp>
+        <p:nvSpPr>
+          <p:cNvPr id="12" name="Shape 9"/>
+          <p:cNvSpPr/>
+          <p:nvPr/>
+        </p:nvSpPr>
+        <p:spPr>
+          <a:xfrm>
+            <a:off x="10972800" y="2624328"/>
+            <a:ext cx="457200" cy="457200"/>
+          </a:xfrm>
+          <a:prstGeom prst="ellipse">
+            <a:avLst/>
+          </a:prstGeom>
+          <a:solidFill>
+            <a:srgbClr val="F59E0B"/>
+          </a:solidFill>
+          <a:ln w="12700">
+            <a:solidFill>
+              <a:srgbClr val="F59E0B">
+                <a:alpha val="0"/>
+              </a:srgbClr>
+            </a:solidFill>
+            <a:prstDash val="solid"/>
+          </a:ln>
+        </p:spPr>
+      </p:sp>
+      <p:pic>
+        <p:nvPicPr>
+          <p:cNvPr id="13" name="Image 1" descr="preencoded.png">    </p:cNvPr>
+          <p:cNvPicPr>
+            <a:picLocks noChangeAspect="1"/>
+          </p:cNvPicPr>
+          <p:nvPr/>
+        </p:nvPicPr>
+        <p:blipFill>
+          <a:blip r:embed="rId3">
+            <a:extLst>
+              <a:ext uri="{96DAC541-7B7A-43D3-8B79-37D633B846F1}">
+                <asvg:svgBlip xmlns:asvg="http://schemas.microsoft.com/office/drawing/2016/SVG/main" r:embed="rId4"/>
+              </a:ext>
+            </a:extLst>
+          </a:blip>
+          <a:stretch>
+            <a:fillRect/>
+          </a:stretch>
+        </p:blipFill>
+        <p:spPr>
+          <a:xfrm>
+            <a:off x="11077956" y="2729484"/>
+            <a:ext cx="246888" cy="246888"/>
+          </a:xfrm>
+          <a:prstGeom prst="rect">
+            <a:avLst/>
+          </a:prstGeom>
+        </p:spPr>
+      </p:pic>
+      <p:sp>
+        <p:nvSpPr>
+          <p:cNvPr id="14" name="Text 10"/>
+          <p:cNvSpPr txBox="1"/>
+          <p:nvPr/>
+        </p:nvSpPr>
+        <p:spPr>
+          <a:xfrm>
+            <a:off x="6469380" y="3081528"/>
+            <a:ext cx="4942332" cy="347472"/>
+          </a:xfrm>
+          <a:prstGeom prst="rect">
+            <a:avLst/>
+          </a:prstGeom>
+          <a:noFill/>
+          <a:ln/>
+        </p:spPr>
+        <p:txBody>
+          <a:bodyPr wrap="square" lIns="0" tIns="0" rIns="0" bIns="0" rtlCol="0" anchor="ctr"/>
+          <a:lstStyle/>
+          <a:p>
+            <a:pPr rtl="1" algn="r" indent="0" marL="0">
+              <a:buNone/>
+            </a:pPr>
+            <a:r>
+              <a:rPr lang="fa-IR" altLang="en-US" sz="1300" b="1" dirty="0">
+                <a:solidFill>
+                  <a:srgbClr val="1E293B"/>
+                </a:solidFill>
+                <a:latin typeface="Kalameh" pitchFamily="34" charset="0"/>
+                <a:ea typeface="Kalameh" pitchFamily="34" charset="-122"/>
+                <a:cs typeface="Kalameh" pitchFamily="34" charset="-120"/>
+              </a:rPr>
+              <a:t>طراحی ماژولار</a:t>
+            </a:r>
+            <a:endParaRPr lang="fa-IR" sz="1300" dirty="0"/>
+          </a:p>
+        </p:txBody>
+      </p:sp>
+      <p:sp>
+        <p:nvSpPr>
+          <p:cNvPr id="15" name="Text 11"/>
+          <p:cNvSpPr txBox="1"/>
+          <p:nvPr/>
+        </p:nvSpPr>
+        <p:spPr>
+          <a:xfrm>
+            <a:off x="6469380" y="3511296"/>
+            <a:ext cx="4942332" cy="352044"/>
+          </a:xfrm>
+          <a:prstGeom prst="rect">
+            <a:avLst/>
+          </a:prstGeom>
+          <a:noFill/>
+          <a:ln/>
+        </p:spPr>
+        <p:txBody>
+          <a:bodyPr wrap="square" lIns="0" tIns="0" rIns="0" bIns="0" rtlCol="0" anchor="t"/>
+          <a:lstStyle/>
+          <a:p>
+            <a:pPr rtl="1" algn="r" indent="0" marL="0">
+              <a:buNone/>
+            </a:pPr>
+            <a:r>
+              <a:rPr lang="fa-IR" altLang="en-US" sz="1050" dirty="0">
+                <a:solidFill>
+                  <a:srgbClr val="64748B"/>
+                </a:solidFill>
+                <a:latin typeface="Kalameh" pitchFamily="34" charset="0"/>
+                <a:ea typeface="Kalameh" pitchFamily="34" charset="-122"/>
+                <a:cs typeface="Kalameh" pitchFamily="34" charset="-120"/>
+              </a:rPr>
+              <a:t>قابلیت ارتقای تجهیزات و شبکه‌های ارتباطی برای پاسخگویی به تقاضای رو به رشد آینده.</a:t>
+            </a:r>
+            <a:endParaRPr lang="fa-IR" sz="1050" dirty="0"/>
+          </a:p>
+        </p:txBody>
+      </p:sp>
+      <p:sp>
+        <p:nvSpPr>
+          <p:cNvPr id="16" name="Shape 12"/>
+          <p:cNvSpPr/>
+          <p:nvPr/>
+        </p:nvSpPr>
+        <p:spPr>
+          <a:xfrm>
+            <a:off x="502920" y="4302252"/>
+            <a:ext cx="5490972" cy="1796796"/>
+          </a:xfrm>
+          <a:prstGeom prst="roundRect">
+            <a:avLst/>
+          </a:prstGeom>
+          <a:solidFill>
+            <a:srgbClr val="FFFFFF"/>
+          </a:solidFill>
+          <a:ln w="8890">
+            <a:solidFill>
+              <a:srgbClr val="DCE4EE">
+                <a:alpha val="65000"/>
+              </a:srgbClr>
+            </a:solidFill>
+            <a:prstDash val="solid"/>
+          </a:ln>
+          <a:effectLst>
+            <a:outerShdw sx="100000" sy="100000" kx="0" ky="0" algn="bl" rotWithShape="0" blurRad="25400" dist="13970" dir="2700000">
+              <a:srgbClr val="000000">
+                <a:alpha val="16000"/>
+              </a:srgbClr>
+            </a:outerShdw>
+          </a:effectLst>
+        </p:spPr>
+      </p:sp>
+      <p:sp>
+        <p:nvSpPr>
+          <p:cNvPr id="17" name="Shape 13"/>
+          <p:cNvSpPr/>
+          <p:nvPr/>
+        </p:nvSpPr>
+        <p:spPr>
+          <a:xfrm>
+            <a:off x="5280660" y="4622292"/>
+            <a:ext cx="457200" cy="457200"/>
+          </a:xfrm>
+          <a:prstGeom prst="ellipse">
+            <a:avLst/>
+          </a:prstGeom>
+          <a:solidFill>
+            <a:srgbClr val="0284C7"/>
+          </a:solidFill>
+          <a:ln w="12700">
+            <a:solidFill>
+              <a:srgbClr val="0284C7">
+                <a:alpha val="0"/>
+              </a:srgbClr>
+            </a:solidFill>
+            <a:prstDash val="solid"/>
+          </a:ln>
+        </p:spPr>
+      </p:sp>
+      <p:pic>
+        <p:nvPicPr>
+          <p:cNvPr id="18" name="Image 2" descr="preencoded.png">    </p:cNvPr>
+          <p:cNvPicPr>
+            <a:picLocks noChangeAspect="1"/>
+          </p:cNvPicPr>
+          <p:nvPr/>
+        </p:nvPicPr>
+        <p:blipFill>
+          <a:blip r:embed="rId5">
+            <a:extLst>
+              <a:ext uri="{96DAC541-7B7A-43D3-8B79-37D633B846F1}">
+                <asvg:svgBlip xmlns:asvg="http://schemas.microsoft.com/office/drawing/2016/SVG/main" r:embed="rId6"/>
+              </a:ext>
+            </a:extLst>
+          </a:blip>
+          <a:stretch>
+            <a:fillRect/>
+          </a:stretch>
+        </p:blipFill>
+        <p:spPr>
+          <a:xfrm>
+            <a:off x="5385816" y="4727448"/>
+            <a:ext cx="246888" cy="246888"/>
+          </a:xfrm>
+          <a:prstGeom prst="rect">
+            <a:avLst/>
+          </a:prstGeom>
+        </p:spPr>
+      </p:pic>
+      <p:sp>
+        <p:nvSpPr>
+          <p:cNvPr id="19" name="Text 14"/>
+          <p:cNvSpPr txBox="1"/>
+          <p:nvPr/>
+        </p:nvSpPr>
+        <p:spPr>
+          <a:xfrm>
+            <a:off x="777240" y="5079492"/>
+            <a:ext cx="4942332" cy="347472"/>
+          </a:xfrm>
+          <a:prstGeom prst="rect">
+            <a:avLst/>
+          </a:prstGeom>
+          <a:noFill/>
+          <a:ln/>
+        </p:spPr>
+        <p:txBody>
+          <a:bodyPr wrap="square" lIns="0" tIns="0" rIns="0" bIns="0" rtlCol="0" anchor="ctr"/>
+          <a:lstStyle/>
+          <a:p>
+            <a:pPr rtl="1" algn="r" indent="0" marL="0">
+              <a:buNone/>
+            </a:pPr>
+            <a:r>
+              <a:rPr lang="fa-IR" altLang="en-US" sz="1300" b="1" dirty="0">
+                <a:solidFill>
+                  <a:srgbClr val="1E293B"/>
+                </a:solidFill>
+                <a:latin typeface="Kalameh" pitchFamily="34" charset="0"/>
+                <a:ea typeface="Kalameh" pitchFamily="34" charset="-122"/>
+                <a:cs typeface="Kalameh" pitchFamily="34" charset="-120"/>
+              </a:rPr>
+              <a:t>امنیت سایبری</a:t>
+            </a:r>
+            <a:endParaRPr lang="fa-IR" sz="1300" dirty="0"/>
+          </a:p>
+        </p:txBody>
+      </p:sp>
+      <p:sp>
+        <p:nvSpPr>
+          <p:cNvPr id="20" name="Text 15"/>
+          <p:cNvSpPr txBox="1"/>
+          <p:nvPr/>
+        </p:nvSpPr>
+        <p:spPr>
+          <a:xfrm>
+            <a:off x="777240" y="5509260"/>
+            <a:ext cx="4942332" cy="352044"/>
+          </a:xfrm>
+          <a:prstGeom prst="rect">
+            <a:avLst/>
+          </a:prstGeom>
+          <a:noFill/>
+          <a:ln/>
+        </p:spPr>
+        <p:txBody>
+          <a:bodyPr wrap="square" lIns="0" tIns="0" rIns="0" bIns="0" rtlCol="0" anchor="t"/>
+          <a:lstStyle/>
+          <a:p>
+            <a:pPr rtl="1" algn="r" indent="0" marL="0">
+              <a:buNone/>
+            </a:pPr>
+            <a:r>
+              <a:rPr lang="fa-IR" altLang="en-US" sz="1050" dirty="0">
+                <a:solidFill>
+                  <a:srgbClr val="64748B"/>
+                </a:solidFill>
+                <a:latin typeface="Kalameh" pitchFamily="34" charset="0"/>
+                <a:ea typeface="Kalameh" pitchFamily="34" charset="-122"/>
+                <a:cs typeface="Kalameh" pitchFamily="34" charset="-120"/>
+              </a:rPr>
+              <a:t>حفاظت از لایه‌های ارتباطی و داده‌های کاربران در اکوسیستم شارژ هوشمند.</a:t>
+            </a:r>
+            <a:endParaRPr lang="fa-IR" sz="1050" dirty="0"/>
+          </a:p>
+        </p:txBody>
+      </p:sp>
+      <p:sp>
+        <p:nvSpPr>
+          <p:cNvPr id="21" name="Shape 16"/>
+          <p:cNvSpPr/>
+          <p:nvPr/>
+        </p:nvSpPr>
+        <p:spPr>
+          <a:xfrm>
+            <a:off x="6195060" y="4302252"/>
+            <a:ext cx="5490972" cy="1796796"/>
+          </a:xfrm>
+          <a:prstGeom prst="roundRect">
+            <a:avLst/>
+          </a:prstGeom>
+          <a:solidFill>
+            <a:srgbClr val="FFFFFF"/>
+          </a:solidFill>
+          <a:ln w="8890">
+            <a:solidFill>
+              <a:srgbClr val="DCE4EE">
+                <a:alpha val="65000"/>
+              </a:srgbClr>
+            </a:solidFill>
+            <a:prstDash val="solid"/>
+          </a:ln>
+          <a:effectLst>
+            <a:outerShdw sx="100000" sy="100000" kx="0" ky="0" algn="bl" rotWithShape="0" blurRad="25400" dist="13970" dir="2700000">
+              <a:srgbClr val="000000">
+                <a:alpha val="16000"/>
+              </a:srgbClr>
+            </a:outerShdw>
+          </a:effectLst>
+        </p:spPr>
+      </p:sp>
+      <p:sp>
+        <p:nvSpPr>
+          <p:cNvPr id="22" name="Shape 17"/>
+          <p:cNvSpPr/>
+          <p:nvPr/>
+        </p:nvSpPr>
+        <p:spPr>
+          <a:xfrm>
+            <a:off x="10972800" y="4622292"/>
+            <a:ext cx="457200" cy="457200"/>
+          </a:xfrm>
+          <a:prstGeom prst="ellipse">
+            <a:avLst/>
+          </a:prstGeom>
+          <a:solidFill>
+            <a:srgbClr val="10B981"/>
+          </a:solidFill>
+          <a:ln w="12700">
+            <a:solidFill>
+              <a:srgbClr val="10B981">
+                <a:alpha val="0"/>
+              </a:srgbClr>
+            </a:solidFill>
+            <a:prstDash val="solid"/>
+          </a:ln>
+        </p:spPr>
+      </p:sp>
+      <p:pic>
+        <p:nvPicPr>
+          <p:cNvPr id="23" name="Image 3" descr="preencoded.png">    </p:cNvPr>
+          <p:cNvPicPr>
+            <a:picLocks noChangeAspect="1"/>
+          </p:cNvPicPr>
+          <p:nvPr/>
+        </p:nvPicPr>
+        <p:blipFill>
+          <a:blip r:embed="rId7">
+            <a:extLst>
+              <a:ext uri="{96DAC541-7B7A-43D3-8B79-37D633B846F1}">
+                <asvg:svgBlip xmlns:asvg="http://schemas.microsoft.com/office/drawing/2016/SVG/main" r:embed="rId8"/>
+              </a:ext>
+            </a:extLst>
+          </a:blip>
+          <a:stretch>
+            <a:fillRect/>
+          </a:stretch>
+        </p:blipFill>
+        <p:spPr>
+          <a:xfrm>
+            <a:off x="11077956" y="4727448"/>
+            <a:ext cx="246888" cy="246888"/>
+          </a:xfrm>
+          <a:prstGeom prst="rect">
+            <a:avLst/>
+          </a:prstGeom>
+        </p:spPr>
+      </p:pic>
+      <p:sp>
+        <p:nvSpPr>
+          <p:cNvPr id="24" name="Text 18"/>
+          <p:cNvSpPr txBox="1"/>
+          <p:nvPr/>
+        </p:nvSpPr>
+        <p:spPr>
+          <a:xfrm>
+            <a:off x="6469380" y="5079492"/>
+            <a:ext cx="4942332" cy="347472"/>
+          </a:xfrm>
+          <a:prstGeom prst="rect">
+            <a:avLst/>
+          </a:prstGeom>
+          <a:noFill/>
+          <a:ln/>
+        </p:spPr>
+        <p:txBody>
+          <a:bodyPr wrap="square" lIns="0" tIns="0" rIns="0" bIns="0" rtlCol="0" anchor="ctr"/>
+          <a:lstStyle/>
+          <a:p>
+            <a:pPr rtl="1" algn="r" indent="0" marL="0">
+              <a:buNone/>
+            </a:pPr>
+            <a:r>
+              <a:rPr lang="fa-IR" altLang="en-US" sz="1300" b="1" dirty="0">
+                <a:solidFill>
+                  <a:srgbClr val="1E293B"/>
+                </a:solidFill>
+                <a:latin typeface="Kalameh" pitchFamily="34" charset="0"/>
+                <a:ea typeface="Kalameh" pitchFamily="34" charset="-122"/>
+                <a:cs typeface="Kalameh" pitchFamily="34" charset="-120"/>
+              </a:rPr>
+              <a:t>مدیریت هوشمند بار</a:t>
+            </a:r>
+            <a:endParaRPr lang="fa-IR" sz="1300" dirty="0"/>
+          </a:p>
+        </p:txBody>
+      </p:sp>
+      <p:sp>
+        <p:nvSpPr>
+          <p:cNvPr id="25" name="Text 19"/>
+          <p:cNvSpPr txBox="1"/>
+          <p:nvPr/>
+        </p:nvSpPr>
+        <p:spPr>
+          <a:xfrm>
+            <a:off x="6469380" y="5509260"/>
+            <a:ext cx="4942332" cy="352044"/>
+          </a:xfrm>
+          <a:prstGeom prst="rect">
+            <a:avLst/>
+          </a:prstGeom>
+          <a:noFill/>
+          <a:ln/>
+        </p:spPr>
+        <p:txBody>
+          <a:bodyPr wrap="square" lIns="0" tIns="0" rIns="0" bIns="0" rtlCol="0" anchor="t"/>
+          <a:lstStyle/>
+          <a:p>
+            <a:pPr rtl="1" algn="r" indent="0" marL="0">
+              <a:buNone/>
+            </a:pPr>
+            <a:r>
+              <a:rPr lang="fa-IR" altLang="en-US" sz="1050" dirty="0">
+                <a:solidFill>
+                  <a:srgbClr val="64748B"/>
+                </a:solidFill>
+                <a:latin typeface="Kalameh" pitchFamily="34" charset="0"/>
+                <a:ea typeface="Kalameh" pitchFamily="34" charset="-122"/>
+                <a:cs typeface="Kalameh" pitchFamily="34" charset="-120"/>
+              </a:rPr>
+              <a:t>توازن مصرف انرژی و کمک به پایداری شبکه برق در ساعات اوج مصرف.</a:t>
+            </a:r>
+            <a:endParaRPr lang="fa-IR" sz="1050" dirty="0"/>
+          </a:p>
+        </p:txBody>
+      </p:sp>
+      <p:sp>
+        <p:nvSpPr>
+          <p:cNvPr id="26" name="Text 20"/>
           <p:cNvSpPr txBox="1"/>
           <p:nvPr/>
         </p:nvSpPr>
@@ -2993,13 +4167,13 @@
             <a:r>
               <a:rPr lang="en-US" altLang="en-US" sz="750" dirty="0">
                 <a:solidFill>
-                  <a:srgbClr val="A0A0A0"/>
-                </a:solidFill>
-                <a:latin typeface="Kalameh" pitchFamily="34" charset="0"/>
-                <a:ea typeface="Kalameh" pitchFamily="34" charset="-122"/>
-                <a:cs typeface="Kalameh" pitchFamily="34" charset="-120"/>
-              </a:rPr>
-              <a:t>03</a:t>
+                  <a:srgbClr val="64748B"/>
+                </a:solidFill>
+                <a:latin typeface="Kalameh" pitchFamily="34" charset="0"/>
+                <a:ea typeface="Kalameh" pitchFamily="34" charset="-122"/>
+                <a:cs typeface="Kalameh" pitchFamily="34" charset="-120"/>
+              </a:rPr>
+              <a:t>04</a:t>
             </a:r>
             <a:endParaRPr lang="en-US" sz="750" dirty="0"/>
           </a:p>
@@ -3007,7 +4181,7 @@
       </p:sp>
       <p:sp>
         <p:nvSpPr>
-          <p:cNvPr id="8" name="Text 5"/>
+          <p:cNvPr id="27" name="Text 21"/>
           <p:cNvSpPr txBox="1"/>
           <p:nvPr/>
         </p:nvSpPr>
@@ -3032,7 +4206,7 @@
             <a:r>
               <a:rPr lang="en-US" altLang="en-US" sz="750" dirty="0">
                 <a:solidFill>
-                  <a:srgbClr val="A0A0A0"/>
+                  <a:srgbClr val="64748B"/>
                 </a:solidFill>
                 <a:latin typeface="Kalameh" pitchFamily="34" charset="0"/>
                 <a:ea typeface="Kalameh" pitchFamily="34" charset="-122"/>
@@ -3046,7 +4220,7 @@
       </p:sp>
       <p:sp>
         <p:nvSpPr>
-          <p:cNvPr id="9" name="Text 6"/>
+          <p:cNvPr id="28" name="Text 22"/>
           <p:cNvSpPr txBox="1"/>
           <p:nvPr/>
         </p:nvSpPr>
@@ -3071,7 +4245,7 @@
             <a:r>
               <a:rPr lang="en-US" altLang="en-US" sz="750" dirty="0">
                 <a:solidFill>
-                  <a:srgbClr val="A0A0A0"/>
+                  <a:srgbClr val="64748B"/>
                 </a:solidFill>
                 <a:latin typeface="Kalameh" pitchFamily="34" charset="0"/>
                 <a:ea typeface="Kalameh" pitchFamily="34" charset="-122"/>
@@ -3091,13 +4265,13 @@
 </p:sld>
 </file>
 
-<file path=ppt/slides/slide4.xml><?xml version="1.0" encoding="utf-8"?>
+<file path=ppt/slides/slide5.xml><?xml version="1.0" encoding="utf-8"?>
 <p:sld xmlns:a="http://schemas.openxmlformats.org/drawingml/2006/main" xmlns:r="http://schemas.openxmlformats.org/officeDocument/2006/relationships" xmlns:p="http://schemas.openxmlformats.org/presentationml/2006/main">
-  <p:cSld name="Slide 4">
+  <p:cSld name="Slide 5">
     <p:bg>
       <p:bgPr>
         <a:solidFill>
-          <a:srgbClr val="1A5F7A"/>
+          <a:srgbClr val="F8FAFC"/>
         </a:solidFill>
       </p:bgPr>
     </p:bg>
@@ -3130,11 +4304,11 @@
             <a:avLst/>
           </a:prstGeom>
           <a:solidFill>
-            <a:srgbClr val="FFD166"/>
+            <a:srgbClr val="10B981"/>
           </a:solidFill>
           <a:ln w="12700">
             <a:solidFill>
-              <a:srgbClr val="FFD166">
+              <a:srgbClr val="10B981">
                 <a:alpha val="0"/>
               </a:srgbClr>
             </a:solidFill>
@@ -3150,8 +4324,8 @@
         </p:nvSpPr>
         <p:spPr>
           <a:xfrm>
-            <a:off x="4572000" y="329184"/>
-            <a:ext cx="6812280" cy="365760"/>
+            <a:off x="4937760" y="329184"/>
+            <a:ext cx="6446520" cy="365760"/>
           </a:xfrm>
           <a:prstGeom prst="rect">
             <a:avLst/>
@@ -3163,21 +4337,21 @@
           <a:bodyPr wrap="square" lIns="0" tIns="0" rIns="0" bIns="0" rtlCol="0" anchor="ctr"/>
           <a:lstStyle/>
           <a:p>
-            <a:pPr algn="r" indent="0" marL="0">
-              <a:buNone/>
-            </a:pPr>
-            <a:r>
-              <a:rPr lang="en-US" altLang="en-US" sz="1050" b="1" spc="50" kern="0" dirty="0">
-                <a:solidFill>
-                  <a:srgbClr val="FFD166"/>
-                </a:solidFill>
-                <a:latin typeface="Kalameh" pitchFamily="34" charset="0"/>
-                <a:ea typeface="Kalameh" pitchFamily="34" charset="-122"/>
-                <a:cs typeface="Kalameh" pitchFamily="34" charset="-120"/>
-              </a:rPr>
-              <a:t>04</a:t>
-            </a:r>
-            <a:endParaRPr lang="en-US" sz="1050" dirty="0"/>
+            <a:pPr rtl="1" algn="r" indent="0" marL="0">
+              <a:buNone/>
+            </a:pPr>
+            <a:r>
+              <a:rPr lang="fa-IR" altLang="en-US" sz="1050" b="1" spc="50" kern="0" dirty="0">
+                <a:solidFill>
+                  <a:srgbClr val="10B981"/>
+                </a:solidFill>
+                <a:latin typeface="Kalameh" pitchFamily="34" charset="0"/>
+                <a:ea typeface="Kalameh" pitchFamily="34" charset="-122"/>
+                <a:cs typeface="Kalameh" pitchFamily="34" charset="-120"/>
+              </a:rPr>
+              <a:t>سفر مشتری</a:t>
+            </a:r>
+            <a:endParaRPr lang="fa-IR" sz="1050" dirty="0"/>
           </a:p>
         </p:txBody>
       </p:sp>
@@ -3189,8 +4363,8 @@
         </p:nvSpPr>
         <p:spPr>
           <a:xfrm>
-            <a:off x="4572000" y="731520"/>
-            <a:ext cx="7086600" cy="868680"/>
+            <a:off x="4937760" y="731520"/>
+            <a:ext cx="6720840" cy="868680"/>
           </a:xfrm>
           <a:prstGeom prst="rect">
             <a:avLst/>
@@ -3206,40 +4380,131 @@
               <a:buNone/>
             </a:pPr>
             <a:r>
-              <a:rPr lang="fa-IR" altLang="en-US" sz="2300" b="1" dirty="0">
-                <a:solidFill>
-                  <a:srgbClr val="F8FAFC"/>
-                </a:solidFill>
-                <a:latin typeface="Kalameh" pitchFamily="34" charset="0"/>
-                <a:ea typeface="Kalameh" pitchFamily="34" charset="-122"/>
-                <a:cs typeface="Kalameh" pitchFamily="34" charset="-120"/>
-              </a:rPr>
-              <a:t>مزایای شارژ در فروشگاه‌ها</a:t>
-            </a:r>
-            <a:endParaRPr lang="fa-IR" sz="2300" dirty="0"/>
-          </a:p>
-        </p:txBody>
-      </p:sp>
-      <p:sp>
-        <p:nvSpPr>
-          <p:cNvPr id="5" name="Shape 3"/>
+              <a:rPr lang="fa-IR" altLang="en-US" sz="2400" b="1" dirty="0">
+                <a:solidFill>
+                  <a:srgbClr val="1E293B"/>
+                </a:solidFill>
+                <a:latin typeface="Kalameh" pitchFamily="34" charset="0"/>
+                <a:ea typeface="Kalameh" pitchFamily="34" charset="-122"/>
+                <a:cs typeface="Kalameh" pitchFamily="34" charset="-120"/>
+              </a:rPr>
+              <a:t>مسیر تجربه راننده از ورود تا خروج</a:t>
+            </a:r>
+            <a:endParaRPr lang="fa-IR" sz="2400" dirty="0"/>
+          </a:p>
+        </p:txBody>
+      </p:sp>
+      <p:sp>
+        <p:nvSpPr>
+          <p:cNvPr id="5" name="Text 3"/>
+          <p:cNvSpPr txBox="1"/>
+          <p:nvPr/>
+        </p:nvSpPr>
+        <p:spPr>
+          <a:xfrm>
+            <a:off x="4937760" y="1645920"/>
+            <a:ext cx="6720840" cy="594360"/>
+          </a:xfrm>
+          <a:prstGeom prst="rect">
+            <a:avLst/>
+          </a:prstGeom>
+          <a:noFill/>
+          <a:ln/>
+        </p:spPr>
+        <p:txBody>
+          <a:bodyPr wrap="square" lIns="0" tIns="0" rIns="0" bIns="0" rtlCol="0" anchor="t"/>
+          <a:lstStyle/>
+          <a:p>
+            <a:pPr rtl="1" algn="r" indent="0" marL="0">
+              <a:buNone/>
+            </a:pPr>
+            <a:r>
+              <a:rPr lang="fa-IR" altLang="en-US" sz="1250" dirty="0">
+                <a:solidFill>
+                  <a:srgbClr val="64748B"/>
+                </a:solidFill>
+                <a:latin typeface="Kalameh" pitchFamily="34" charset="0"/>
+                <a:ea typeface="Kalameh" pitchFamily="34" charset="-122"/>
+                <a:cs typeface="Kalameh" pitchFamily="34" charset="-120"/>
+              </a:rPr>
+              <a:t>گام‌های یک توقف بهینه در فروشگاه مجهز به شارژ سریع</a:t>
+            </a:r>
+            <a:endParaRPr lang="fa-IR" sz="1250" dirty="0"/>
+          </a:p>
+        </p:txBody>
+      </p:sp>
+      <p:sp>
+        <p:nvSpPr>
+          <p:cNvPr id="6" name="Shape 4"/>
           <p:cNvSpPr/>
           <p:nvPr/>
         </p:nvSpPr>
         <p:spPr>
           <a:xfrm>
-            <a:off x="566928" y="2395728"/>
-            <a:ext cx="5349240" cy="3611880"/>
+            <a:off x="777240" y="3703320"/>
+            <a:ext cx="10634472" cy="0"/>
+          </a:xfrm>
+          <a:prstGeom prst="line">
+            <a:avLst/>
+          </a:prstGeom>
+          <a:noFill/>
+          <a:ln w="22860">
+            <a:solidFill>
+              <a:srgbClr val="E9EEF5">
+                <a:alpha val="80000"/>
+              </a:srgbClr>
+            </a:solidFill>
+            <a:prstDash val="solid"/>
+            <a:headEnd type="none"/>
+            <a:tailEnd type="none"/>
+          </a:ln>
+        </p:spPr>
+      </p:sp>
+      <p:sp>
+        <p:nvSpPr>
+          <p:cNvPr id="7" name="Shape 5"/>
+          <p:cNvSpPr/>
+          <p:nvPr/>
+        </p:nvSpPr>
+        <p:spPr>
+          <a:xfrm>
+            <a:off x="576072" y="3502152"/>
+            <a:ext cx="402336" cy="402336"/>
+          </a:xfrm>
+          <a:prstGeom prst="ellipse">
+            <a:avLst/>
+          </a:prstGeom>
+          <a:solidFill>
+            <a:srgbClr val="10B981"/>
+          </a:solidFill>
+          <a:ln w="25400">
+            <a:solidFill>
+              <a:srgbClr val="FFFFFF"/>
+            </a:solidFill>
+            <a:prstDash val="solid"/>
+          </a:ln>
+        </p:spPr>
+      </p:sp>
+      <p:sp>
+        <p:nvSpPr>
+          <p:cNvPr id="8" name="Shape 6"/>
+          <p:cNvSpPr/>
+          <p:nvPr/>
+        </p:nvSpPr>
+        <p:spPr>
+          <a:xfrm>
+            <a:off x="320040" y="2267712"/>
+            <a:ext cx="2057400" cy="1280160"/>
           </a:xfrm>
           <a:prstGeom prst="roundRect">
             <a:avLst/>
           </a:prstGeom>
           <a:solidFill>
-            <a:srgbClr val="172033"/>
+            <a:srgbClr val="FFFFFF"/>
           </a:solidFill>
           <a:ln w="8890">
             <a:solidFill>
-              <a:srgbClr val="475569">
+              <a:srgbClr val="E9EEF5">
                 <a:alpha val="65000"/>
               </a:srgbClr>
             </a:solidFill>
@@ -3249,14 +4514,14 @@
       </p:sp>
       <p:sp>
         <p:nvSpPr>
-          <p:cNvPr id="6" name="Text 4"/>
-          <p:cNvSpPr txBox="1"/>
-          <p:nvPr/>
-        </p:nvSpPr>
-        <p:spPr>
-          <a:xfrm>
-            <a:off x="886968" y="2651760"/>
-            <a:ext cx="4709160" cy="365760"/>
+          <p:cNvPr id="9" name="Text 7"/>
+          <p:cNvSpPr txBox="1"/>
+          <p:nvPr/>
+        </p:nvSpPr>
+        <p:spPr>
+          <a:xfrm>
+            <a:off x="457200" y="2377440"/>
+            <a:ext cx="1691640" cy="219456"/>
           </a:xfrm>
           <a:prstGeom prst="rect">
             <a:avLst/>
@@ -3268,64 +4533,34 @@
           <a:bodyPr wrap="square" lIns="0" tIns="0" rIns="0" bIns="0" rtlCol="0" anchor="ctr"/>
           <a:lstStyle/>
           <a:p>
-            <a:pPr rtl="1" algn="r" indent="0" marL="0">
-              <a:buNone/>
-            </a:pPr>
-            <a:r>
-              <a:rPr lang="fa-IR" altLang="en-US" sz="1500" b="1" dirty="0">
-                <a:solidFill>
-                  <a:srgbClr val="CBD5E1"/>
-                </a:solidFill>
-                <a:latin typeface="Kalameh" pitchFamily="34" charset="0"/>
-                <a:ea typeface="Kalameh" pitchFamily="34" charset="-122"/>
-                <a:cs typeface="Kalameh" pitchFamily="34" charset="-120"/>
-              </a:rPr>
-              <a:t>برای رانندگان</a:t>
-            </a:r>
-            <a:endParaRPr lang="fa-IR" sz="1500" dirty="0"/>
-          </a:p>
-        </p:txBody>
-      </p:sp>
-      <p:pic>
-        <p:nvPicPr>
-          <p:cNvPr id="7" name="Image 0" descr="preencoded.png">    </p:cNvPr>
-          <p:cNvPicPr>
-            <a:picLocks noChangeAspect="1"/>
-          </p:cNvPicPr>
-          <p:nvPr/>
-        </p:nvPicPr>
-        <p:blipFill>
-          <a:blip r:embed="rId1">
-            <a:extLst>
-              <a:ext uri="{96DAC541-7B7A-43D3-8B79-37D633B846F1}">
-                <asvg:svgBlip xmlns:asvg="http://schemas.microsoft.com/office/drawing/2016/SVG/main" r:embed="rId2"/>
-              </a:ext>
-            </a:extLst>
-          </a:blip>
-          <a:stretch>
-            <a:fillRect/>
-          </a:stretch>
-        </p:blipFill>
-        <p:spPr>
-          <a:xfrm>
-            <a:off x="5157216" y="3227832"/>
-            <a:ext cx="365760" cy="365760"/>
-          </a:xfrm>
-          <a:prstGeom prst="rect">
-            <a:avLst/>
-          </a:prstGeom>
-        </p:spPr>
-      </p:pic>
-      <p:sp>
-        <p:nvSpPr>
-          <p:cNvPr id="8" name="Text 5"/>
-          <p:cNvSpPr txBox="1"/>
-          <p:nvPr/>
-        </p:nvSpPr>
-        <p:spPr>
-          <a:xfrm>
-            <a:off x="2075688" y="3191256"/>
-            <a:ext cx="2880360" cy="256032"/>
+            <a:pPr rtl="1" algn="ctr" indent="0" marL="0">
+              <a:buNone/>
+            </a:pPr>
+            <a:r>
+              <a:rPr lang="fa-IR" altLang="en-US" sz="950" b="1" dirty="0">
+                <a:solidFill>
+                  <a:srgbClr val="10B981"/>
+                </a:solidFill>
+                <a:latin typeface="Kalameh" pitchFamily="34" charset="0"/>
+                <a:ea typeface="Kalameh" pitchFamily="34" charset="-122"/>
+                <a:cs typeface="Kalameh" pitchFamily="34" charset="-120"/>
+              </a:rPr>
+              <a:t>۰1</a:t>
+            </a:r>
+            <a:endParaRPr lang="fa-IR" sz="950" dirty="0"/>
+          </a:p>
+        </p:txBody>
+      </p:sp>
+      <p:sp>
+        <p:nvSpPr>
+          <p:cNvPr id="10" name="Text 8"/>
+          <p:cNvSpPr txBox="1"/>
+          <p:nvPr/>
+        </p:nvSpPr>
+        <p:spPr>
+          <a:xfrm>
+            <a:off x="457200" y="2642616"/>
+            <a:ext cx="1691640" cy="310896"/>
           </a:xfrm>
           <a:prstGeom prst="rect">
             <a:avLst/>
@@ -3337,19 +4572,19 @@
           <a:bodyPr wrap="square" lIns="0" tIns="0" rIns="0" bIns="0" rtlCol="0" anchor="ctr"/>
           <a:lstStyle/>
           <a:p>
-            <a:pPr rtl="1" algn="r" indent="0" marL="0">
+            <a:pPr rtl="1" algn="ctr" indent="0" marL="0">
               <a:buNone/>
             </a:pPr>
             <a:r>
               <a:rPr lang="fa-IR" altLang="en-US" sz="1050" b="1" dirty="0">
                 <a:solidFill>
-                  <a:srgbClr val="FFFFFF"/>
-                </a:solidFill>
-                <a:latin typeface="Kalameh" pitchFamily="34" charset="0"/>
-                <a:ea typeface="Kalameh" pitchFamily="34" charset="-122"/>
-                <a:cs typeface="Kalameh" pitchFamily="34" charset="-120"/>
-              </a:rPr>
-              <a:t>کاهش نگرانی از تمام شدن باتری</a:t>
+                  <a:srgbClr val="1E293B"/>
+                </a:solidFill>
+                <a:latin typeface="Kalameh" pitchFamily="34" charset="0"/>
+                <a:ea typeface="Kalameh" pitchFamily="34" charset="-122"/>
+                <a:cs typeface="Kalameh" pitchFamily="34" charset="-120"/>
+              </a:rPr>
+              <a:t>آغاز ادامه سفر</a:t>
             </a:r>
             <a:endParaRPr lang="fa-IR" sz="1050" dirty="0"/>
           </a:p>
@@ -3357,14 +4592,14 @@
       </p:sp>
       <p:sp>
         <p:nvSpPr>
-          <p:cNvPr id="9" name="Text 6"/>
-          <p:cNvSpPr txBox="1"/>
-          <p:nvPr/>
-        </p:nvSpPr>
-        <p:spPr>
-          <a:xfrm>
-            <a:off x="932688" y="3465576"/>
-            <a:ext cx="4023360" cy="365760"/>
+          <p:cNvPr id="11" name="Text 9"/>
+          <p:cNvSpPr txBox="1"/>
+          <p:nvPr/>
+        </p:nvSpPr>
+        <p:spPr>
+          <a:xfrm>
+            <a:off x="457200" y="2990088"/>
+            <a:ext cx="1691640" cy="438912"/>
           </a:xfrm>
           <a:prstGeom prst="rect">
             <a:avLst/>
@@ -3376,152 +4611,96 @@
           <a:bodyPr wrap="square" lIns="0" tIns="0" rIns="0" bIns="0" rtlCol="0" anchor="t"/>
           <a:lstStyle/>
           <a:p>
-            <a:pPr rtl="1" algn="r" indent="0" marL="0">
+            <a:pPr rtl="1" algn="ctr" indent="0" marL="0">
               <a:buNone/>
             </a:pPr>
             <a:r>
               <a:rPr lang="fa-IR" altLang="en-US" sz="1050" dirty="0">
                 <a:solidFill>
-                  <a:srgbClr val="B8C3D4"/>
-                </a:solidFill>
-                <a:latin typeface="Kalameh" pitchFamily="34" charset="0"/>
-                <a:ea typeface="Kalameh" pitchFamily="34" charset="-122"/>
-                <a:cs typeface="Kalameh" pitchFamily="34" charset="-120"/>
-              </a:rPr>
-              <a:t>دسترسی به شارژ سریع در مسیرها و مراکز خرید، اعتماد به سفرهای طولانی را افزایش می‌دهد.</a:t>
+                  <a:srgbClr val="64748B"/>
+                </a:solidFill>
+                <a:latin typeface="Kalameh" pitchFamily="34" charset="0"/>
+                <a:ea typeface="Kalameh" pitchFamily="34" charset="-122"/>
+                <a:cs typeface="Kalameh" pitchFamily="34" charset="-120"/>
+              </a:rPr>
+              <a:t>با خودروی کاملاً شارژ شده و بدون اتلاف وقت، سفر با خیال آسوده ادامه می‌یابد.</a:t>
             </a:r>
             <a:endParaRPr lang="fa-IR" sz="1050" dirty="0"/>
           </a:p>
         </p:txBody>
       </p:sp>
-      <p:pic>
-        <p:nvPicPr>
-          <p:cNvPr id="10" name="Image 1" descr="preencoded.png">    </p:cNvPr>
-          <p:cNvPicPr>
-            <a:picLocks noChangeAspect="1"/>
-          </p:cNvPicPr>
-          <p:nvPr/>
-        </p:nvPicPr>
-        <p:blipFill>
-          <a:blip r:embed="rId3">
-            <a:extLst>
-              <a:ext uri="{96DAC541-7B7A-43D3-8B79-37D633B846F1}">
-                <asvg:svgBlip xmlns:asvg="http://schemas.microsoft.com/office/drawing/2016/SVG/main" r:embed="rId4"/>
-              </a:ext>
-            </a:extLst>
-          </a:blip>
-          <a:stretch>
-            <a:fillRect/>
-          </a:stretch>
-        </p:blipFill>
-        <p:spPr>
-          <a:xfrm>
-            <a:off x="5157216" y="3977640"/>
-            <a:ext cx="365760" cy="365760"/>
-          </a:xfrm>
-          <a:prstGeom prst="rect">
-            <a:avLst/>
-          </a:prstGeom>
-        </p:spPr>
-      </p:pic>
-      <p:sp>
-        <p:nvSpPr>
-          <p:cNvPr id="11" name="Text 7"/>
-          <p:cNvSpPr txBox="1"/>
-          <p:nvPr/>
-        </p:nvSpPr>
-        <p:spPr>
-          <a:xfrm>
-            <a:off x="2075688" y="3941064"/>
-            <a:ext cx="2880360" cy="256032"/>
-          </a:xfrm>
-          <a:prstGeom prst="rect">
-            <a:avLst/>
-          </a:prstGeom>
-          <a:noFill/>
-          <a:ln/>
-        </p:spPr>
-        <p:txBody>
-          <a:bodyPr wrap="square" lIns="0" tIns="0" rIns="0" bIns="0" rtlCol="0" anchor="ctr"/>
-          <a:lstStyle/>
-          <a:p>
-            <a:pPr rtl="1" algn="r" indent="0" marL="0">
-              <a:buNone/>
-            </a:pPr>
-            <a:r>
-              <a:rPr lang="fa-IR" altLang="en-US" sz="1050" b="1" dirty="0">
-                <a:solidFill>
-                  <a:srgbClr val="FFFFFF"/>
-                </a:solidFill>
-                <a:latin typeface="Kalameh" pitchFamily="34" charset="0"/>
-                <a:ea typeface="Kalameh" pitchFamily="34" charset="-122"/>
-                <a:cs typeface="Kalameh" pitchFamily="34" charset="-120"/>
-              </a:rPr>
-              <a:t>بهینه‌سازی زمان</a:t>
-            </a:r>
-            <a:endParaRPr lang="fa-IR" sz="1050" dirty="0"/>
-          </a:p>
-        </p:txBody>
-      </p:sp>
-      <p:sp>
-        <p:nvSpPr>
-          <p:cNvPr id="12" name="Text 8"/>
-          <p:cNvSpPr txBox="1"/>
-          <p:nvPr/>
-        </p:nvSpPr>
-        <p:spPr>
-          <a:xfrm>
-            <a:off x="932688" y="4215384"/>
-            <a:ext cx="4023360" cy="365760"/>
-          </a:xfrm>
-          <a:prstGeom prst="rect">
-            <a:avLst/>
-          </a:prstGeom>
-          <a:noFill/>
-          <a:ln/>
-        </p:spPr>
-        <p:txBody>
-          <a:bodyPr wrap="square" lIns="0" tIns="0" rIns="0" bIns="0" rtlCol="0" anchor="t"/>
-          <a:lstStyle/>
-          <a:p>
-            <a:pPr rtl="1" algn="r" indent="0" marL="0">
-              <a:buNone/>
-            </a:pPr>
-            <a:r>
-              <a:rPr lang="fa-IR" altLang="en-US" sz="1050" dirty="0">
-                <a:solidFill>
-                  <a:srgbClr val="B8C3D4"/>
-                </a:solidFill>
-                <a:latin typeface="Kalameh" pitchFamily="34" charset="0"/>
-                <a:ea typeface="Kalameh" pitchFamily="34" charset="-122"/>
-                <a:cs typeface="Kalameh" pitchFamily="34" charset="-120"/>
-              </a:rPr>
-              <a:t>شارژ در حین خرید، زمان توقف را به زمان مفید تبدیل می‌کند.</a:t>
-            </a:r>
-            <a:endParaRPr lang="fa-IR" sz="1050" dirty="0"/>
-          </a:p>
-        </p:txBody>
-      </p:sp>
-      <p:sp>
-        <p:nvSpPr>
-          <p:cNvPr id="13" name="Shape 9"/>
+      <p:sp>
+        <p:nvSpPr>
+          <p:cNvPr id="12" name="Shape 10"/>
           <p:cNvSpPr/>
           <p:nvPr/>
         </p:nvSpPr>
         <p:spPr>
           <a:xfrm>
-            <a:off x="6272784" y="2395728"/>
-            <a:ext cx="5349240" cy="3611880"/>
+            <a:off x="777240" y="3547872"/>
+            <a:ext cx="0" cy="-45720"/>
+          </a:xfrm>
+          <a:prstGeom prst="line">
+            <a:avLst/>
+          </a:prstGeom>
+          <a:noFill/>
+          <a:ln w="10160">
+            <a:solidFill>
+              <a:srgbClr val="E9EEF5">
+                <a:alpha val="75000"/>
+              </a:srgbClr>
+            </a:solidFill>
+            <a:prstDash val="solid"/>
+            <a:headEnd type="none"/>
+            <a:tailEnd type="none"/>
+          </a:ln>
+        </p:spPr>
+      </p:sp>
+      <p:sp>
+        <p:nvSpPr>
+          <p:cNvPr id="13" name="Shape 11"/>
+          <p:cNvSpPr/>
+          <p:nvPr/>
+        </p:nvSpPr>
+        <p:spPr>
+          <a:xfrm>
+            <a:off x="4120896" y="3502152"/>
+            <a:ext cx="402336" cy="402336"/>
+          </a:xfrm>
+          <a:prstGeom prst="ellipse">
+            <a:avLst/>
+          </a:prstGeom>
+          <a:solidFill>
+            <a:srgbClr val="F59E0B"/>
+          </a:solidFill>
+          <a:ln w="25400">
+            <a:solidFill>
+              <a:srgbClr val="FFFFFF"/>
+            </a:solidFill>
+            <a:prstDash val="solid"/>
+          </a:ln>
+        </p:spPr>
+      </p:sp>
+      <p:sp>
+        <p:nvSpPr>
+          <p:cNvPr id="14" name="Shape 12"/>
+          <p:cNvSpPr/>
+          <p:nvPr/>
+        </p:nvSpPr>
+        <p:spPr>
+          <a:xfrm>
+            <a:off x="3297936" y="4069080"/>
+            <a:ext cx="2057400" cy="1280160"/>
           </a:xfrm>
           <a:prstGeom prst="roundRect">
             <a:avLst/>
           </a:prstGeom>
           <a:solidFill>
-            <a:srgbClr val="132D32"/>
+            <a:srgbClr val="FFFFFF"/>
           </a:solidFill>
           <a:ln w="8890">
             <a:solidFill>
-              <a:srgbClr val="EF476F">
+              <a:srgbClr val="E9EEF5">
                 <a:alpha val="65000"/>
               </a:srgbClr>
             </a:solidFill>
@@ -3531,14 +4710,14 @@
       </p:sp>
       <p:sp>
         <p:nvSpPr>
-          <p:cNvPr id="14" name="Text 10"/>
-          <p:cNvSpPr txBox="1"/>
-          <p:nvPr/>
-        </p:nvSpPr>
-        <p:spPr>
-          <a:xfrm>
-            <a:off x="6592824" y="2651760"/>
-            <a:ext cx="4709160" cy="365760"/>
+          <p:cNvPr id="15" name="Text 13"/>
+          <p:cNvSpPr txBox="1"/>
+          <p:nvPr/>
+        </p:nvSpPr>
+        <p:spPr>
+          <a:xfrm>
+            <a:off x="3453384" y="4178808"/>
+            <a:ext cx="1691640" cy="219456"/>
           </a:xfrm>
           <a:prstGeom prst="rect">
             <a:avLst/>
@@ -3550,64 +4729,34 @@
           <a:bodyPr wrap="square" lIns="0" tIns="0" rIns="0" bIns="0" rtlCol="0" anchor="ctr"/>
           <a:lstStyle/>
           <a:p>
-            <a:pPr rtl="1" algn="r" indent="0" marL="0">
-              <a:buNone/>
-            </a:pPr>
-            <a:r>
-              <a:rPr lang="fa-IR" altLang="en-US" sz="1500" b="1" dirty="0">
-                <a:solidFill>
-                  <a:srgbClr val="EF476F"/>
-                </a:solidFill>
-                <a:latin typeface="Kalameh" pitchFamily="34" charset="0"/>
-                <a:ea typeface="Kalameh" pitchFamily="34" charset="-122"/>
-                <a:cs typeface="Kalameh" pitchFamily="34" charset="-120"/>
-              </a:rPr>
-              <a:t>برای فروشگاه‌ها</a:t>
-            </a:r>
-            <a:endParaRPr lang="fa-IR" sz="1500" dirty="0"/>
-          </a:p>
-        </p:txBody>
-      </p:sp>
-      <p:pic>
-        <p:nvPicPr>
-          <p:cNvPr id="15" name="Image 2" descr="preencoded.png">    </p:cNvPr>
-          <p:cNvPicPr>
-            <a:picLocks noChangeAspect="1"/>
-          </p:cNvPicPr>
-          <p:nvPr/>
-        </p:nvPicPr>
-        <p:blipFill>
-          <a:blip r:embed="rId5">
-            <a:extLst>
-              <a:ext uri="{96DAC541-7B7A-43D3-8B79-37D633B846F1}">
-                <asvg:svgBlip xmlns:asvg="http://schemas.microsoft.com/office/drawing/2016/SVG/main" r:embed="rId6"/>
-              </a:ext>
-            </a:extLst>
-          </a:blip>
-          <a:stretch>
-            <a:fillRect/>
-          </a:stretch>
-        </p:blipFill>
-        <p:spPr>
-          <a:xfrm>
-            <a:off x="10863072" y="3227832"/>
-            <a:ext cx="365760" cy="365760"/>
-          </a:xfrm>
-          <a:prstGeom prst="rect">
-            <a:avLst/>
-          </a:prstGeom>
-        </p:spPr>
-      </p:pic>
-      <p:sp>
-        <p:nvSpPr>
-          <p:cNvPr id="16" name="Text 11"/>
-          <p:cNvSpPr txBox="1"/>
-          <p:nvPr/>
-        </p:nvSpPr>
-        <p:spPr>
-          <a:xfrm>
-            <a:off x="7781544" y="3191256"/>
-            <a:ext cx="2880360" cy="256032"/>
+            <a:pPr rtl="1" algn="ctr" indent="0" marL="0">
+              <a:buNone/>
+            </a:pPr>
+            <a:r>
+              <a:rPr lang="fa-IR" altLang="en-US" sz="950" b="1" dirty="0">
+                <a:solidFill>
+                  <a:srgbClr val="10B981"/>
+                </a:solidFill>
+                <a:latin typeface="Kalameh" pitchFamily="34" charset="0"/>
+                <a:ea typeface="Kalameh" pitchFamily="34" charset="-122"/>
+                <a:cs typeface="Kalameh" pitchFamily="34" charset="-120"/>
+              </a:rPr>
+              <a:t>۰2</a:t>
+            </a:r>
+            <a:endParaRPr lang="fa-IR" sz="950" dirty="0"/>
+          </a:p>
+        </p:txBody>
+      </p:sp>
+      <p:sp>
+        <p:nvSpPr>
+          <p:cNvPr id="16" name="Text 14"/>
+          <p:cNvSpPr txBox="1"/>
+          <p:nvPr/>
+        </p:nvSpPr>
+        <p:spPr>
+          <a:xfrm>
+            <a:off x="3453384" y="4443984"/>
+            <a:ext cx="1691640" cy="310896"/>
           </a:xfrm>
           <a:prstGeom prst="rect">
             <a:avLst/>
@@ -3619,19 +4768,19 @@
           <a:bodyPr wrap="square" lIns="0" tIns="0" rIns="0" bIns="0" rtlCol="0" anchor="ctr"/>
           <a:lstStyle/>
           <a:p>
-            <a:pPr rtl="1" algn="r" indent="0" marL="0">
+            <a:pPr rtl="1" algn="ctr" indent="0" marL="0">
               <a:buNone/>
             </a:pPr>
             <a:r>
               <a:rPr lang="fa-IR" altLang="en-US" sz="1050" b="1" dirty="0">
                 <a:solidFill>
-                  <a:srgbClr val="FFFFFF"/>
-                </a:solidFill>
-                <a:latin typeface="Kalameh" pitchFamily="34" charset="0"/>
-                <a:ea typeface="Kalameh" pitchFamily="34" charset="-122"/>
-                <a:cs typeface="Kalameh" pitchFamily="34" charset="-120"/>
-              </a:rPr>
-              <a:t>افزایش مدت حضور مشتریان</a:t>
+                  <a:srgbClr val="1E293B"/>
+                </a:solidFill>
+                <a:latin typeface="Kalameh" pitchFamily="34" charset="0"/>
+                <a:ea typeface="Kalameh" pitchFamily="34" charset="-122"/>
+                <a:cs typeface="Kalameh" pitchFamily="34" charset="-120"/>
+              </a:rPr>
+              <a:t>خرید و بهره‌وری از زمان</a:t>
             </a:r>
             <a:endParaRPr lang="fa-IR" sz="1050" dirty="0"/>
           </a:p>
@@ -3639,14 +4788,14 @@
       </p:sp>
       <p:sp>
         <p:nvSpPr>
-          <p:cNvPr id="17" name="Text 12"/>
-          <p:cNvSpPr txBox="1"/>
-          <p:nvPr/>
-        </p:nvSpPr>
-        <p:spPr>
-          <a:xfrm>
-            <a:off x="6638544" y="3465576"/>
-            <a:ext cx="4023360" cy="365760"/>
+          <p:cNvPr id="17" name="Text 15"/>
+          <p:cNvSpPr txBox="1"/>
+          <p:nvPr/>
+        </p:nvSpPr>
+        <p:spPr>
+          <a:xfrm>
+            <a:off x="3453384" y="4791456"/>
+            <a:ext cx="1691640" cy="438912"/>
           </a:xfrm>
           <a:prstGeom prst="rect">
             <a:avLst/>
@@ -3658,376 +4807,71 @@
           <a:bodyPr wrap="square" lIns="0" tIns="0" rIns="0" bIns="0" rtlCol="0" anchor="t"/>
           <a:lstStyle/>
           <a:p>
-            <a:pPr rtl="1" algn="r" indent="0" marL="0">
+            <a:pPr rtl="1" algn="ctr" indent="0" marL="0">
               <a:buNone/>
             </a:pPr>
             <a:r>
               <a:rPr lang="fa-IR" altLang="en-US" sz="1050" dirty="0">
                 <a:solidFill>
-                  <a:srgbClr val="B8C3D4"/>
-                </a:solidFill>
-                <a:latin typeface="Kalameh" pitchFamily="34" charset="0"/>
-                <a:ea typeface="Kalameh" pitchFamily="34" charset="-122"/>
-                <a:cs typeface="Kalameh" pitchFamily="34" charset="-120"/>
-              </a:rPr>
-              <a:t>مشتریان برای شارژ خودرو، زمان بیشتری در فروشگاه می‌گذرانند.</a:t>
+                  <a:srgbClr val="64748B"/>
+                </a:solidFill>
+                <a:latin typeface="Kalameh" pitchFamily="34" charset="0"/>
+                <a:ea typeface="Kalameh" pitchFamily="34" charset="-122"/>
+                <a:cs typeface="Kalameh" pitchFamily="34" charset="-120"/>
+              </a:rPr>
+              <a:t>در حالی که خودرو شارژ می‌شود، راننده به خرید و انجام امور شخصی می‌پردازد.</a:t>
             </a:r>
             <a:endParaRPr lang="fa-IR" sz="1050" dirty="0"/>
           </a:p>
         </p:txBody>
       </p:sp>
-      <p:pic>
-        <p:nvPicPr>
-          <p:cNvPr id="18" name="Image 3" descr="preencoded.png">    </p:cNvPr>
-          <p:cNvPicPr>
-            <a:picLocks noChangeAspect="1"/>
-          </p:cNvPicPr>
-          <p:nvPr/>
-        </p:nvPicPr>
-        <p:blipFill>
-          <a:blip r:embed="rId7">
-            <a:extLst>
-              <a:ext uri="{96DAC541-7B7A-43D3-8B79-37D633B846F1}">
-                <asvg:svgBlip xmlns:asvg="http://schemas.microsoft.com/office/drawing/2016/SVG/main" r:embed="rId8"/>
-              </a:ext>
-            </a:extLst>
-          </a:blip>
-          <a:stretch>
-            <a:fillRect/>
-          </a:stretch>
-        </p:blipFill>
-        <p:spPr>
-          <a:xfrm>
-            <a:off x="10863072" y="3977640"/>
-            <a:ext cx="365760" cy="365760"/>
-          </a:xfrm>
-          <a:prstGeom prst="rect">
-            <a:avLst/>
-          </a:prstGeom>
-        </p:spPr>
-      </p:pic>
-      <p:sp>
-        <p:nvSpPr>
-          <p:cNvPr id="19" name="Text 13"/>
-          <p:cNvSpPr txBox="1"/>
-          <p:nvPr/>
-        </p:nvSpPr>
-        <p:spPr>
-          <a:xfrm>
-            <a:off x="7781544" y="3941064"/>
-            <a:ext cx="2880360" cy="256032"/>
-          </a:xfrm>
-          <a:prstGeom prst="rect">
-            <a:avLst/>
-          </a:prstGeom>
-          <a:noFill/>
-          <a:ln/>
-        </p:spPr>
-        <p:txBody>
-          <a:bodyPr wrap="square" lIns="0" tIns="0" rIns="0" bIns="0" rtlCol="0" anchor="ctr"/>
-          <a:lstStyle/>
-          <a:p>
-            <a:pPr rtl="1" algn="r" indent="0" marL="0">
-              <a:buNone/>
-            </a:pPr>
-            <a:r>
-              <a:rPr lang="fa-IR" altLang="en-US" sz="1050" b="1" dirty="0">
-                <a:solidFill>
-                  <a:srgbClr val="FFFFFF"/>
-                </a:solidFill>
-                <a:latin typeface="Kalameh" pitchFamily="34" charset="0"/>
-                <a:ea typeface="Kalameh" pitchFamily="34" charset="-122"/>
-                <a:cs typeface="Kalameh" pitchFamily="34" charset="-120"/>
-              </a:rPr>
-              <a:t>جذب مشتریان جدید</a:t>
-            </a:r>
-            <a:endParaRPr lang="fa-IR" sz="1050" dirty="0"/>
-          </a:p>
-        </p:txBody>
-      </p:sp>
-      <p:sp>
-        <p:nvSpPr>
-          <p:cNvPr id="20" name="Text 14"/>
-          <p:cNvSpPr txBox="1"/>
-          <p:nvPr/>
-        </p:nvSpPr>
-        <p:spPr>
-          <a:xfrm>
-            <a:off x="6638544" y="4215384"/>
-            <a:ext cx="4023360" cy="365760"/>
-          </a:xfrm>
-          <a:prstGeom prst="rect">
-            <a:avLst/>
-          </a:prstGeom>
-          <a:noFill/>
-          <a:ln/>
-        </p:spPr>
-        <p:txBody>
-          <a:bodyPr wrap="square" lIns="0" tIns="0" rIns="0" bIns="0" rtlCol="0" anchor="t"/>
-          <a:lstStyle/>
-          <a:p>
-            <a:pPr rtl="1" algn="r" indent="0" marL="0">
-              <a:buNone/>
-            </a:pPr>
-            <a:r>
-              <a:rPr lang="fa-IR" altLang="en-US" sz="1050" dirty="0">
-                <a:solidFill>
-                  <a:srgbClr val="B8C3D4"/>
-                </a:solidFill>
-                <a:latin typeface="Kalameh" pitchFamily="34" charset="0"/>
-                <a:ea typeface="Kalameh" pitchFamily="34" charset="-122"/>
-                <a:cs typeface="Kalameh" pitchFamily="34" charset="-120"/>
-              </a:rPr>
-              <a:t>ارائه خدمات شارژ، مشتریان جدیدی را به فروشگاه جذب می‌کند.</a:t>
-            </a:r>
-            <a:endParaRPr lang="fa-IR" sz="1050" dirty="0"/>
-          </a:p>
-        </p:txBody>
-      </p:sp>
-      <p:sp>
-        <p:nvSpPr>
-          <p:cNvPr id="21" name="Shape 15"/>
+      <p:sp>
+        <p:nvSpPr>
+          <p:cNvPr id="18" name="Shape 16"/>
           <p:cNvSpPr/>
           <p:nvPr/>
         </p:nvSpPr>
         <p:spPr>
           <a:xfrm>
-            <a:off x="5824728" y="3767328"/>
-            <a:ext cx="530352" cy="530352"/>
-          </a:xfrm>
-          <a:prstGeom prst="ellipse">
-            <a:avLst/>
-          </a:prstGeom>
-          <a:solidFill>
-            <a:srgbClr val="FFD166"/>
-          </a:solidFill>
-          <a:ln w="12700">
+            <a:off x="4322064" y="3904488"/>
+            <a:ext cx="0" cy="164592"/>
+          </a:xfrm>
+          <a:prstGeom prst="line">
+            <a:avLst/>
+          </a:prstGeom>
+          <a:noFill/>
+          <a:ln w="10160">
             <a:solidFill>
-              <a:srgbClr val="FFD166">
-                <a:alpha val="0"/>
+              <a:srgbClr val="E9EEF5">
+                <a:alpha val="75000"/>
               </a:srgbClr>
             </a:solidFill>
             <a:prstDash val="solid"/>
+            <a:headEnd type="none"/>
+            <a:tailEnd type="none"/>
           </a:ln>
-          <a:effectLst>
-            <a:outerShdw sx="100000" sy="100000" kx="0" ky="0" algn="bl" rotWithShape="0" blurRad="25400" dist="13970" dir="2700000">
-              <a:srgbClr val="000000">
-                <a:alpha val="16000"/>
-              </a:srgbClr>
-            </a:outerShdw>
-          </a:effectLst>
-        </p:spPr>
-      </p:sp>
-      <p:sp>
-        <p:nvSpPr>
-          <p:cNvPr id="22" name="Text 16"/>
-          <p:cNvSpPr txBox="1"/>
-          <p:nvPr/>
-        </p:nvSpPr>
-        <p:spPr>
-          <a:xfrm>
-            <a:off x="5824728" y="3730752"/>
-            <a:ext cx="530352" cy="457200"/>
-          </a:xfrm>
-          <a:prstGeom prst="rect">
-            <a:avLst/>
-          </a:prstGeom>
-          <a:noFill/>
-          <a:ln/>
-        </p:spPr>
-        <p:txBody>
-          <a:bodyPr wrap="square" lIns="0" tIns="0" rIns="0" bIns="0" rtlCol="0" anchor="ctr"/>
-          <a:lstStyle/>
-          <a:p>
-            <a:pPr algn="ctr" indent="0" marL="0">
-              <a:buNone/>
-            </a:pPr>
-            <a:r>
-              <a:rPr lang="en-US" altLang="en-US" sz="2000" b="1" dirty="0">
-                <a:solidFill>
-                  <a:srgbClr val="FFFFFF"/>
-                </a:solidFill>
-                <a:latin typeface="Kalameh" pitchFamily="34" charset="0"/>
-                <a:ea typeface="Kalameh" pitchFamily="34" charset="-122"/>
-                <a:cs typeface="Kalameh" pitchFamily="34" charset="-120"/>
-              </a:rPr>
-              <a:t>↔</a:t>
-            </a:r>
-            <a:endParaRPr lang="en-US" sz="2000" dirty="0"/>
-          </a:p>
-        </p:txBody>
-      </p:sp>
-      <p:sp>
-        <p:nvSpPr>
-          <p:cNvPr id="23" name="Text 17"/>
-          <p:cNvSpPr txBox="1"/>
-          <p:nvPr/>
-        </p:nvSpPr>
-        <p:spPr>
-          <a:xfrm>
-            <a:off x="320040" y="6510528"/>
-            <a:ext cx="237744" cy="164592"/>
-          </a:xfrm>
-          <a:prstGeom prst="rect">
-            <a:avLst/>
-          </a:prstGeom>
-          <a:noFill/>
-          <a:ln/>
-        </p:spPr>
-        <p:txBody>
-          <a:bodyPr wrap="square" lIns="0" tIns="0" rIns="0" bIns="0" rtlCol="0" anchor="ctr"/>
-          <a:lstStyle/>
-          <a:p>
-            <a:pPr algn="ctr" indent="0" marL="0">
-              <a:buNone/>
-            </a:pPr>
-            <a:r>
-              <a:rPr lang="en-US" altLang="en-US" sz="750" dirty="0">
-                <a:solidFill>
-                  <a:srgbClr val="CBD5E1"/>
-                </a:solidFill>
-                <a:latin typeface="Kalameh" pitchFamily="34" charset="0"/>
-                <a:ea typeface="Kalameh" pitchFamily="34" charset="-122"/>
-                <a:cs typeface="Kalameh" pitchFamily="34" charset="-120"/>
-              </a:rPr>
-              <a:t>04</a:t>
-            </a:r>
-            <a:endParaRPr lang="en-US" sz="750" dirty="0"/>
-          </a:p>
-        </p:txBody>
-      </p:sp>
-      <p:sp>
-        <p:nvSpPr>
-          <p:cNvPr id="24" name="Text 18"/>
-          <p:cNvSpPr txBox="1"/>
-          <p:nvPr/>
-        </p:nvSpPr>
-        <p:spPr>
-          <a:xfrm>
-            <a:off x="557784" y="6510528"/>
-            <a:ext cx="128016" cy="164592"/>
-          </a:xfrm>
-          <a:prstGeom prst="rect">
-            <a:avLst/>
-          </a:prstGeom>
-          <a:noFill/>
-          <a:ln/>
-        </p:spPr>
-        <p:txBody>
-          <a:bodyPr wrap="square" lIns="0" tIns="0" rIns="0" bIns="0" rtlCol="0" anchor="ctr"/>
-          <a:lstStyle/>
-          <a:p>
-            <a:pPr algn="ctr" indent="0" marL="0">
-              <a:buNone/>
-            </a:pPr>
-            <a:r>
-              <a:rPr lang="en-US" altLang="en-US" sz="750" dirty="0">
-                <a:solidFill>
-                  <a:srgbClr val="CBD5E1"/>
-                </a:solidFill>
-                <a:latin typeface="Kalameh" pitchFamily="34" charset="0"/>
-                <a:ea typeface="Kalameh" pitchFamily="34" charset="-122"/>
-                <a:cs typeface="Kalameh" pitchFamily="34" charset="-120"/>
-              </a:rPr>
-              <a:t>/</a:t>
-            </a:r>
-            <a:endParaRPr lang="en-US" sz="750" dirty="0"/>
-          </a:p>
-        </p:txBody>
-      </p:sp>
-      <p:sp>
-        <p:nvSpPr>
-          <p:cNvPr id="25" name="Text 19"/>
-          <p:cNvSpPr txBox="1"/>
-          <p:nvPr/>
-        </p:nvSpPr>
-        <p:spPr>
-          <a:xfrm>
-            <a:off x="685800" y="6510528"/>
-            <a:ext cx="237744" cy="164592"/>
-          </a:xfrm>
-          <a:prstGeom prst="rect">
-            <a:avLst/>
-          </a:prstGeom>
-          <a:noFill/>
-          <a:ln/>
-        </p:spPr>
-        <p:txBody>
-          <a:bodyPr wrap="square" lIns="0" tIns="0" rIns="0" bIns="0" rtlCol="0" anchor="ctr"/>
-          <a:lstStyle/>
-          <a:p>
-            <a:pPr algn="ctr" indent="0" marL="0">
-              <a:buNone/>
-            </a:pPr>
-            <a:r>
-              <a:rPr lang="en-US" altLang="en-US" sz="750" dirty="0">
-                <a:solidFill>
-                  <a:srgbClr val="CBD5E1"/>
-                </a:solidFill>
-                <a:latin typeface="Kalameh" pitchFamily="34" charset="0"/>
-                <a:ea typeface="Kalameh" pitchFamily="34" charset="-122"/>
-                <a:cs typeface="Kalameh" pitchFamily="34" charset="-120"/>
-              </a:rPr>
-              <a:t>08</a:t>
-            </a:r>
-            <a:endParaRPr lang="en-US" sz="750" dirty="0"/>
-          </a:p>
-        </p:txBody>
-      </p:sp>
-    </p:spTree>
-  </p:cSld>
-  <p:clrMapOvr>
-    <a:masterClrMapping/>
-  </p:clrMapOvr>
-</p:sld>
-</file>
-
-<file path=ppt/slides/slide5.xml><?xml version="1.0" encoding="utf-8"?>
-<p:sld xmlns:a="http://schemas.openxmlformats.org/drawingml/2006/main" xmlns:r="http://schemas.openxmlformats.org/officeDocument/2006/relationships" xmlns:p="http://schemas.openxmlformats.org/presentationml/2006/main">
-  <p:cSld name="Slide 5">
-    <p:bg>
-      <p:bgPr>
-        <a:solidFill>
-          <a:srgbClr val="1A5F7A"/>
-        </a:solidFill>
-      </p:bgPr>
-    </p:bg>
-    <p:spTree>
-      <p:nvGrpSpPr>
-        <p:cNvPr id="1" name=""/>
-        <p:cNvGrpSpPr/>
-        <p:nvPr/>
-      </p:nvGrpSpPr>
-      <p:grpSpPr>
-        <a:xfrm>
-          <a:off x="0" y="0"/>
-          <a:ext cx="0" cy="0"/>
-          <a:chOff x="0" y="0"/>
-          <a:chExt cx="0" cy="0"/>
-        </a:xfrm>
-      </p:grpSpPr>
-      <p:sp>
-        <p:nvSpPr>
-          <p:cNvPr id="2" name="Shape 0"/>
+        </p:spPr>
+      </p:sp>
+      <p:sp>
+        <p:nvSpPr>
+          <p:cNvPr id="19" name="Shape 17"/>
           <p:cNvSpPr/>
           <p:nvPr/>
         </p:nvSpPr>
         <p:spPr>
           <a:xfrm>
-            <a:off x="11503152" y="347472"/>
-            <a:ext cx="155448" cy="310896"/>
-          </a:xfrm>
-          <a:prstGeom prst="rect">
+            <a:off x="7665720" y="3502152"/>
+            <a:ext cx="402336" cy="402336"/>
+          </a:xfrm>
+          <a:prstGeom prst="ellipse">
             <a:avLst/>
           </a:prstGeom>
           <a:solidFill>
-            <a:srgbClr val="FFD166"/>
+            <a:srgbClr val="10B981"/>
           </a:solidFill>
-          <a:ln w="12700">
+          <a:ln w="25400">
             <a:solidFill>
-              <a:srgbClr val="FFD166">
-                <a:alpha val="0"/>
-              </a:srgbClr>
+              <a:srgbClr val="FFFFFF"/>
             </a:solidFill>
             <a:prstDash val="solid"/>
           </a:ln>
@@ -4035,102 +4879,24 @@
       </p:sp>
       <p:sp>
         <p:nvSpPr>
-          <p:cNvPr id="3" name="Text 1"/>
-          <p:cNvSpPr txBox="1"/>
-          <p:nvPr/>
-        </p:nvSpPr>
-        <p:spPr>
-          <a:xfrm>
-            <a:off x="4663440" y="329184"/>
-            <a:ext cx="6720840" cy="365760"/>
-          </a:xfrm>
-          <a:prstGeom prst="rect">
-            <a:avLst/>
-          </a:prstGeom>
-          <a:noFill/>
-          <a:ln/>
-        </p:spPr>
-        <p:txBody>
-          <a:bodyPr wrap="square" lIns="0" tIns="0" rIns="0" bIns="0" rtlCol="0" anchor="ctr"/>
-          <a:lstStyle/>
-          <a:p>
-            <a:pPr algn="r" indent="0" marL="0">
-              <a:buNone/>
-            </a:pPr>
-            <a:r>
-              <a:rPr lang="en-US" altLang="en-US" sz="1050" b="1" spc="50" kern="0" dirty="0">
-                <a:solidFill>
-                  <a:srgbClr val="FFD166"/>
-                </a:solidFill>
-                <a:latin typeface="Kalameh" pitchFamily="34" charset="0"/>
-                <a:ea typeface="Kalameh" pitchFamily="34" charset="-122"/>
-                <a:cs typeface="Kalameh" pitchFamily="34" charset="-120"/>
-              </a:rPr>
-              <a:t>05</a:t>
-            </a:r>
-            <a:endParaRPr lang="en-US" sz="1050" dirty="0"/>
-          </a:p>
-        </p:txBody>
-      </p:sp>
-      <p:sp>
-        <p:nvSpPr>
-          <p:cNvPr id="4" name="Text 2"/>
-          <p:cNvSpPr txBox="1"/>
-          <p:nvPr/>
-        </p:nvSpPr>
-        <p:spPr>
-          <a:xfrm>
-            <a:off x="4663440" y="731520"/>
-            <a:ext cx="6995160" cy="868680"/>
-          </a:xfrm>
-          <a:prstGeom prst="rect">
-            <a:avLst/>
-          </a:prstGeom>
-          <a:noFill/>
-          <a:ln/>
-        </p:spPr>
-        <p:txBody>
-          <a:bodyPr wrap="square" lIns="0" tIns="0" rIns="0" bIns="0" rtlCol="0" anchor="t"/>
-          <a:lstStyle/>
-          <a:p>
-            <a:pPr rtl="1" algn="r" indent="0" marL="0">
-              <a:buNone/>
-            </a:pPr>
-            <a:r>
-              <a:rPr lang="fa-IR" altLang="en-US" sz="2300" b="1" dirty="0">
-                <a:solidFill>
-                  <a:srgbClr val="F8FAFC"/>
-                </a:solidFill>
-                <a:latin typeface="Kalameh" pitchFamily="34" charset="0"/>
-                <a:ea typeface="Kalameh" pitchFamily="34" charset="-122"/>
-                <a:cs typeface="Kalameh" pitchFamily="34" charset="-120"/>
-              </a:rPr>
-              <a:t>مراحل پیاده‌سازی شارژ سریع در فروشگاه‌ها</a:t>
-            </a:r>
-            <a:endParaRPr lang="fa-IR" sz="2300" dirty="0"/>
-          </a:p>
-        </p:txBody>
-      </p:sp>
-      <p:sp>
-        <p:nvSpPr>
-          <p:cNvPr id="5" name="Shape 3"/>
+          <p:cNvPr id="20" name="Shape 18"/>
           <p:cNvSpPr/>
           <p:nvPr/>
         </p:nvSpPr>
         <p:spPr>
           <a:xfrm>
-            <a:off x="530352" y="2788920"/>
-            <a:ext cx="2674620" cy="2487168"/>
+            <a:off x="6842760" y="2267712"/>
+            <a:ext cx="2057400" cy="1280160"/>
           </a:xfrm>
           <a:prstGeom prst="roundRect">
             <a:avLst/>
           </a:prstGeom>
           <a:solidFill>
-            <a:srgbClr val="182035"/>
+            <a:srgbClr val="FFFFFF"/>
           </a:solidFill>
           <a:ln w="8890">
             <a:solidFill>
-              <a:srgbClr val="FFD166">
+              <a:srgbClr val="E9EEF5">
                 <a:alpha val="65000"/>
               </a:srgbClr>
             </a:solidFill>
@@ -4140,14 +4906,14 @@
       </p:sp>
       <p:sp>
         <p:nvSpPr>
-          <p:cNvPr id="6" name="Text 4"/>
-          <p:cNvSpPr txBox="1"/>
-          <p:nvPr/>
-        </p:nvSpPr>
-        <p:spPr>
-          <a:xfrm>
-            <a:off x="694944" y="2971800"/>
-            <a:ext cx="685800" cy="320040"/>
+          <p:cNvPr id="21" name="Text 19"/>
+          <p:cNvSpPr txBox="1"/>
+          <p:nvPr/>
+        </p:nvSpPr>
+        <p:spPr>
+          <a:xfrm>
+            <a:off x="6998208" y="2377440"/>
+            <a:ext cx="1691640" cy="219456"/>
           </a:xfrm>
           <a:prstGeom prst="rect">
             <a:avLst/>
@@ -4159,64 +4925,34 @@
           <a:bodyPr wrap="square" lIns="0" tIns="0" rIns="0" bIns="0" rtlCol="0" anchor="ctr"/>
           <a:lstStyle/>
           <a:p>
-            <a:pPr algn="l" indent="0" marL="0">
-              <a:buNone/>
-            </a:pPr>
-            <a:r>
-              <a:rPr lang="en-US" altLang="en-US" sz="1200" b="1" dirty="0">
-                <a:solidFill>
-                  <a:srgbClr val="FFD166"/>
-                </a:solidFill>
-                <a:latin typeface="Kalameh" pitchFamily="34" charset="0"/>
-                <a:ea typeface="Kalameh" pitchFamily="34" charset="-122"/>
-                <a:cs typeface="Kalameh" pitchFamily="34" charset="-120"/>
-              </a:rPr>
-              <a:t>01</a:t>
-            </a:r>
-            <a:endParaRPr lang="en-US" sz="1200" dirty="0"/>
-          </a:p>
-        </p:txBody>
-      </p:sp>
-      <p:pic>
-        <p:nvPicPr>
-          <p:cNvPr id="7" name="Image 0" descr="preencoded.png">    </p:cNvPr>
-          <p:cNvPicPr>
-            <a:picLocks noChangeAspect="1"/>
-          </p:cNvPicPr>
-          <p:nvPr/>
-        </p:nvPicPr>
-        <p:blipFill>
-          <a:blip r:embed="rId1">
-            <a:extLst>
-              <a:ext uri="{96DAC541-7B7A-43D3-8B79-37D633B846F1}">
-                <asvg:svgBlip xmlns:asvg="http://schemas.microsoft.com/office/drawing/2016/SVG/main" r:embed="rId2"/>
-              </a:ext>
-            </a:extLst>
-          </a:blip>
-          <a:stretch>
-            <a:fillRect/>
-          </a:stretch>
-        </p:blipFill>
-        <p:spPr>
-          <a:xfrm>
-            <a:off x="2638044" y="2990088"/>
-            <a:ext cx="347472" cy="347472"/>
-          </a:xfrm>
-          <a:prstGeom prst="rect">
-            <a:avLst/>
-          </a:prstGeom>
-        </p:spPr>
-      </p:pic>
-      <p:sp>
-        <p:nvSpPr>
-          <p:cNvPr id="8" name="Text 5"/>
-          <p:cNvSpPr txBox="1"/>
-          <p:nvPr/>
-        </p:nvSpPr>
-        <p:spPr>
-          <a:xfrm>
-            <a:off x="731520" y="3611880"/>
-            <a:ext cx="2272284" cy="411480"/>
+            <a:pPr rtl="1" algn="ctr" indent="0" marL="0">
+              <a:buNone/>
+            </a:pPr>
+            <a:r>
+              <a:rPr lang="fa-IR" altLang="en-US" sz="950" b="1" dirty="0">
+                <a:solidFill>
+                  <a:srgbClr val="10B981"/>
+                </a:solidFill>
+                <a:latin typeface="Kalameh" pitchFamily="34" charset="0"/>
+                <a:ea typeface="Kalameh" pitchFamily="34" charset="-122"/>
+                <a:cs typeface="Kalameh" pitchFamily="34" charset="-120"/>
+              </a:rPr>
+              <a:t>۰3</a:t>
+            </a:r>
+            <a:endParaRPr lang="fa-IR" sz="950" dirty="0"/>
+          </a:p>
+        </p:txBody>
+      </p:sp>
+      <p:sp>
+        <p:nvSpPr>
+          <p:cNvPr id="22" name="Text 20"/>
+          <p:cNvSpPr txBox="1"/>
+          <p:nvPr/>
+        </p:nvSpPr>
+        <p:spPr>
+          <a:xfrm>
+            <a:off x="6998208" y="2642616"/>
+            <a:ext cx="1691640" cy="310896"/>
           </a:xfrm>
           <a:prstGeom prst="rect">
             <a:avLst/>
@@ -4228,34 +4964,34 @@
           <a:bodyPr wrap="square" lIns="0" tIns="0" rIns="0" bIns="0" rtlCol="0" anchor="ctr"/>
           <a:lstStyle/>
           <a:p>
-            <a:pPr rtl="1" algn="r" indent="0" marL="0">
-              <a:buNone/>
-            </a:pPr>
-            <a:r>
-              <a:rPr lang="fa-IR" altLang="en-US" sz="1100" b="1" dirty="0">
-                <a:solidFill>
-                  <a:srgbClr val="FFFFFF"/>
-                </a:solidFill>
-                <a:latin typeface="Kalameh" pitchFamily="34" charset="0"/>
-                <a:ea typeface="Kalameh" pitchFamily="34" charset="-122"/>
-                <a:cs typeface="Kalameh" pitchFamily="34" charset="-120"/>
-              </a:rPr>
-              <a:t>پایش و به‌روزرسانی</a:t>
-            </a:r>
-            <a:endParaRPr lang="fa-IR" sz="1100" dirty="0"/>
-          </a:p>
-        </p:txBody>
-      </p:sp>
-      <p:sp>
-        <p:nvSpPr>
-          <p:cNvPr id="9" name="Text 6"/>
-          <p:cNvSpPr txBox="1"/>
-          <p:nvPr/>
-        </p:nvSpPr>
-        <p:spPr>
-          <a:xfrm>
-            <a:off x="731520" y="4114800"/>
-            <a:ext cx="2272284" cy="749808"/>
+            <a:pPr rtl="1" algn="ctr" indent="0" marL="0">
+              <a:buNone/>
+            </a:pPr>
+            <a:r>
+              <a:rPr lang="fa-IR" altLang="en-US" sz="1050" b="1" dirty="0">
+                <a:solidFill>
+                  <a:srgbClr val="1E293B"/>
+                </a:solidFill>
+                <a:latin typeface="Kalameh" pitchFamily="34" charset="0"/>
+                <a:ea typeface="Kalameh" pitchFamily="34" charset="-122"/>
+                <a:cs typeface="Kalameh" pitchFamily="34" charset="-120"/>
+              </a:rPr>
+              <a:t>اتصال خودکار و امن</a:t>
+            </a:r>
+            <a:endParaRPr lang="fa-IR" sz="1050" dirty="0"/>
+          </a:p>
+        </p:txBody>
+      </p:sp>
+      <p:sp>
+        <p:nvSpPr>
+          <p:cNvPr id="23" name="Text 21"/>
+          <p:cNvSpPr txBox="1"/>
+          <p:nvPr/>
+        </p:nvSpPr>
+        <p:spPr>
+          <a:xfrm>
+            <a:off x="6998208" y="2990088"/>
+            <a:ext cx="1691640" cy="438912"/>
           </a:xfrm>
           <a:prstGeom prst="rect">
             <a:avLst/>
@@ -4267,19 +5003,19 @@
           <a:bodyPr wrap="square" lIns="0" tIns="0" rIns="0" bIns="0" rtlCol="0" anchor="t"/>
           <a:lstStyle/>
           <a:p>
-            <a:pPr rtl="1" algn="r" indent="0" marL="0">
+            <a:pPr rtl="1" algn="ctr" indent="0" marL="0">
               <a:buNone/>
             </a:pPr>
             <a:r>
               <a:rPr lang="fa-IR" altLang="en-US" sz="1050" dirty="0">
                 <a:solidFill>
-                  <a:srgbClr val="B9C4D6"/>
-                </a:solidFill>
-                <a:latin typeface="Kalameh" pitchFamily="34" charset="0"/>
-                <a:ea typeface="Kalameh" pitchFamily="34" charset="-122"/>
-                <a:cs typeface="Kalameh" pitchFamily="34" charset="-120"/>
-              </a:rPr>
-              <a:t>پایش عملکرد ایستگاه‌ها و به‌روزرسانی نرم‌افزاری برای بهبود کارایی.</a:t>
+                  <a:srgbClr val="64748B"/>
+                </a:solidFill>
+                <a:latin typeface="Kalameh" pitchFamily="34" charset="0"/>
+                <a:ea typeface="Kalameh" pitchFamily="34" charset="-122"/>
+                <a:cs typeface="Kalameh" pitchFamily="34" charset="-120"/>
+              </a:rPr>
+              <a:t>خودرو به سادگی و با پروتکل‌های ارتباطی امن به دستگاه شارژ متصل می‌شود.</a:t>
             </a:r>
             <a:endParaRPr lang="fa-IR" sz="1050" dirty="0"/>
           </a:p>
@@ -4287,63 +5023,76 @@
       </p:sp>
       <p:sp>
         <p:nvSpPr>
-          <p:cNvPr id="10" name="Text 7"/>
-          <p:cNvSpPr txBox="1"/>
-          <p:nvPr/>
-        </p:nvSpPr>
-        <p:spPr>
-          <a:xfrm>
-            <a:off x="3186684" y="3776472"/>
-            <a:ext cx="256032" cy="347472"/>
-          </a:xfrm>
-          <a:prstGeom prst="rect">
-            <a:avLst/>
-          </a:prstGeom>
-          <a:noFill/>
-          <a:ln/>
-        </p:spPr>
-        <p:txBody>
-          <a:bodyPr wrap="square" lIns="0" tIns="0" rIns="0" bIns="0" rtlCol="0" anchor="ctr"/>
-          <a:lstStyle/>
-          <a:p>
-            <a:pPr algn="ctr" indent="0" marL="0">
-              <a:buNone/>
-            </a:pPr>
-            <a:r>
-              <a:rPr lang="en-US" altLang="en-US" sz="1500" b="1" dirty="0">
-                <a:solidFill>
-                  <a:srgbClr val="FFD166"/>
-                </a:solidFill>
-                <a:latin typeface="Kalameh" pitchFamily="34" charset="0"/>
-                <a:ea typeface="Kalameh" pitchFamily="34" charset="-122"/>
-                <a:cs typeface="Kalameh" pitchFamily="34" charset="-120"/>
-              </a:rPr>
-              <a:t>←</a:t>
-            </a:r>
-            <a:endParaRPr lang="en-US" sz="1500" dirty="0"/>
-          </a:p>
-        </p:txBody>
-      </p:sp>
-      <p:sp>
-        <p:nvSpPr>
-          <p:cNvPr id="11" name="Shape 8"/>
+          <p:cNvPr id="24" name="Shape 22"/>
           <p:cNvSpPr/>
           <p:nvPr/>
         </p:nvSpPr>
         <p:spPr>
           <a:xfrm>
-            <a:off x="3351276" y="2788920"/>
-            <a:ext cx="2674620" cy="2487168"/>
+            <a:off x="7866888" y="3547872"/>
+            <a:ext cx="0" cy="-45720"/>
+          </a:xfrm>
+          <a:prstGeom prst="line">
+            <a:avLst/>
+          </a:prstGeom>
+          <a:noFill/>
+          <a:ln w="10160">
+            <a:solidFill>
+              <a:srgbClr val="E9EEF5">
+                <a:alpha val="75000"/>
+              </a:srgbClr>
+            </a:solidFill>
+            <a:prstDash val="solid"/>
+            <a:headEnd type="none"/>
+            <a:tailEnd type="none"/>
+          </a:ln>
+        </p:spPr>
+      </p:sp>
+      <p:sp>
+        <p:nvSpPr>
+          <p:cNvPr id="25" name="Shape 23"/>
+          <p:cNvSpPr/>
+          <p:nvPr/>
+        </p:nvSpPr>
+        <p:spPr>
+          <a:xfrm>
+            <a:off x="11210544" y="3502152"/>
+            <a:ext cx="402336" cy="402336"/>
+          </a:xfrm>
+          <a:prstGeom prst="ellipse">
+            <a:avLst/>
+          </a:prstGeom>
+          <a:solidFill>
+            <a:srgbClr val="F59E0B"/>
+          </a:solidFill>
+          <a:ln w="25400">
+            <a:solidFill>
+              <a:srgbClr val="FFFFFF"/>
+            </a:solidFill>
+            <a:prstDash val="solid"/>
+          </a:ln>
+        </p:spPr>
+      </p:sp>
+      <p:sp>
+        <p:nvSpPr>
+          <p:cNvPr id="26" name="Shape 24"/>
+          <p:cNvSpPr/>
+          <p:nvPr/>
+        </p:nvSpPr>
+        <p:spPr>
+          <a:xfrm>
+            <a:off x="9829800" y="4069080"/>
+            <a:ext cx="2057400" cy="1280160"/>
           </a:xfrm>
           <a:prstGeom prst="roundRect">
             <a:avLst/>
           </a:prstGeom>
           <a:solidFill>
-            <a:srgbClr val="17283A"/>
+            <a:srgbClr val="FFFFFF"/>
           </a:solidFill>
           <a:ln w="8890">
             <a:solidFill>
-              <a:srgbClr val="EF476F">
+              <a:srgbClr val="E9EEF5">
                 <a:alpha val="65000"/>
               </a:srgbClr>
             </a:solidFill>
@@ -4353,14 +5102,14 @@
       </p:sp>
       <p:sp>
         <p:nvSpPr>
-          <p:cNvPr id="12" name="Text 9"/>
-          <p:cNvSpPr txBox="1"/>
-          <p:nvPr/>
-        </p:nvSpPr>
-        <p:spPr>
-          <a:xfrm>
-            <a:off x="3515868" y="2971800"/>
-            <a:ext cx="685800" cy="320040"/>
+          <p:cNvPr id="27" name="Text 25"/>
+          <p:cNvSpPr txBox="1"/>
+          <p:nvPr/>
+        </p:nvSpPr>
+        <p:spPr>
+          <a:xfrm>
+            <a:off x="9966960" y="4178808"/>
+            <a:ext cx="1691640" cy="219456"/>
           </a:xfrm>
           <a:prstGeom prst="rect">
             <a:avLst/>
@@ -4372,64 +5121,34 @@
           <a:bodyPr wrap="square" lIns="0" tIns="0" rIns="0" bIns="0" rtlCol="0" anchor="ctr"/>
           <a:lstStyle/>
           <a:p>
-            <a:pPr algn="l" indent="0" marL="0">
-              <a:buNone/>
-            </a:pPr>
-            <a:r>
-              <a:rPr lang="en-US" altLang="en-US" sz="1200" b="1" dirty="0">
-                <a:solidFill>
-                  <a:srgbClr val="EF476F"/>
-                </a:solidFill>
-                <a:latin typeface="Kalameh" pitchFamily="34" charset="0"/>
-                <a:ea typeface="Kalameh" pitchFamily="34" charset="-122"/>
-                <a:cs typeface="Kalameh" pitchFamily="34" charset="-120"/>
-              </a:rPr>
-              <a:t>02</a:t>
-            </a:r>
-            <a:endParaRPr lang="en-US" sz="1200" dirty="0"/>
-          </a:p>
-        </p:txBody>
-      </p:sp>
-      <p:pic>
-        <p:nvPicPr>
-          <p:cNvPr id="13" name="Image 1" descr="preencoded.png">    </p:cNvPr>
-          <p:cNvPicPr>
-            <a:picLocks noChangeAspect="1"/>
-          </p:cNvPicPr>
-          <p:nvPr/>
-        </p:nvPicPr>
-        <p:blipFill>
-          <a:blip r:embed="rId3">
-            <a:extLst>
-              <a:ext uri="{96DAC541-7B7A-43D3-8B79-37D633B846F1}">
-                <asvg:svgBlip xmlns:asvg="http://schemas.microsoft.com/office/drawing/2016/SVG/main" r:embed="rId4"/>
-              </a:ext>
-            </a:extLst>
-          </a:blip>
-          <a:stretch>
-            <a:fillRect/>
-          </a:stretch>
-        </p:blipFill>
-        <p:spPr>
-          <a:xfrm>
-            <a:off x="5458968" y="2990088"/>
-            <a:ext cx="347472" cy="347472"/>
-          </a:xfrm>
-          <a:prstGeom prst="rect">
-            <a:avLst/>
-          </a:prstGeom>
-        </p:spPr>
-      </p:pic>
-      <p:sp>
-        <p:nvSpPr>
-          <p:cNvPr id="14" name="Text 10"/>
-          <p:cNvSpPr txBox="1"/>
-          <p:nvPr/>
-        </p:nvSpPr>
-        <p:spPr>
-          <a:xfrm>
-            <a:off x="3552444" y="3611880"/>
-            <a:ext cx="2272284" cy="411480"/>
+            <a:pPr rtl="1" algn="ctr" indent="0" marL="0">
+              <a:buNone/>
+            </a:pPr>
+            <a:r>
+              <a:rPr lang="fa-IR" altLang="en-US" sz="950" b="1" dirty="0">
+                <a:solidFill>
+                  <a:srgbClr val="10B981"/>
+                </a:solidFill>
+                <a:latin typeface="Kalameh" pitchFamily="34" charset="0"/>
+                <a:ea typeface="Kalameh" pitchFamily="34" charset="-122"/>
+                <a:cs typeface="Kalameh" pitchFamily="34" charset="-120"/>
+              </a:rPr>
+              <a:t>۰4</a:t>
+            </a:r>
+            <a:endParaRPr lang="fa-IR" sz="950" dirty="0"/>
+          </a:p>
+        </p:txBody>
+      </p:sp>
+      <p:sp>
+        <p:nvSpPr>
+          <p:cNvPr id="28" name="Text 26"/>
+          <p:cNvSpPr txBox="1"/>
+          <p:nvPr/>
+        </p:nvSpPr>
+        <p:spPr>
+          <a:xfrm>
+            <a:off x="9966960" y="4443984"/>
+            <a:ext cx="1691640" cy="310896"/>
           </a:xfrm>
           <a:prstGeom prst="rect">
             <a:avLst/>
@@ -4441,34 +5160,34 @@
           <a:bodyPr wrap="square" lIns="0" tIns="0" rIns="0" bIns="0" rtlCol="0" anchor="ctr"/>
           <a:lstStyle/>
           <a:p>
-            <a:pPr rtl="1" algn="r" indent="0" marL="0">
-              <a:buNone/>
-            </a:pPr>
-            <a:r>
-              <a:rPr lang="fa-IR" altLang="en-US" sz="1100" b="1" dirty="0">
-                <a:solidFill>
-                  <a:srgbClr val="FFFFFF"/>
-                </a:solidFill>
-                <a:latin typeface="Kalameh" pitchFamily="34" charset="0"/>
-                <a:ea typeface="Kalameh" pitchFamily="34" charset="-122"/>
-                <a:cs typeface="Kalameh" pitchFamily="34" charset="-120"/>
-              </a:rPr>
-              <a:t>یکپارچه‌سازی با خدمات فروشگاه</a:t>
-            </a:r>
-            <a:endParaRPr lang="fa-IR" sz="1100" dirty="0"/>
-          </a:p>
-        </p:txBody>
-      </p:sp>
-      <p:sp>
-        <p:nvSpPr>
-          <p:cNvPr id="15" name="Text 11"/>
-          <p:cNvSpPr txBox="1"/>
-          <p:nvPr/>
-        </p:nvSpPr>
-        <p:spPr>
-          <a:xfrm>
-            <a:off x="3552444" y="4114800"/>
-            <a:ext cx="2272284" cy="749808"/>
+            <a:pPr rtl="1" algn="ctr" indent="0" marL="0">
+              <a:buNone/>
+            </a:pPr>
+            <a:r>
+              <a:rPr lang="fa-IR" altLang="en-US" sz="1050" b="1" dirty="0">
+                <a:solidFill>
+                  <a:srgbClr val="1E293B"/>
+                </a:solidFill>
+                <a:latin typeface="Kalameh" pitchFamily="34" charset="0"/>
+                <a:ea typeface="Kalameh" pitchFamily="34" charset="-122"/>
+                <a:cs typeface="Kalameh" pitchFamily="34" charset="-120"/>
+              </a:rPr>
+              <a:t>یافتن ایستگاه مقصد</a:t>
+            </a:r>
+            <a:endParaRPr lang="fa-IR" sz="1050" dirty="0"/>
+          </a:p>
+        </p:txBody>
+      </p:sp>
+      <p:sp>
+        <p:nvSpPr>
+          <p:cNvPr id="29" name="Text 27"/>
+          <p:cNvSpPr txBox="1"/>
+          <p:nvPr/>
+        </p:nvSpPr>
+        <p:spPr>
+          <a:xfrm>
+            <a:off x="9966960" y="4791456"/>
+            <a:ext cx="1691640" cy="438912"/>
           </a:xfrm>
           <a:prstGeom prst="rect">
             <a:avLst/>
@@ -4480,19 +5199,19 @@
           <a:bodyPr wrap="square" lIns="0" tIns="0" rIns="0" bIns="0" rtlCol="0" anchor="t"/>
           <a:lstStyle/>
           <a:p>
-            <a:pPr rtl="1" algn="r" indent="0" marL="0">
+            <a:pPr rtl="1" algn="ctr" indent="0" marL="0">
               <a:buNone/>
             </a:pPr>
             <a:r>
               <a:rPr lang="fa-IR" altLang="en-US" sz="1050" dirty="0">
                 <a:solidFill>
-                  <a:srgbClr val="B9C4D6"/>
-                </a:solidFill>
-                <a:latin typeface="Kalameh" pitchFamily="34" charset="0"/>
-                <a:ea typeface="Kalameh" pitchFamily="34" charset="-122"/>
-                <a:cs typeface="Kalameh" pitchFamily="34" charset="-120"/>
-              </a:rPr>
-              <a:t>ارائه تخفیف‌ها یا اطلاعات وضعیت شارژ به مشتریان.</a:t>
+                  <a:srgbClr val="64748B"/>
+                </a:solidFill>
+                <a:latin typeface="Kalameh" pitchFamily="34" charset="0"/>
+                <a:ea typeface="Kalameh" pitchFamily="34" charset="-122"/>
+                <a:cs typeface="Kalameh" pitchFamily="34" charset="-120"/>
+              </a:rPr>
+              <a:t>راننده پیش از سفر یا در طول مسیر، مکان‌های مجهز به شارژ سریع در مراکز خرید را شناسایی می‌کند.</a:t>
             </a:r>
             <a:endParaRPr lang="fa-IR" sz="1050" dirty="0"/>
           </a:p>
@@ -4500,433 +5219,34 @@
       </p:sp>
       <p:sp>
         <p:nvSpPr>
-          <p:cNvPr id="16" name="Text 12"/>
-          <p:cNvSpPr txBox="1"/>
-          <p:nvPr/>
-        </p:nvSpPr>
-        <p:spPr>
-          <a:xfrm>
-            <a:off x="6007608" y="3776472"/>
-            <a:ext cx="256032" cy="347472"/>
-          </a:xfrm>
-          <a:prstGeom prst="rect">
-            <a:avLst/>
-          </a:prstGeom>
-          <a:noFill/>
-          <a:ln/>
-        </p:spPr>
-        <p:txBody>
-          <a:bodyPr wrap="square" lIns="0" tIns="0" rIns="0" bIns="0" rtlCol="0" anchor="ctr"/>
-          <a:lstStyle/>
-          <a:p>
-            <a:pPr algn="ctr" indent="0" marL="0">
-              <a:buNone/>
-            </a:pPr>
-            <a:r>
-              <a:rPr lang="en-US" altLang="en-US" sz="1500" b="1" dirty="0">
-                <a:solidFill>
-                  <a:srgbClr val="FFD166"/>
-                </a:solidFill>
-                <a:latin typeface="Kalameh" pitchFamily="34" charset="0"/>
-                <a:ea typeface="Kalameh" pitchFamily="34" charset="-122"/>
-                <a:cs typeface="Kalameh" pitchFamily="34" charset="-120"/>
-              </a:rPr>
-              <a:t>←</a:t>
-            </a:r>
-            <a:endParaRPr lang="en-US" sz="1500" dirty="0"/>
-          </a:p>
-        </p:txBody>
-      </p:sp>
-      <p:sp>
-        <p:nvSpPr>
-          <p:cNvPr id="17" name="Shape 13"/>
+          <p:cNvPr id="30" name="Shape 28"/>
           <p:cNvSpPr/>
           <p:nvPr/>
         </p:nvSpPr>
         <p:spPr>
           <a:xfrm>
-            <a:off x="6172200" y="2788920"/>
-            <a:ext cx="2674620" cy="2487168"/>
-          </a:xfrm>
-          <a:prstGeom prst="roundRect">
-            <a:avLst/>
-          </a:prstGeom>
-          <a:solidFill>
-            <a:srgbClr val="182035"/>
-          </a:solidFill>
-          <a:ln w="8890">
+            <a:off x="11411712" y="3904488"/>
+            <a:ext cx="0" cy="164592"/>
+          </a:xfrm>
+          <a:prstGeom prst="line">
+            <a:avLst/>
+          </a:prstGeom>
+          <a:noFill/>
+          <a:ln w="10160">
             <a:solidFill>
-              <a:srgbClr val="FFD166">
-                <a:alpha val="65000"/>
+              <a:srgbClr val="E9EEF5">
+                <a:alpha val="75000"/>
               </a:srgbClr>
             </a:solidFill>
             <a:prstDash val="solid"/>
+            <a:headEnd type="none"/>
+            <a:tailEnd type="none"/>
           </a:ln>
         </p:spPr>
       </p:sp>
       <p:sp>
         <p:nvSpPr>
-          <p:cNvPr id="18" name="Text 14"/>
-          <p:cNvSpPr txBox="1"/>
-          <p:nvPr/>
-        </p:nvSpPr>
-        <p:spPr>
-          <a:xfrm>
-            <a:off x="6336792" y="2971800"/>
-            <a:ext cx="685800" cy="320040"/>
-          </a:xfrm>
-          <a:prstGeom prst="rect">
-            <a:avLst/>
-          </a:prstGeom>
-          <a:noFill/>
-          <a:ln/>
-        </p:spPr>
-        <p:txBody>
-          <a:bodyPr wrap="square" lIns="0" tIns="0" rIns="0" bIns="0" rtlCol="0" anchor="ctr"/>
-          <a:lstStyle/>
-          <a:p>
-            <a:pPr algn="l" indent="0" marL="0">
-              <a:buNone/>
-            </a:pPr>
-            <a:r>
-              <a:rPr lang="en-US" altLang="en-US" sz="1200" b="1" dirty="0">
-                <a:solidFill>
-                  <a:srgbClr val="FFD166"/>
-                </a:solidFill>
-                <a:latin typeface="Kalameh" pitchFamily="34" charset="0"/>
-                <a:ea typeface="Kalameh" pitchFamily="34" charset="-122"/>
-                <a:cs typeface="Kalameh" pitchFamily="34" charset="-120"/>
-              </a:rPr>
-              <a:t>03</a:t>
-            </a:r>
-            <a:endParaRPr lang="en-US" sz="1200" dirty="0"/>
-          </a:p>
-        </p:txBody>
-      </p:sp>
-      <p:pic>
-        <p:nvPicPr>
-          <p:cNvPr id="19" name="Image 2" descr="preencoded.png">    </p:cNvPr>
-          <p:cNvPicPr>
-            <a:picLocks noChangeAspect="1"/>
-          </p:cNvPicPr>
-          <p:nvPr/>
-        </p:nvPicPr>
-        <p:blipFill>
-          <a:blip r:embed="rId5">
-            <a:extLst>
-              <a:ext uri="{96DAC541-7B7A-43D3-8B79-37D633B846F1}">
-                <asvg:svgBlip xmlns:asvg="http://schemas.microsoft.com/office/drawing/2016/SVG/main" r:embed="rId6"/>
-              </a:ext>
-            </a:extLst>
-          </a:blip>
-          <a:stretch>
-            <a:fillRect/>
-          </a:stretch>
-        </p:blipFill>
-        <p:spPr>
-          <a:xfrm>
-            <a:off x="8279892" y="2990088"/>
-            <a:ext cx="347472" cy="347472"/>
-          </a:xfrm>
-          <a:prstGeom prst="rect">
-            <a:avLst/>
-          </a:prstGeom>
-        </p:spPr>
-      </p:pic>
-      <p:sp>
-        <p:nvSpPr>
-          <p:cNvPr id="20" name="Text 15"/>
-          <p:cNvSpPr txBox="1"/>
-          <p:nvPr/>
-        </p:nvSpPr>
-        <p:spPr>
-          <a:xfrm>
-            <a:off x="6373368" y="3611880"/>
-            <a:ext cx="2272284" cy="411480"/>
-          </a:xfrm>
-          <a:prstGeom prst="rect">
-            <a:avLst/>
-          </a:prstGeom>
-          <a:noFill/>
-          <a:ln/>
-        </p:spPr>
-        <p:txBody>
-          <a:bodyPr wrap="square" lIns="0" tIns="0" rIns="0" bIns="0" rtlCol="0" anchor="ctr"/>
-          <a:lstStyle/>
-          <a:p>
-            <a:pPr rtl="1" algn="r" indent="0" marL="0">
-              <a:buNone/>
-            </a:pPr>
-            <a:r>
-              <a:rPr lang="fa-IR" altLang="en-US" sz="1100" b="1" dirty="0">
-                <a:solidFill>
-                  <a:srgbClr val="FFFFFF"/>
-                </a:solidFill>
-                <a:latin typeface="Kalameh" pitchFamily="34" charset="0"/>
-                <a:ea typeface="Kalameh" pitchFamily="34" charset="-122"/>
-                <a:cs typeface="Kalameh" pitchFamily="34" charset="-120"/>
-              </a:rPr>
-              <a:t>نصب ایستگاه‌ها</a:t>
-            </a:r>
-            <a:endParaRPr lang="fa-IR" sz="1100" dirty="0"/>
-          </a:p>
-        </p:txBody>
-      </p:sp>
-      <p:sp>
-        <p:nvSpPr>
-          <p:cNvPr id="21" name="Text 16"/>
-          <p:cNvSpPr txBox="1"/>
-          <p:nvPr/>
-        </p:nvSpPr>
-        <p:spPr>
-          <a:xfrm>
-            <a:off x="6373368" y="4114800"/>
-            <a:ext cx="2272284" cy="749808"/>
-          </a:xfrm>
-          <a:prstGeom prst="rect">
-            <a:avLst/>
-          </a:prstGeom>
-          <a:noFill/>
-          <a:ln/>
-        </p:spPr>
-        <p:txBody>
-          <a:bodyPr wrap="square" lIns="0" tIns="0" rIns="0" bIns="0" rtlCol="0" anchor="t"/>
-          <a:lstStyle/>
-          <a:p>
-            <a:pPr rtl="1" algn="r" indent="0" marL="0">
-              <a:buNone/>
-            </a:pPr>
-            <a:r>
-              <a:rPr lang="fa-IR" altLang="en-US" sz="1050" dirty="0">
-                <a:solidFill>
-                  <a:srgbClr val="B9C4D6"/>
-                </a:solidFill>
-                <a:latin typeface="Kalameh" pitchFamily="34" charset="0"/>
-                <a:ea typeface="Kalameh" pitchFamily="34" charset="-122"/>
-                <a:cs typeface="Kalameh" pitchFamily="34" charset="-120"/>
-              </a:rPr>
-              <a:t>نصب ایستگاه‌های شارژ سریع با توان و سرعت مناسب.</a:t>
-            </a:r>
-            <a:endParaRPr lang="fa-IR" sz="1050" dirty="0"/>
-          </a:p>
-        </p:txBody>
-      </p:sp>
-      <p:sp>
-        <p:nvSpPr>
-          <p:cNvPr id="22" name="Text 17"/>
-          <p:cNvSpPr txBox="1"/>
-          <p:nvPr/>
-        </p:nvSpPr>
-        <p:spPr>
-          <a:xfrm>
-            <a:off x="8828532" y="3776472"/>
-            <a:ext cx="256032" cy="347472"/>
-          </a:xfrm>
-          <a:prstGeom prst="rect">
-            <a:avLst/>
-          </a:prstGeom>
-          <a:noFill/>
-          <a:ln/>
-        </p:spPr>
-        <p:txBody>
-          <a:bodyPr wrap="square" lIns="0" tIns="0" rIns="0" bIns="0" rtlCol="0" anchor="ctr"/>
-          <a:lstStyle/>
-          <a:p>
-            <a:pPr algn="ctr" indent="0" marL="0">
-              <a:buNone/>
-            </a:pPr>
-            <a:r>
-              <a:rPr lang="en-US" altLang="en-US" sz="1500" b="1" dirty="0">
-                <a:solidFill>
-                  <a:srgbClr val="FFD166"/>
-                </a:solidFill>
-                <a:latin typeface="Kalameh" pitchFamily="34" charset="0"/>
-                <a:ea typeface="Kalameh" pitchFamily="34" charset="-122"/>
-                <a:cs typeface="Kalameh" pitchFamily="34" charset="-120"/>
-              </a:rPr>
-              <a:t>←</a:t>
-            </a:r>
-            <a:endParaRPr lang="en-US" sz="1500" dirty="0"/>
-          </a:p>
-        </p:txBody>
-      </p:sp>
-      <p:sp>
-        <p:nvSpPr>
-          <p:cNvPr id="23" name="Shape 18"/>
-          <p:cNvSpPr/>
-          <p:nvPr/>
-        </p:nvSpPr>
-        <p:spPr>
-          <a:xfrm>
-            <a:off x="8993124" y="2788920"/>
-            <a:ext cx="2674620" cy="2487168"/>
-          </a:xfrm>
-          <a:prstGeom prst="roundRect">
-            <a:avLst/>
-          </a:prstGeom>
-          <a:solidFill>
-            <a:srgbClr val="17283A"/>
-          </a:solidFill>
-          <a:ln w="8890">
-            <a:solidFill>
-              <a:srgbClr val="EF476F">
-                <a:alpha val="65000"/>
-              </a:srgbClr>
-            </a:solidFill>
-            <a:prstDash val="solid"/>
-          </a:ln>
-        </p:spPr>
-      </p:sp>
-      <p:sp>
-        <p:nvSpPr>
-          <p:cNvPr id="24" name="Text 19"/>
-          <p:cNvSpPr txBox="1"/>
-          <p:nvPr/>
-        </p:nvSpPr>
-        <p:spPr>
-          <a:xfrm>
-            <a:off x="9157716" y="2971800"/>
-            <a:ext cx="685800" cy="320040"/>
-          </a:xfrm>
-          <a:prstGeom prst="rect">
-            <a:avLst/>
-          </a:prstGeom>
-          <a:noFill/>
-          <a:ln/>
-        </p:spPr>
-        <p:txBody>
-          <a:bodyPr wrap="square" lIns="0" tIns="0" rIns="0" bIns="0" rtlCol="0" anchor="ctr"/>
-          <a:lstStyle/>
-          <a:p>
-            <a:pPr algn="l" indent="0" marL="0">
-              <a:buNone/>
-            </a:pPr>
-            <a:r>
-              <a:rPr lang="en-US" altLang="en-US" sz="1200" b="1" dirty="0">
-                <a:solidFill>
-                  <a:srgbClr val="EF476F"/>
-                </a:solidFill>
-                <a:latin typeface="Kalameh" pitchFamily="34" charset="0"/>
-                <a:ea typeface="Kalameh" pitchFamily="34" charset="-122"/>
-                <a:cs typeface="Kalameh" pitchFamily="34" charset="-120"/>
-              </a:rPr>
-              <a:t>04</a:t>
-            </a:r>
-            <a:endParaRPr lang="en-US" sz="1200" dirty="0"/>
-          </a:p>
-        </p:txBody>
-      </p:sp>
-      <p:pic>
-        <p:nvPicPr>
-          <p:cNvPr id="25" name="Image 3" descr="preencoded.png">    </p:cNvPr>
-          <p:cNvPicPr>
-            <a:picLocks noChangeAspect="1"/>
-          </p:cNvPicPr>
-          <p:nvPr/>
-        </p:nvPicPr>
-        <p:blipFill>
-          <a:blip r:embed="rId7">
-            <a:extLst>
-              <a:ext uri="{96DAC541-7B7A-43D3-8B79-37D633B846F1}">
-                <asvg:svgBlip xmlns:asvg="http://schemas.microsoft.com/office/drawing/2016/SVG/main" r:embed="rId8"/>
-              </a:ext>
-            </a:extLst>
-          </a:blip>
-          <a:stretch>
-            <a:fillRect/>
-          </a:stretch>
-        </p:blipFill>
-        <p:spPr>
-          <a:xfrm>
-            <a:off x="11100816" y="2990088"/>
-            <a:ext cx="347472" cy="347472"/>
-          </a:xfrm>
-          <a:prstGeom prst="rect">
-            <a:avLst/>
-          </a:prstGeom>
-        </p:spPr>
-      </p:pic>
-      <p:sp>
-        <p:nvSpPr>
-          <p:cNvPr id="26" name="Text 20"/>
-          <p:cNvSpPr txBox="1"/>
-          <p:nvPr/>
-        </p:nvSpPr>
-        <p:spPr>
-          <a:xfrm>
-            <a:off x="9194292" y="3611880"/>
-            <a:ext cx="2272284" cy="411480"/>
-          </a:xfrm>
-          <a:prstGeom prst="rect">
-            <a:avLst/>
-          </a:prstGeom>
-          <a:noFill/>
-          <a:ln/>
-        </p:spPr>
-        <p:txBody>
-          <a:bodyPr wrap="square" lIns="0" tIns="0" rIns="0" bIns="0" rtlCol="0" anchor="ctr"/>
-          <a:lstStyle/>
-          <a:p>
-            <a:pPr rtl="1" algn="r" indent="0" marL="0">
-              <a:buNone/>
-            </a:pPr>
-            <a:r>
-              <a:rPr lang="fa-IR" altLang="en-US" sz="1100" b="1" dirty="0">
-                <a:solidFill>
-                  <a:srgbClr val="FFFFFF"/>
-                </a:solidFill>
-                <a:latin typeface="Kalameh" pitchFamily="34" charset="0"/>
-                <a:ea typeface="Kalameh" pitchFamily="34" charset="-122"/>
-                <a:cs typeface="Kalameh" pitchFamily="34" charset="-120"/>
-              </a:rPr>
-              <a:t>برنامه‌ریزی مکان‌ها</a:t>
-            </a:r>
-            <a:endParaRPr lang="fa-IR" sz="1100" dirty="0"/>
-          </a:p>
-        </p:txBody>
-      </p:sp>
-      <p:sp>
-        <p:nvSpPr>
-          <p:cNvPr id="27" name="Text 21"/>
-          <p:cNvSpPr txBox="1"/>
-          <p:nvPr/>
-        </p:nvSpPr>
-        <p:spPr>
-          <a:xfrm>
-            <a:off x="9194292" y="4114800"/>
-            <a:ext cx="2272284" cy="749808"/>
-          </a:xfrm>
-          <a:prstGeom prst="rect">
-            <a:avLst/>
-          </a:prstGeom>
-          <a:noFill/>
-          <a:ln/>
-        </p:spPr>
-        <p:txBody>
-          <a:bodyPr wrap="square" lIns="0" tIns="0" rIns="0" bIns="0" rtlCol="0" anchor="t"/>
-          <a:lstStyle/>
-          <a:p>
-            <a:pPr rtl="1" algn="r" indent="0" marL="0">
-              <a:buNone/>
-            </a:pPr>
-            <a:r>
-              <a:rPr lang="fa-IR" altLang="en-US" sz="1050" dirty="0">
-                <a:solidFill>
-                  <a:srgbClr val="B9C4D6"/>
-                </a:solidFill>
-                <a:latin typeface="Kalameh" pitchFamily="34" charset="0"/>
-                <a:ea typeface="Kalameh" pitchFamily="34" charset="-122"/>
-                <a:cs typeface="Kalameh" pitchFamily="34" charset="-120"/>
-              </a:rPr>
-              <a:t>تعیین مکان‌های استراتژیک برای نصب ایستگاه‌های شارژ با همکاری برنامه‌ریزان شهری.</a:t>
-            </a:r>
-            <a:endParaRPr lang="fa-IR" sz="1050" dirty="0"/>
-          </a:p>
-        </p:txBody>
-      </p:sp>
-      <p:sp>
-        <p:nvSpPr>
-          <p:cNvPr id="28" name="Text 22"/>
+          <p:cNvPr id="31" name="Text 29"/>
           <p:cNvSpPr txBox="1"/>
           <p:nvPr/>
         </p:nvSpPr>
@@ -4951,7 +5271,7 @@
             <a:r>
               <a:rPr lang="en-US" altLang="en-US" sz="750" dirty="0">
                 <a:solidFill>
-                  <a:srgbClr val="CBD5E1"/>
+                  <a:srgbClr val="64748B"/>
                 </a:solidFill>
                 <a:latin typeface="Kalameh" pitchFamily="34" charset="0"/>
                 <a:ea typeface="Kalameh" pitchFamily="34" charset="-122"/>
@@ -4965,7 +5285,7 @@
       </p:sp>
       <p:sp>
         <p:nvSpPr>
-          <p:cNvPr id="29" name="Text 23"/>
+          <p:cNvPr id="32" name="Text 30"/>
           <p:cNvSpPr txBox="1"/>
           <p:nvPr/>
         </p:nvSpPr>
@@ -4990,7 +5310,7 @@
             <a:r>
               <a:rPr lang="en-US" altLang="en-US" sz="750" dirty="0">
                 <a:solidFill>
-                  <a:srgbClr val="CBD5E1"/>
+                  <a:srgbClr val="64748B"/>
                 </a:solidFill>
                 <a:latin typeface="Kalameh" pitchFamily="34" charset="0"/>
                 <a:ea typeface="Kalameh" pitchFamily="34" charset="-122"/>
@@ -5004,7 +5324,7 @@
       </p:sp>
       <p:sp>
         <p:nvSpPr>
-          <p:cNvPr id="30" name="Text 24"/>
+          <p:cNvPr id="33" name="Text 31"/>
           <p:cNvSpPr txBox="1"/>
           <p:nvPr/>
         </p:nvSpPr>
@@ -5029,7 +5349,7 @@
             <a:r>
               <a:rPr lang="en-US" altLang="en-US" sz="750" dirty="0">
                 <a:solidFill>
-                  <a:srgbClr val="CBD5E1"/>
+                  <a:srgbClr val="64748B"/>
                 </a:solidFill>
                 <a:latin typeface="Kalameh" pitchFamily="34" charset="0"/>
                 <a:ea typeface="Kalameh" pitchFamily="34" charset="-122"/>
@@ -5055,7 +5375,7 @@
     <p:bg>
       <p:bgPr>
         <a:solidFill>
-          <a:srgbClr val="0F2027"/>
+          <a:srgbClr val="F8FAFC"/>
         </a:solidFill>
       </p:bgPr>
     </p:bg>
@@ -5111,13 +5431,13 @@
             <a:avLst/>
           </a:prstGeom>
           <a:solidFill>
-            <a:srgbClr val="1A5F7A">
+            <a:srgbClr val="0F172A">
               <a:alpha val="22000"/>
             </a:srgbClr>
           </a:solidFill>
           <a:ln w="12700">
             <a:solidFill>
-              <a:srgbClr val="1A5F7A">
+              <a:srgbClr val="0F172A">
                 <a:alpha val="0"/>
               </a:srgbClr>
             </a:solidFill>
@@ -5140,11 +5460,11 @@
             <a:avLst/>
           </a:prstGeom>
           <a:solidFill>
-            <a:srgbClr val="FFD166"/>
+            <a:srgbClr val="10B981"/>
           </a:solidFill>
           <a:ln w="12700">
             <a:solidFill>
-              <a:srgbClr val="FFD166">
+              <a:srgbClr val="10B981">
                 <a:alpha val="0"/>
               </a:srgbClr>
             </a:solidFill>
@@ -5167,11 +5487,11 @@
             <a:avLst/>
           </a:prstGeom>
           <a:solidFill>
-            <a:srgbClr val="FFD166"/>
+            <a:srgbClr val="10B981"/>
           </a:solidFill>
           <a:ln w="12700">
             <a:solidFill>
-              <a:srgbClr val="FFD166">
+              <a:srgbClr val="10B981">
                 <a:alpha val="0"/>
               </a:srgbClr>
             </a:solidFill>
@@ -5200,21 +5520,21 @@
           <a:bodyPr wrap="square" lIns="0" tIns="0" rIns="0" bIns="0" rtlCol="0" anchor="ctr"/>
           <a:lstStyle/>
           <a:p>
-            <a:pPr algn="r" indent="0" marL="0">
-              <a:buNone/>
-            </a:pPr>
-            <a:r>
-              <a:rPr lang="en-US" altLang="en-US" sz="1050" b="1" spc="50" kern="0" dirty="0">
-                <a:solidFill>
-                  <a:srgbClr val="FFD166"/>
-                </a:solidFill>
-                <a:latin typeface="Kalameh" pitchFamily="34" charset="0"/>
-                <a:ea typeface="Kalameh" pitchFamily="34" charset="-122"/>
-                <a:cs typeface="Kalameh" pitchFamily="34" charset="-120"/>
-              </a:rPr>
-              <a:t>06</a:t>
-            </a:r>
-            <a:endParaRPr lang="en-US" sz="1050" dirty="0"/>
+            <a:pPr rtl="1" algn="r" indent="0" marL="0">
+              <a:buNone/>
+            </a:pPr>
+            <a:r>
+              <a:rPr lang="fa-IR" altLang="en-US" sz="1050" b="1" spc="50" kern="0" dirty="0">
+                <a:solidFill>
+                  <a:srgbClr val="10B981"/>
+                </a:solidFill>
+                <a:latin typeface="Kalameh" pitchFamily="34" charset="0"/>
+                <a:ea typeface="Kalameh" pitchFamily="34" charset="-122"/>
+                <a:cs typeface="Kalameh" pitchFamily="34" charset="-120"/>
+              </a:rPr>
+              <a:t>تجربه جهانی</a:t>
+            </a:r>
+            <a:endParaRPr lang="fa-IR" sz="1050" dirty="0"/>
           </a:p>
         </p:txBody>
       </p:sp>
@@ -5243,23 +5563,62 @@
               <a:buNone/>
             </a:pPr>
             <a:r>
-              <a:rPr lang="fa-IR" altLang="en-US" sz="2400" b="1" dirty="0">
-                <a:solidFill>
-                  <a:srgbClr val="FFFFFF"/>
-                </a:solidFill>
-                <a:latin typeface="Kalameh" pitchFamily="34" charset="0"/>
-                <a:ea typeface="Kalameh" pitchFamily="34" charset="-122"/>
-                <a:cs typeface="Kalameh" pitchFamily="34" charset="-120"/>
-              </a:rPr>
-              <a:t>مطالعه موردی: شارژ سریع در مراکز خرید کالیفرنیا</a:t>
-            </a:r>
-            <a:endParaRPr lang="fa-IR" sz="2400" dirty="0"/>
+              <a:rPr lang="fa-IR" altLang="en-US" sz="2500" b="1" dirty="0">
+                <a:solidFill>
+                  <a:srgbClr val="1E293B"/>
+                </a:solidFill>
+                <a:latin typeface="Kalameh" pitchFamily="34" charset="0"/>
+                <a:ea typeface="Kalameh" pitchFamily="34" charset="-122"/>
+                <a:cs typeface="Kalameh" pitchFamily="34" charset="-120"/>
+              </a:rPr>
+              <a:t>نمونه موردی: شارژ مقصدی تسلا</a:t>
+            </a:r>
+            <a:endParaRPr lang="fa-IR" sz="2500" dirty="0"/>
           </a:p>
         </p:txBody>
       </p:sp>
       <p:sp>
         <p:nvSpPr>
           <p:cNvPr id="8" name="Text 5"/>
+          <p:cNvSpPr txBox="1"/>
+          <p:nvPr/>
+        </p:nvSpPr>
+        <p:spPr>
+          <a:xfrm>
+            <a:off x="5486400" y="1783080"/>
+            <a:ext cx="6126480" cy="594360"/>
+          </a:xfrm>
+          <a:prstGeom prst="rect">
+            <a:avLst/>
+          </a:prstGeom>
+          <a:noFill/>
+          <a:ln/>
+        </p:spPr>
+        <p:txBody>
+          <a:bodyPr wrap="square" lIns="0" tIns="0" rIns="0" bIns="0" rtlCol="0" anchor="t"/>
+          <a:lstStyle/>
+          <a:p>
+            <a:pPr rtl="1" algn="r" indent="0" marL="0">
+              <a:buNone/>
+            </a:pPr>
+            <a:r>
+              <a:rPr lang="fa-IR" altLang="en-US" sz="1250" dirty="0">
+                <a:solidFill>
+                  <a:srgbClr val="64748B"/>
+                </a:solidFill>
+                <a:latin typeface="Kalameh" pitchFamily="34" charset="0"/>
+                <a:ea typeface="Kalameh" pitchFamily="34" charset="-122"/>
+                <a:cs typeface="Kalameh" pitchFamily="34" charset="-120"/>
+              </a:rPr>
+              <a:t>تجربیات جهانی در ادغام زیرساخت شارژ با مراکز رفاهی و تجاری</a:t>
+            </a:r>
+            <a:endParaRPr lang="fa-IR" sz="1250" dirty="0"/>
+          </a:p>
+        </p:txBody>
+      </p:sp>
+      <p:sp>
+        <p:nvSpPr>
+          <p:cNvPr id="9" name="Text 6"/>
           <p:cNvSpPr txBox="1"/>
           <p:nvPr/>
         </p:nvSpPr>
@@ -5284,7 +5643,7 @@
             <a:r>
               <a:rPr lang="en-US" altLang="en-US" sz="750" dirty="0">
                 <a:solidFill>
-                  <a:srgbClr val="A0A0A0"/>
+                  <a:srgbClr val="64748B"/>
                 </a:solidFill>
                 <a:latin typeface="Kalameh" pitchFamily="34" charset="0"/>
                 <a:ea typeface="Kalameh" pitchFamily="34" charset="-122"/>
@@ -5298,7 +5657,7 @@
       </p:sp>
       <p:sp>
         <p:nvSpPr>
-          <p:cNvPr id="9" name="Text 6"/>
+          <p:cNvPr id="10" name="Text 7"/>
           <p:cNvSpPr txBox="1"/>
           <p:nvPr/>
         </p:nvSpPr>
@@ -5323,7 +5682,7 @@
             <a:r>
               <a:rPr lang="en-US" altLang="en-US" sz="750" dirty="0">
                 <a:solidFill>
-                  <a:srgbClr val="A0A0A0"/>
+                  <a:srgbClr val="64748B"/>
                 </a:solidFill>
                 <a:latin typeface="Kalameh" pitchFamily="34" charset="0"/>
                 <a:ea typeface="Kalameh" pitchFamily="34" charset="-122"/>
@@ -5337,7 +5696,7 @@
       </p:sp>
       <p:sp>
         <p:nvSpPr>
-          <p:cNvPr id="10" name="Text 7"/>
+          <p:cNvPr id="11" name="Text 8"/>
           <p:cNvSpPr txBox="1"/>
           <p:nvPr/>
         </p:nvSpPr>
@@ -5362,7 +5721,7 @@
             <a:r>
               <a:rPr lang="en-US" altLang="en-US" sz="750" dirty="0">
                 <a:solidFill>
-                  <a:srgbClr val="A0A0A0"/>
+                  <a:srgbClr val="64748B"/>
                 </a:solidFill>
                 <a:latin typeface="Kalameh" pitchFamily="34" charset="0"/>
                 <a:ea typeface="Kalameh" pitchFamily="34" charset="-122"/>
@@ -5376,7 +5735,7 @@
       </p:sp>
       <p:sp>
         <p:nvSpPr>
-          <p:cNvPr id="11" name="Text 8"/>
+          <p:cNvPr id="12" name="Text 9"/>
           <p:cNvSpPr txBox="1"/>
           <p:nvPr/>
         </p:nvSpPr>
@@ -5401,7 +5760,7 @@
             <a:r>
               <a:rPr lang="en-US" altLang="en-US" sz="620" dirty="0">
                 <a:solidFill>
-                  <a:srgbClr val="A0A0A0"/>
+                  <a:srgbClr val="64748B"/>
                 </a:solidFill>
                 <a:latin typeface="Kalameh" pitchFamily="34" charset="0"/>
                 <a:ea typeface="Kalameh" pitchFamily="34" charset="-122"/>
@@ -5427,7 +5786,7 @@
     <p:bg>
       <p:bgPr>
         <a:solidFill>
-          <a:srgbClr val="0F2027"/>
+          <a:srgbClr val="F8FAFC"/>
         </a:solidFill>
       </p:bgPr>
     </p:bg>
@@ -5445,26 +5804,51 @@
           <a:chExt cx="0" cy="0"/>
         </a:xfrm>
       </p:grpSpPr>
-      <p:sp>
-        <p:nvSpPr>
-          <p:cNvPr id="2" name="Shape 0"/>
+      <p:pic>
+        <p:nvPicPr>
+          <p:cNvPr id="2" name="Image 0" descr="preencoded.png">    </p:cNvPr>
+          <p:cNvPicPr>
+            <a:picLocks noChangeAspect="1"/>
+          </p:cNvPicPr>
+          <p:nvPr/>
+        </p:nvPicPr>
+        <p:blipFill>
+          <a:blip r:embed="rId1"/>
+          <a:srcRect l="27099" r="27099" t="0" b="0"/>
+          <a:stretch/>
+        </p:blipFill>
+        <p:spPr>
+          <a:xfrm>
+            <a:off x="0" y="0"/>
+            <a:ext cx="4709160" cy="6858000"/>
+          </a:xfrm>
+          <a:prstGeom prst="rect">
+            <a:avLst/>
+          </a:prstGeom>
+        </p:spPr>
+      </p:pic>
+      <p:sp>
+        <p:nvSpPr>
+          <p:cNvPr id="3" name="Shape 0"/>
           <p:cNvSpPr/>
           <p:nvPr/>
         </p:nvSpPr>
         <p:spPr>
           <a:xfrm>
-            <a:off x="11503152" y="347472"/>
-            <a:ext cx="155448" cy="310896"/>
+            <a:off x="0" y="0"/>
+            <a:ext cx="4709160" cy="6858000"/>
           </a:xfrm>
           <a:prstGeom prst="rect">
             <a:avLst/>
           </a:prstGeom>
           <a:solidFill>
-            <a:srgbClr val="FFD166"/>
+            <a:srgbClr val="0F172A">
+              <a:alpha val="22000"/>
+            </a:srgbClr>
           </a:solidFill>
           <a:ln w="12700">
             <a:solidFill>
-              <a:srgbClr val="FFD166">
+              <a:srgbClr val="0F172A">
                 <a:alpha val="0"/>
               </a:srgbClr>
             </a:solidFill>
@@ -5474,136 +5858,24 @@
       </p:sp>
       <p:sp>
         <p:nvSpPr>
-          <p:cNvPr id="3" name="Text 1"/>
-          <p:cNvSpPr txBox="1"/>
-          <p:nvPr/>
-        </p:nvSpPr>
-        <p:spPr>
-          <a:xfrm>
-            <a:off x="5166360" y="329184"/>
-            <a:ext cx="6217920" cy="365760"/>
-          </a:xfrm>
-          <a:prstGeom prst="rect">
-            <a:avLst/>
-          </a:prstGeom>
-          <a:noFill/>
-          <a:ln/>
-        </p:spPr>
-        <p:txBody>
-          <a:bodyPr wrap="square" lIns="0" tIns="0" rIns="0" bIns="0" rtlCol="0" anchor="ctr"/>
-          <a:lstStyle/>
-          <a:p>
-            <a:pPr algn="r" indent="0" marL="0">
-              <a:buNone/>
-            </a:pPr>
-            <a:r>
-              <a:rPr lang="en-US" altLang="en-US" sz="1050" b="1" spc="50" kern="0" dirty="0">
-                <a:solidFill>
-                  <a:srgbClr val="FFD166"/>
-                </a:solidFill>
-                <a:latin typeface="Kalameh" pitchFamily="34" charset="0"/>
-                <a:ea typeface="Kalameh" pitchFamily="34" charset="-122"/>
-                <a:cs typeface="Kalameh" pitchFamily="34" charset="-120"/>
-              </a:rPr>
-              <a:t>07</a:t>
-            </a:r>
-            <a:endParaRPr lang="en-US" sz="1050" dirty="0"/>
-          </a:p>
-        </p:txBody>
-      </p:sp>
-      <p:sp>
-        <p:nvSpPr>
-          <p:cNvPr id="4" name="Text 2"/>
-          <p:cNvSpPr txBox="1"/>
-          <p:nvPr/>
-        </p:nvSpPr>
-        <p:spPr>
-          <a:xfrm>
-            <a:off x="5166360" y="731520"/>
-            <a:ext cx="6492240" cy="868680"/>
-          </a:xfrm>
-          <a:prstGeom prst="rect">
-            <a:avLst/>
-          </a:prstGeom>
-          <a:noFill/>
-          <a:ln/>
-        </p:spPr>
-        <p:txBody>
-          <a:bodyPr wrap="square" lIns="0" tIns="0" rIns="0" bIns="0" rtlCol="0" anchor="t"/>
-          <a:lstStyle/>
-          <a:p>
-            <a:pPr rtl="1" algn="r" indent="0" marL="0">
-              <a:buNone/>
-            </a:pPr>
-            <a:r>
-              <a:rPr lang="fa-IR" altLang="en-US" sz="2400" b="1" dirty="0">
-                <a:solidFill>
-                  <a:srgbClr val="FFFFFF"/>
-                </a:solidFill>
-                <a:latin typeface="Kalameh" pitchFamily="34" charset="0"/>
-                <a:ea typeface="Kalameh" pitchFamily="34" charset="-122"/>
-                <a:cs typeface="Kalameh" pitchFamily="34" charset="-120"/>
-              </a:rPr>
-              <a:t>نکات کلیدی برای ذینفعان</a:t>
-            </a:r>
-            <a:endParaRPr lang="fa-IR" sz="2400" dirty="0"/>
-          </a:p>
-        </p:txBody>
-      </p:sp>
-      <p:sp>
-        <p:nvSpPr>
-          <p:cNvPr id="5" name="Shape 3"/>
+          <p:cNvPr id="4" name="Shape 1"/>
           <p:cNvSpPr/>
           <p:nvPr/>
         </p:nvSpPr>
         <p:spPr>
           <a:xfrm>
-            <a:off x="502920" y="2304288"/>
-            <a:ext cx="3593592" cy="3794760"/>
-          </a:xfrm>
-          <a:prstGeom prst="roundRect">
+            <a:off x="4709160" y="0"/>
+            <a:ext cx="137160" cy="6858000"/>
+          </a:xfrm>
+          <a:prstGeom prst="rect">
             <a:avLst/>
           </a:prstGeom>
           <a:solidFill>
-            <a:srgbClr val="1A1A2E"/>
-          </a:solidFill>
-          <a:ln w="8890">
-            <a:solidFill>
-              <a:srgbClr val="DCE4EE">
-                <a:alpha val="65000"/>
-              </a:srgbClr>
-            </a:solidFill>
-            <a:prstDash val="solid"/>
-          </a:ln>
-          <a:effectLst>
-            <a:outerShdw sx="100000" sy="100000" kx="0" ky="0" algn="bl" rotWithShape="0" blurRad="25400" dist="13970" dir="2700000">
-              <a:srgbClr val="000000">
-                <a:alpha val="16000"/>
-              </a:srgbClr>
-            </a:outerShdw>
-          </a:effectLst>
-        </p:spPr>
-      </p:sp>
-      <p:sp>
-        <p:nvSpPr>
-          <p:cNvPr id="6" name="Shape 4"/>
-          <p:cNvSpPr/>
-          <p:nvPr/>
-        </p:nvSpPr>
-        <p:spPr>
-          <a:xfrm>
-            <a:off x="3383280" y="2624328"/>
-            <a:ext cx="457200" cy="457200"/>
-          </a:xfrm>
-          <a:prstGeom prst="ellipse">
-            <a:avLst/>
-          </a:prstGeom>
-          <a:solidFill>
-            <a:srgbClr val="FFD166"/>
+            <a:srgbClr val="10B981"/>
           </a:solidFill>
           <a:ln w="12700">
             <a:solidFill>
-              <a:srgbClr val="FFD166">
+              <a:srgbClr val="10B981">
                 <a:alpha val="0"/>
               </a:srgbClr>
             </a:solidFill>
@@ -5611,19 +5883,190 @@
           </a:ln>
         </p:spPr>
       </p:sp>
+      <p:sp>
+        <p:nvSpPr>
+          <p:cNvPr id="5" name="Shape 2"/>
+          <p:cNvSpPr/>
+          <p:nvPr/>
+        </p:nvSpPr>
+        <p:spPr>
+          <a:xfrm>
+            <a:off x="11457432" y="347472"/>
+            <a:ext cx="155448" cy="310896"/>
+          </a:xfrm>
+          <a:prstGeom prst="rect">
+            <a:avLst/>
+          </a:prstGeom>
+          <a:solidFill>
+            <a:srgbClr val="10B981"/>
+          </a:solidFill>
+          <a:ln w="12700">
+            <a:solidFill>
+              <a:srgbClr val="10B981">
+                <a:alpha val="0"/>
+              </a:srgbClr>
+            </a:solidFill>
+            <a:prstDash val="solid"/>
+          </a:ln>
+        </p:spPr>
+      </p:sp>
+      <p:sp>
+        <p:nvSpPr>
+          <p:cNvPr id="6" name="Text 3"/>
+          <p:cNvSpPr txBox="1"/>
+          <p:nvPr/>
+        </p:nvSpPr>
+        <p:spPr>
+          <a:xfrm>
+            <a:off x="5486400" y="329184"/>
+            <a:ext cx="5852160" cy="365760"/>
+          </a:xfrm>
+          <a:prstGeom prst="rect">
+            <a:avLst/>
+          </a:prstGeom>
+          <a:noFill/>
+          <a:ln/>
+        </p:spPr>
+        <p:txBody>
+          <a:bodyPr wrap="square" lIns="0" tIns="0" rIns="0" bIns="0" rtlCol="0" anchor="ctr"/>
+          <a:lstStyle/>
+          <a:p>
+            <a:pPr rtl="1" algn="r" indent="0" marL="0">
+              <a:buNone/>
+            </a:pPr>
+            <a:r>
+              <a:rPr lang="fa-IR" altLang="en-US" sz="1050" b="1" spc="50" kern="0" dirty="0">
+                <a:solidFill>
+                  <a:srgbClr val="10B981"/>
+                </a:solidFill>
+                <a:latin typeface="Kalameh" pitchFamily="34" charset="0"/>
+                <a:ea typeface="Kalameh" pitchFamily="34" charset="-122"/>
+                <a:cs typeface="Kalameh" pitchFamily="34" charset="-120"/>
+              </a:rPr>
+              <a:t>ارزش اقتصادی</a:t>
+            </a:r>
+            <a:endParaRPr lang="fa-IR" sz="1050" dirty="0"/>
+          </a:p>
+        </p:txBody>
+      </p:sp>
+      <p:sp>
+        <p:nvSpPr>
+          <p:cNvPr id="7" name="Text 4"/>
+          <p:cNvSpPr txBox="1"/>
+          <p:nvPr/>
+        </p:nvSpPr>
+        <p:spPr>
+          <a:xfrm>
+            <a:off x="5486400" y="731520"/>
+            <a:ext cx="6126480" cy="960120"/>
+          </a:xfrm>
+          <a:prstGeom prst="rect">
+            <a:avLst/>
+          </a:prstGeom>
+          <a:noFill/>
+          <a:ln/>
+        </p:spPr>
+        <p:txBody>
+          <a:bodyPr wrap="square" lIns="0" tIns="0" rIns="0" bIns="0" rtlCol="0" anchor="t"/>
+          <a:lstStyle/>
+          <a:p>
+            <a:pPr rtl="1" algn="r" indent="0" marL="0">
+              <a:buNone/>
+            </a:pPr>
+            <a:r>
+              <a:rPr lang="fa-IR" altLang="en-US" sz="2400" b="1" dirty="0">
+                <a:solidFill>
+                  <a:srgbClr val="1E293B"/>
+                </a:solidFill>
+                <a:latin typeface="Kalameh" pitchFamily="34" charset="0"/>
+                <a:ea typeface="Kalameh" pitchFamily="34" charset="-122"/>
+                <a:cs typeface="Kalameh" pitchFamily="34" charset="-120"/>
+              </a:rPr>
+              <a:t>مزایای اقتصادی و شبکه‌ای شارژ هوشمند</a:t>
+            </a:r>
+            <a:endParaRPr lang="fa-IR" sz="2400" dirty="0"/>
+          </a:p>
+        </p:txBody>
+      </p:sp>
+      <p:sp>
+        <p:nvSpPr>
+          <p:cNvPr id="8" name="Text 5"/>
+          <p:cNvSpPr txBox="1"/>
+          <p:nvPr/>
+        </p:nvSpPr>
+        <p:spPr>
+          <a:xfrm>
+            <a:off x="5486400" y="1783080"/>
+            <a:ext cx="6126480" cy="594360"/>
+          </a:xfrm>
+          <a:prstGeom prst="rect">
+            <a:avLst/>
+          </a:prstGeom>
+          <a:noFill/>
+          <a:ln/>
+        </p:spPr>
+        <p:txBody>
+          <a:bodyPr wrap="square" lIns="0" tIns="0" rIns="0" bIns="0" rtlCol="0" anchor="t"/>
+          <a:lstStyle/>
+          <a:p>
+            <a:pPr rtl="1" algn="r" indent="0" marL="0">
+              <a:buNone/>
+            </a:pPr>
+            <a:r>
+              <a:rPr lang="fa-IR" altLang="en-US" sz="1250" dirty="0">
+                <a:solidFill>
+                  <a:srgbClr val="64748B"/>
+                </a:solidFill>
+                <a:latin typeface="Kalameh" pitchFamily="34" charset="0"/>
+                <a:ea typeface="Kalameh" pitchFamily="34" charset="-122"/>
+                <a:cs typeface="Kalameh" pitchFamily="34" charset="-120"/>
+              </a:rPr>
+              <a:t>نقش مراکز تجاری در پایداری شبکه و کاهش هزینه‌ها</a:t>
+            </a:r>
+            <a:endParaRPr lang="fa-IR" sz="1250" dirty="0"/>
+          </a:p>
+        </p:txBody>
+      </p:sp>
+      <p:sp>
+        <p:nvSpPr>
+          <p:cNvPr id="9" name="Shape 6"/>
+          <p:cNvSpPr/>
+          <p:nvPr/>
+        </p:nvSpPr>
+        <p:spPr>
+          <a:xfrm>
+            <a:off x="10771632" y="2578608"/>
+            <a:ext cx="502920" cy="502920"/>
+          </a:xfrm>
+          <a:prstGeom prst="ellipse">
+            <a:avLst/>
+          </a:prstGeom>
+          <a:solidFill>
+            <a:srgbClr val="10B981"/>
+          </a:solidFill>
+          <a:ln w="12700">
+            <a:solidFill>
+              <a:srgbClr val="10B981">
+                <a:alpha val="0"/>
+              </a:srgbClr>
+            </a:solidFill>
+            <a:prstDash val="solid"/>
+          </a:ln>
+        </p:spPr>
+      </p:sp>
       <p:pic>
         <p:nvPicPr>
-          <p:cNvPr id="7" name="Image 0" descr="preencoded.png">    </p:cNvPr>
+          <p:cNvPr id="10" name="Image 1" descr="preencoded.png">    </p:cNvPr>
           <p:cNvPicPr>
             <a:picLocks noChangeAspect="1"/>
           </p:cNvPicPr>
           <p:nvPr/>
         </p:nvPicPr>
         <p:blipFill>
-          <a:blip r:embed="rId1">
+          <a:blip r:embed="rId2">
             <a:extLst>
               <a:ext uri="{96DAC541-7B7A-43D3-8B79-37D633B846F1}">
-                <asvg:svgBlip xmlns:asvg="http://schemas.microsoft.com/office/drawing/2016/SVG/main" r:embed="rId2"/>
+                <asvg:svgBlip xmlns:asvg="http://schemas.microsoft.com/office/drawing/2016/SVG/main" r:embed="rId3"/>
               </a:ext>
             </a:extLst>
           </a:blip>
@@ -5633,8 +6076,8 @@
         </p:blipFill>
         <p:spPr>
           <a:xfrm>
-            <a:off x="3488436" y="2729484"/>
-            <a:ext cx="246888" cy="246888"/>
+            <a:off x="10887304" y="2694280"/>
+            <a:ext cx="271577" cy="271577"/>
           </a:xfrm>
           <a:prstGeom prst="rect">
             <a:avLst/>
@@ -5643,14 +6086,14 @@
       </p:pic>
       <p:sp>
         <p:nvSpPr>
-          <p:cNvPr id="8" name="Text 5"/>
-          <p:cNvSpPr txBox="1"/>
-          <p:nvPr/>
-        </p:nvSpPr>
-        <p:spPr>
-          <a:xfrm>
-            <a:off x="777240" y="3081528"/>
-            <a:ext cx="3044952" cy="347472"/>
+          <p:cNvPr id="11" name="Text 7"/>
+          <p:cNvSpPr txBox="1"/>
+          <p:nvPr/>
+        </p:nvSpPr>
+        <p:spPr>
+          <a:xfrm>
+            <a:off x="7543800" y="2560320"/>
+            <a:ext cx="2971800" cy="256032"/>
           </a:xfrm>
           <a:prstGeom prst="rect">
             <a:avLst/>
@@ -5666,30 +6109,30 @@
               <a:buNone/>
             </a:pPr>
             <a:r>
-              <a:rPr lang="fa-IR" altLang="en-US" sz="1300" b="1" dirty="0">
-                <a:solidFill>
-                  <a:srgbClr val="FFFFFF"/>
-                </a:solidFill>
-                <a:latin typeface="Kalameh" pitchFamily="34" charset="0"/>
-                <a:ea typeface="Kalameh" pitchFamily="34" charset="-122"/>
-                <a:cs typeface="Kalameh" pitchFamily="34" charset="-120"/>
-              </a:rPr>
-              <a:t>برنامه‌ریزان شهری</a:t>
-            </a:r>
-            <a:endParaRPr lang="fa-IR" sz="1300" dirty="0"/>
-          </a:p>
-        </p:txBody>
-      </p:sp>
-      <p:sp>
-        <p:nvSpPr>
-          <p:cNvPr id="9" name="Text 6"/>
-          <p:cNvSpPr txBox="1"/>
-          <p:nvPr/>
-        </p:nvSpPr>
-        <p:spPr>
-          <a:xfrm>
-            <a:off x="777240" y="3511296"/>
-            <a:ext cx="3044952" cy="2350008"/>
+              <a:rPr lang="fa-IR" altLang="en-US" sz="1200" b="1" dirty="0">
+                <a:solidFill>
+                  <a:srgbClr val="1E293B"/>
+                </a:solidFill>
+                <a:latin typeface="Kalameh" pitchFamily="34" charset="0"/>
+                <a:ea typeface="Kalameh" pitchFamily="34" charset="-122"/>
+                <a:cs typeface="Kalameh" pitchFamily="34" charset="-120"/>
+              </a:rPr>
+              <a:t>افزایش ارزش اقتصادی</a:t>
+            </a:r>
+            <a:endParaRPr lang="fa-IR" sz="1200" dirty="0"/>
+          </a:p>
+        </p:txBody>
+      </p:sp>
+      <p:sp>
+        <p:nvSpPr>
+          <p:cNvPr id="12" name="Text 8"/>
+          <p:cNvSpPr txBox="1"/>
+          <p:nvPr/>
+        </p:nvSpPr>
+        <p:spPr>
+          <a:xfrm>
+            <a:off x="5486400" y="2834640"/>
+            <a:ext cx="5029200" cy="438912"/>
           </a:xfrm>
           <a:prstGeom prst="rect">
             <a:avLst/>
@@ -5705,74 +6148,40 @@
               <a:buNone/>
             </a:pPr>
             <a:r>
-              <a:rPr lang="fa-IR" altLang="en-US" sz="1200" dirty="0">
-                <a:solidFill>
-                  <a:srgbClr val="A0A0A0"/>
-                </a:solidFill>
-                <a:latin typeface="Kalameh" pitchFamily="34" charset="0"/>
-                <a:ea typeface="Kalameh" pitchFamily="34" charset="-122"/>
-                <a:cs typeface="Kalameh" pitchFamily="34" charset="-120"/>
-              </a:rPr>
-              <a:t>زیرساخت‌های شارژ را در مکان‌های استراتژیک توسعه دهید و با فروشگاه‌ها همکاری کنید.</a:t>
-            </a:r>
-            <a:endParaRPr lang="fa-IR" sz="1200" dirty="0"/>
-          </a:p>
-        </p:txBody>
-      </p:sp>
-      <p:sp>
-        <p:nvSpPr>
-          <p:cNvPr id="10" name="Shape 7"/>
+              <a:rPr lang="fa-IR" altLang="en-US" sz="1150" dirty="0">
+                <a:solidFill>
+                  <a:srgbClr val="64748B"/>
+                </a:solidFill>
+                <a:latin typeface="Kalameh" pitchFamily="34" charset="0"/>
+                <a:ea typeface="Kalameh" pitchFamily="34" charset="-122"/>
+                <a:cs typeface="Kalameh" pitchFamily="34" charset="-120"/>
+              </a:rPr>
+              <a:t>کاهش هزینه‌های استقرار زیرساخت و ارائه خدمات بهینه به مشتریان فروشگاه‌ها.</a:t>
+            </a:r>
+            <a:endParaRPr lang="fa-IR" sz="1150" dirty="0"/>
+          </a:p>
+        </p:txBody>
+      </p:sp>
+      <p:sp>
+        <p:nvSpPr>
+          <p:cNvPr id="13" name="Shape 9"/>
           <p:cNvSpPr/>
           <p:nvPr/>
         </p:nvSpPr>
         <p:spPr>
           <a:xfrm>
-            <a:off x="4297680" y="2304288"/>
-            <a:ext cx="3593592" cy="3794760"/>
-          </a:xfrm>
-          <a:prstGeom prst="roundRect">
+            <a:off x="10771632" y="3419856"/>
+            <a:ext cx="502920" cy="502920"/>
+          </a:xfrm>
+          <a:prstGeom prst="ellipse">
             <a:avLst/>
           </a:prstGeom>
           <a:solidFill>
-            <a:srgbClr val="1A1A2E"/>
-          </a:solidFill>
-          <a:ln w="8890">
-            <a:solidFill>
-              <a:srgbClr val="DCE4EE">
-                <a:alpha val="65000"/>
-              </a:srgbClr>
-            </a:solidFill>
-            <a:prstDash val="solid"/>
-          </a:ln>
-          <a:effectLst>
-            <a:outerShdw sx="100000" sy="100000" kx="0" ky="0" algn="bl" rotWithShape="0" blurRad="25400" dist="13970" dir="2700000">
-              <a:srgbClr val="000000">
-                <a:alpha val="16000"/>
-              </a:srgbClr>
-            </a:outerShdw>
-          </a:effectLst>
-        </p:spPr>
-      </p:sp>
-      <p:sp>
-        <p:nvSpPr>
-          <p:cNvPr id="11" name="Shape 8"/>
-          <p:cNvSpPr/>
-          <p:nvPr/>
-        </p:nvSpPr>
-        <p:spPr>
-          <a:xfrm>
-            <a:off x="7178040" y="2624328"/>
-            <a:ext cx="457200" cy="457200"/>
-          </a:xfrm>
-          <a:prstGeom prst="ellipse">
-            <a:avLst/>
-          </a:prstGeom>
-          <a:solidFill>
-            <a:srgbClr val="EF476F"/>
+            <a:srgbClr val="F59E0B"/>
           </a:solidFill>
           <a:ln w="12700">
             <a:solidFill>
-              <a:srgbClr val="EF476F">
+              <a:srgbClr val="F59E0B">
                 <a:alpha val="0"/>
               </a:srgbClr>
             </a:solidFill>
@@ -5782,17 +6191,17 @@
       </p:sp>
       <p:pic>
         <p:nvPicPr>
-          <p:cNvPr id="12" name="Image 1" descr="preencoded.png">    </p:cNvPr>
+          <p:cNvPr id="14" name="Image 2" descr="preencoded.png">    </p:cNvPr>
           <p:cNvPicPr>
             <a:picLocks noChangeAspect="1"/>
           </p:cNvPicPr>
           <p:nvPr/>
         </p:nvPicPr>
         <p:blipFill>
-          <a:blip r:embed="rId3">
+          <a:blip r:embed="rId4">
             <a:extLst>
               <a:ext uri="{96DAC541-7B7A-43D3-8B79-37D633B846F1}">
-                <asvg:svgBlip xmlns:asvg="http://schemas.microsoft.com/office/drawing/2016/SVG/main" r:embed="rId4"/>
+                <asvg:svgBlip xmlns:asvg="http://schemas.microsoft.com/office/drawing/2016/SVG/main" r:embed="rId5"/>
               </a:ext>
             </a:extLst>
           </a:blip>
@@ -5802,8 +6211,8 @@
         </p:blipFill>
         <p:spPr>
           <a:xfrm>
-            <a:off x="7283196" y="2729484"/>
-            <a:ext cx="246888" cy="246888"/>
+            <a:off x="10887304" y="3535528"/>
+            <a:ext cx="271577" cy="271577"/>
           </a:xfrm>
           <a:prstGeom prst="rect">
             <a:avLst/>
@@ -5812,14 +6221,14 @@
       </p:pic>
       <p:sp>
         <p:nvSpPr>
-          <p:cNvPr id="13" name="Text 9"/>
-          <p:cNvSpPr txBox="1"/>
-          <p:nvPr/>
-        </p:nvSpPr>
-        <p:spPr>
-          <a:xfrm>
-            <a:off x="4572000" y="3081528"/>
-            <a:ext cx="3044952" cy="347472"/>
+          <p:cNvPr id="15" name="Text 10"/>
+          <p:cNvSpPr txBox="1"/>
+          <p:nvPr/>
+        </p:nvSpPr>
+        <p:spPr>
+          <a:xfrm>
+            <a:off x="7543800" y="3401568"/>
+            <a:ext cx="2971800" cy="256032"/>
           </a:xfrm>
           <a:prstGeom prst="rect">
             <a:avLst/>
@@ -5835,30 +6244,30 @@
               <a:buNone/>
             </a:pPr>
             <a:r>
-              <a:rPr lang="fa-IR" altLang="en-US" sz="1300" b="1" dirty="0">
-                <a:solidFill>
-                  <a:srgbClr val="FFFFFF"/>
-                </a:solidFill>
-                <a:latin typeface="Kalameh" pitchFamily="34" charset="0"/>
-                <a:ea typeface="Kalameh" pitchFamily="34" charset="-122"/>
-                <a:cs typeface="Kalameh" pitchFamily="34" charset="-120"/>
-              </a:rPr>
-              <a:t>فروشگاه‌ها</a:t>
-            </a:r>
-            <a:endParaRPr lang="fa-IR" sz="1300" dirty="0"/>
-          </a:p>
-        </p:txBody>
-      </p:sp>
-      <p:sp>
-        <p:nvSpPr>
-          <p:cNvPr id="14" name="Text 10"/>
-          <p:cNvSpPr txBox="1"/>
-          <p:nvPr/>
-        </p:nvSpPr>
-        <p:spPr>
-          <a:xfrm>
-            <a:off x="4572000" y="3511296"/>
-            <a:ext cx="3044952" cy="2350008"/>
+              <a:rPr lang="fa-IR" altLang="en-US" sz="1200" b="1" dirty="0">
+                <a:solidFill>
+                  <a:srgbClr val="1E293B"/>
+                </a:solidFill>
+                <a:latin typeface="Kalameh" pitchFamily="34" charset="0"/>
+                <a:ea typeface="Kalameh" pitchFamily="34" charset="-122"/>
+                <a:cs typeface="Kalameh" pitchFamily="34" charset="-120"/>
+              </a:rPr>
+              <a:t>جلوگیری از دارایی‌های راکد</a:t>
+            </a:r>
+            <a:endParaRPr lang="fa-IR" sz="1200" dirty="0"/>
+          </a:p>
+        </p:txBody>
+      </p:sp>
+      <p:sp>
+        <p:nvSpPr>
+          <p:cNvPr id="16" name="Text 11"/>
+          <p:cNvSpPr txBox="1"/>
+          <p:nvPr/>
+        </p:nvSpPr>
+        <p:spPr>
+          <a:xfrm>
+            <a:off x="5486400" y="3675888"/>
+            <a:ext cx="5029200" cy="438912"/>
           </a:xfrm>
           <a:prstGeom prst="rect">
             <a:avLst/>
@@ -5874,74 +6283,40 @@
               <a:buNone/>
             </a:pPr>
             <a:r>
-              <a:rPr lang="fa-IR" altLang="en-US" sz="1200" dirty="0">
-                <a:solidFill>
-                  <a:srgbClr val="A0A0A0"/>
-                </a:solidFill>
-                <a:latin typeface="Kalameh" pitchFamily="34" charset="0"/>
-                <a:ea typeface="Kalameh" pitchFamily="34" charset="-122"/>
-                <a:cs typeface="Kalameh" pitchFamily="34" charset="-120"/>
-              </a:rPr>
-              <a:t>با ارائه خدمات شارژ، مشتریان جدید جذب کنید و مدت حضور آن‌ها را افزایش دهید.</a:t>
-            </a:r>
-            <a:endParaRPr lang="fa-IR" sz="1200" dirty="0"/>
-          </a:p>
-        </p:txBody>
-      </p:sp>
-      <p:sp>
-        <p:nvSpPr>
-          <p:cNvPr id="15" name="Shape 11"/>
+              <a:rPr lang="fa-IR" altLang="en-US" sz="1150" dirty="0">
+                <a:solidFill>
+                  <a:srgbClr val="64748B"/>
+                </a:solidFill>
+                <a:latin typeface="Kalameh" pitchFamily="34" charset="0"/>
+                <a:ea typeface="Kalameh" pitchFamily="34" charset="-122"/>
+                <a:cs typeface="Kalameh" pitchFamily="34" charset="-120"/>
+              </a:rPr>
+              <a:t>پرهیز از وابستگی به شبکه‌های انحصاری و تضمین به‌روزرسانی تجهیزات.</a:t>
+            </a:r>
+            <a:endParaRPr lang="fa-IR" sz="1150" dirty="0"/>
+          </a:p>
+        </p:txBody>
+      </p:sp>
+      <p:sp>
+        <p:nvSpPr>
+          <p:cNvPr id="17" name="Shape 12"/>
           <p:cNvSpPr/>
           <p:nvPr/>
         </p:nvSpPr>
         <p:spPr>
           <a:xfrm>
-            <a:off x="8092440" y="2304288"/>
-            <a:ext cx="3593592" cy="3794760"/>
-          </a:xfrm>
-          <a:prstGeom prst="roundRect">
+            <a:off x="10771632" y="4261104"/>
+            <a:ext cx="502920" cy="502920"/>
+          </a:xfrm>
+          <a:prstGeom prst="ellipse">
             <a:avLst/>
           </a:prstGeom>
           <a:solidFill>
-            <a:srgbClr val="1A1A2E"/>
-          </a:solidFill>
-          <a:ln w="8890">
-            <a:solidFill>
-              <a:srgbClr val="DCE4EE">
-                <a:alpha val="65000"/>
-              </a:srgbClr>
-            </a:solidFill>
-            <a:prstDash val="solid"/>
-          </a:ln>
-          <a:effectLst>
-            <a:outerShdw sx="100000" sy="100000" kx="0" ky="0" algn="bl" rotWithShape="0" blurRad="25400" dist="13970" dir="2700000">
-              <a:srgbClr val="000000">
-                <a:alpha val="16000"/>
-              </a:srgbClr>
-            </a:outerShdw>
-          </a:effectLst>
-        </p:spPr>
-      </p:sp>
-      <p:sp>
-        <p:nvSpPr>
-          <p:cNvPr id="16" name="Shape 12"/>
-          <p:cNvSpPr/>
-          <p:nvPr/>
-        </p:nvSpPr>
-        <p:spPr>
-          <a:xfrm>
-            <a:off x="10972800" y="2624328"/>
-            <a:ext cx="457200" cy="457200"/>
-          </a:xfrm>
-          <a:prstGeom prst="ellipse">
-            <a:avLst/>
-          </a:prstGeom>
-          <a:solidFill>
-            <a:srgbClr val="57CC99"/>
+            <a:srgbClr val="10B981"/>
           </a:solidFill>
           <a:ln w="12700">
             <a:solidFill>
-              <a:srgbClr val="57CC99">
+              <a:srgbClr val="10B981">
                 <a:alpha val="0"/>
               </a:srgbClr>
             </a:solidFill>
@@ -5951,17 +6326,17 @@
       </p:sp>
       <p:pic>
         <p:nvPicPr>
-          <p:cNvPr id="17" name="Image 2" descr="preencoded.png">    </p:cNvPr>
+          <p:cNvPr id="18" name="Image 3" descr="preencoded.png">    </p:cNvPr>
           <p:cNvPicPr>
             <a:picLocks noChangeAspect="1"/>
           </p:cNvPicPr>
           <p:nvPr/>
         </p:nvPicPr>
         <p:blipFill>
-          <a:blip r:embed="rId5">
+          <a:blip r:embed="rId6">
             <a:extLst>
               <a:ext uri="{96DAC541-7B7A-43D3-8B79-37D633B846F1}">
-                <asvg:svgBlip xmlns:asvg="http://schemas.microsoft.com/office/drawing/2016/SVG/main" r:embed="rId6"/>
+                <asvg:svgBlip xmlns:asvg="http://schemas.microsoft.com/office/drawing/2016/SVG/main" r:embed="rId7"/>
               </a:ext>
             </a:extLst>
           </a:blip>
@@ -5971,8 +6346,8 @@
         </p:blipFill>
         <p:spPr>
           <a:xfrm>
-            <a:off x="11077956" y="2729484"/>
-            <a:ext cx="246888" cy="246888"/>
+            <a:off x="10887304" y="4376776"/>
+            <a:ext cx="271577" cy="271577"/>
           </a:xfrm>
           <a:prstGeom prst="rect">
             <a:avLst/>
@@ -5981,14 +6356,14 @@
       </p:pic>
       <p:sp>
         <p:nvSpPr>
-          <p:cNvPr id="18" name="Text 13"/>
-          <p:cNvSpPr txBox="1"/>
-          <p:nvPr/>
-        </p:nvSpPr>
-        <p:spPr>
-          <a:xfrm>
-            <a:off x="8366760" y="3081528"/>
-            <a:ext cx="3044952" cy="347472"/>
+          <p:cNvPr id="19" name="Text 13"/>
+          <p:cNvSpPr txBox="1"/>
+          <p:nvPr/>
+        </p:nvSpPr>
+        <p:spPr>
+          <a:xfrm>
+            <a:off x="7543800" y="4242816"/>
+            <a:ext cx="2971800" cy="256032"/>
           </a:xfrm>
           <a:prstGeom prst="rect">
             <a:avLst/>
@@ -6004,30 +6379,30 @@
               <a:buNone/>
             </a:pPr>
             <a:r>
-              <a:rPr lang="fa-IR" altLang="en-US" sz="1300" b="1" dirty="0">
-                <a:solidFill>
-                  <a:srgbClr val="FFFFFF"/>
-                </a:solidFill>
-                <a:latin typeface="Kalameh" pitchFamily="34" charset="0"/>
-                <a:ea typeface="Kalameh" pitchFamily="34" charset="-122"/>
-                <a:cs typeface="Kalameh" pitchFamily="34" charset="-120"/>
-              </a:rPr>
-              <a:t>رانندگان</a:t>
-            </a:r>
-            <a:endParaRPr lang="fa-IR" sz="1300" dirty="0"/>
-          </a:p>
-        </p:txBody>
-      </p:sp>
-      <p:sp>
-        <p:nvSpPr>
-          <p:cNvPr id="19" name="Text 14"/>
-          <p:cNvSpPr txBox="1"/>
-          <p:nvPr/>
-        </p:nvSpPr>
-        <p:spPr>
-          <a:xfrm>
-            <a:off x="8366760" y="3511296"/>
-            <a:ext cx="3044952" cy="2350008"/>
+              <a:rPr lang="fa-IR" altLang="en-US" sz="1200" b="1" dirty="0">
+                <a:solidFill>
+                  <a:srgbClr val="1E293B"/>
+                </a:solidFill>
+                <a:latin typeface="Kalameh" pitchFamily="34" charset="0"/>
+                <a:ea typeface="Kalameh" pitchFamily="34" charset="-122"/>
+                <a:cs typeface="Kalameh" pitchFamily="34" charset="-120"/>
+              </a:rPr>
+              <a:t>انعطاف‌پذیری شبکه برق</a:t>
+            </a:r>
+            <a:endParaRPr lang="fa-IR" sz="1200" dirty="0"/>
+          </a:p>
+        </p:txBody>
+      </p:sp>
+      <p:sp>
+        <p:nvSpPr>
+          <p:cNvPr id="20" name="Text 14"/>
+          <p:cNvSpPr txBox="1"/>
+          <p:nvPr/>
+        </p:nvSpPr>
+        <p:spPr>
+          <a:xfrm>
+            <a:off x="5486400" y="4517136"/>
+            <a:ext cx="5029200" cy="438912"/>
           </a:xfrm>
           <a:prstGeom prst="rect">
             <a:avLst/>
@@ -6043,23 +6418,23 @@
               <a:buNone/>
             </a:pPr>
             <a:r>
-              <a:rPr lang="fa-IR" altLang="en-US" sz="1200" dirty="0">
-                <a:solidFill>
-                  <a:srgbClr val="A0A0A0"/>
-                </a:solidFill>
-                <a:latin typeface="Kalameh" pitchFamily="34" charset="0"/>
-                <a:ea typeface="Kalameh" pitchFamily="34" charset="-122"/>
-                <a:cs typeface="Kalameh" pitchFamily="34" charset="-120"/>
-              </a:rPr>
-              <a:t>از شارژ سریع در فروشگاه‌ها برای بهینه‌سازی زمان سفر استفاده کنید.</a:t>
-            </a:r>
-            <a:endParaRPr lang="fa-IR" sz="1200" dirty="0"/>
-          </a:p>
-        </p:txBody>
-      </p:sp>
-      <p:sp>
-        <p:nvSpPr>
-          <p:cNvPr id="20" name="Text 15"/>
+              <a:rPr lang="fa-IR" altLang="en-US" sz="1150" dirty="0">
+                <a:solidFill>
+                  <a:srgbClr val="64748B"/>
+                </a:solidFill>
+                <a:latin typeface="Kalameh" pitchFamily="34" charset="0"/>
+                <a:ea typeface="Kalameh" pitchFamily="34" charset="-122"/>
+                <a:cs typeface="Kalameh" pitchFamily="34" charset="-120"/>
+              </a:rPr>
+              <a:t>هماهنگی شارژ خودروها با الگوهای مصرف شبکه و بهره‌گیری از انرژی‌های پاک.</a:t>
+            </a:r>
+            <a:endParaRPr lang="fa-IR" sz="1150" dirty="0"/>
+          </a:p>
+        </p:txBody>
+      </p:sp>
+      <p:sp>
+        <p:nvSpPr>
+          <p:cNvPr id="21" name="Text 15"/>
           <p:cNvSpPr txBox="1"/>
           <p:nvPr/>
         </p:nvSpPr>
@@ -6084,7 +6459,7 @@
             <a:r>
               <a:rPr lang="en-US" altLang="en-US" sz="750" dirty="0">
                 <a:solidFill>
-                  <a:srgbClr val="A0A0A0"/>
+                  <a:srgbClr val="64748B"/>
                 </a:solidFill>
                 <a:latin typeface="Kalameh" pitchFamily="34" charset="0"/>
                 <a:ea typeface="Kalameh" pitchFamily="34" charset="-122"/>
@@ -6098,7 +6473,7 @@
       </p:sp>
       <p:sp>
         <p:nvSpPr>
-          <p:cNvPr id="21" name="Text 16"/>
+          <p:cNvPr id="22" name="Text 16"/>
           <p:cNvSpPr txBox="1"/>
           <p:nvPr/>
         </p:nvSpPr>
@@ -6123,7 +6498,7 @@
             <a:r>
               <a:rPr lang="en-US" altLang="en-US" sz="750" dirty="0">
                 <a:solidFill>
-                  <a:srgbClr val="A0A0A0"/>
+                  <a:srgbClr val="64748B"/>
                 </a:solidFill>
                 <a:latin typeface="Kalameh" pitchFamily="34" charset="0"/>
                 <a:ea typeface="Kalameh" pitchFamily="34" charset="-122"/>
@@ -6137,7 +6512,7 @@
       </p:sp>
       <p:sp>
         <p:nvSpPr>
-          <p:cNvPr id="22" name="Text 17"/>
+          <p:cNvPr id="23" name="Text 17"/>
           <p:cNvSpPr txBox="1"/>
           <p:nvPr/>
         </p:nvSpPr>
@@ -6162,7 +6537,7 @@
             <a:r>
               <a:rPr lang="en-US" altLang="en-US" sz="750" dirty="0">
                 <a:solidFill>
-                  <a:srgbClr val="A0A0A0"/>
+                  <a:srgbClr val="64748B"/>
                 </a:solidFill>
                 <a:latin typeface="Kalameh" pitchFamily="34" charset="0"/>
                 <a:ea typeface="Kalameh" pitchFamily="34" charset="-122"/>
@@ -6171,6 +6546,45 @@
               <a:t>08</a:t>
             </a:r>
             <a:endParaRPr lang="en-US" sz="750" dirty="0"/>
+          </a:p>
+        </p:txBody>
+      </p:sp>
+      <p:sp>
+        <p:nvSpPr>
+          <p:cNvPr id="24" name="Text 18"/>
+          <p:cNvSpPr txBox="1"/>
+          <p:nvPr/>
+        </p:nvSpPr>
+        <p:spPr>
+          <a:xfrm>
+            <a:off x="9326880" y="6473952"/>
+            <a:ext cx="2514600" cy="182880"/>
+          </a:xfrm>
+          <a:prstGeom prst="rect">
+            <a:avLst/>
+          </a:prstGeom>
+          <a:noFill/>
+          <a:ln/>
+        </p:spPr>
+        <p:txBody>
+          <a:bodyPr wrap="square" lIns="0" tIns="0" rIns="0" bIns="0" rtlCol="0" anchor="ctr"/>
+          <a:lstStyle/>
+          <a:p>
+            <a:pPr algn="r" indent="0" marL="0">
+              <a:buNone/>
+            </a:pPr>
+            <a:r>
+              <a:rPr lang="en-US" altLang="en-US" sz="620" dirty="0">
+                <a:solidFill>
+                  <a:srgbClr val="64748B"/>
+                </a:solidFill>
+                <a:latin typeface="Kalameh" pitchFamily="34" charset="0"/>
+                <a:ea typeface="Kalameh" pitchFamily="34" charset="-122"/>
+                <a:cs typeface="Kalameh" pitchFamily="34" charset="-120"/>
+              </a:rPr>
+              <a:t>panumas nikhomkhai</a:t>
+            </a:r>
+            <a:endParaRPr lang="en-US" sz="620" dirty="0"/>
           </a:p>
         </p:txBody>
       </p:sp>
@@ -6188,7 +6602,7 @@
     <p:bg>
       <p:bgPr>
         <a:solidFill>
-          <a:srgbClr val="1A5F7A"/>
+          <a:srgbClr val="0F172A"/>
         </a:solidFill>
       </p:bgPr>
     </p:bg>
@@ -6221,13 +6635,13 @@
             <a:avLst/>
           </a:prstGeom>
           <a:solidFill>
-            <a:srgbClr val="EF476F">
+            <a:srgbClr val="F59E0B">
               <a:alpha val="25000"/>
             </a:srgbClr>
           </a:solidFill>
           <a:ln w="12700">
             <a:solidFill>
-              <a:srgbClr val="EF476F">
+              <a:srgbClr val="F59E0B">
                 <a:alpha val="0"/>
               </a:srgbClr>
             </a:solidFill>
@@ -6250,13 +6664,13 @@
             <a:avLst/>
           </a:prstGeom>
           <a:solidFill>
-            <a:srgbClr val="FFD166">
+            <a:srgbClr val="10B981">
               <a:alpha val="28000"/>
             </a:srgbClr>
           </a:solidFill>
           <a:ln w="12700">
             <a:solidFill>
-              <a:srgbClr val="FFD166">
+              <a:srgbClr val="10B981">
                 <a:alpha val="0"/>
               </a:srgbClr>
             </a:solidFill>
@@ -6279,11 +6693,11 @@
             <a:avLst/>
           </a:prstGeom>
           <a:solidFill>
-            <a:srgbClr val="FFD166"/>
+            <a:srgbClr val="10B981"/>
           </a:solidFill>
           <a:ln w="12700">
             <a:solidFill>
-              <a:srgbClr val="FFD166">
+              <a:srgbClr val="10B981">
                 <a:alpha val="0"/>
               </a:srgbClr>
             </a:solidFill>
@@ -6318,13 +6732,13 @@
             <a:r>
               <a:rPr lang="fa-IR" altLang="en-US" sz="1050" b="1" spc="50" kern="0" dirty="0">
                 <a:solidFill>
-                  <a:srgbClr val="FFD166"/>
-                </a:solidFill>
-                <a:latin typeface="Kalameh" pitchFamily="34" charset="0"/>
-                <a:ea typeface="Kalameh" pitchFamily="34" charset="-122"/>
-                <a:cs typeface="Kalameh" pitchFamily="34" charset="-120"/>
-              </a:rPr>
-              <a:t>همکاری برای موفقیت</a:t>
+                  <a:srgbClr val="10B981"/>
+                </a:solidFill>
+                <a:latin typeface="Kalameh" pitchFamily="34" charset="0"/>
+                <a:ea typeface="Kalameh" pitchFamily="34" charset="-122"/>
+                <a:cs typeface="Kalameh" pitchFamily="34" charset="-120"/>
+              </a:rPr>
+              <a:t>جمع‌بندی و اقدام</a:t>
             </a:r>
             <a:endParaRPr lang="fa-IR" sz="1050" dirty="0"/>
           </a:p>
@@ -6355,7 +6769,7 @@
               <a:buNone/>
             </a:pPr>
             <a:r>
-              <a:rPr lang="fa-IR" altLang="en-US" sz="2600" b="1" dirty="0">
+              <a:rPr lang="fa-IR" altLang="en-US" sz="2700" b="1" dirty="0">
                 <a:solidFill>
                   <a:srgbClr val="F8FAFC"/>
                 </a:solidFill>
@@ -6363,22 +6777,61 @@
                 <a:ea typeface="Kalameh" pitchFamily="34" charset="-122"/>
                 <a:cs typeface="Kalameh" pitchFamily="34" charset="-120"/>
               </a:rPr>
-              <a:t>گام‌های بعدی برای آینده‌ای پایدارتر</a:t>
-            </a:r>
-            <a:endParaRPr lang="fa-IR" sz="2600" dirty="0"/>
-          </a:p>
-        </p:txBody>
-      </p:sp>
-      <p:sp>
-        <p:nvSpPr>
-          <p:cNvPr id="7" name="Shape 5"/>
+              <a:t>چشم‌انداز آینده سفر با خودروی برقی</a:t>
+            </a:r>
+            <a:endParaRPr lang="fa-IR" sz="2700" dirty="0"/>
+          </a:p>
+        </p:txBody>
+      </p:sp>
+      <p:sp>
+        <p:nvSpPr>
+          <p:cNvPr id="7" name="Text 5"/>
+          <p:cNvSpPr txBox="1"/>
+          <p:nvPr/>
+        </p:nvSpPr>
+        <p:spPr>
+          <a:xfrm>
+            <a:off x="4572000" y="1847088"/>
+            <a:ext cx="7040880" cy="594360"/>
+          </a:xfrm>
+          <a:prstGeom prst="rect">
+            <a:avLst/>
+          </a:prstGeom>
+          <a:noFill/>
+          <a:ln/>
+        </p:spPr>
+        <p:txBody>
+          <a:bodyPr wrap="square" lIns="0" tIns="0" rIns="0" bIns="0" rtlCol="0" anchor="t"/>
+          <a:lstStyle/>
+          <a:p>
+            <a:pPr rtl="1" algn="r" indent="0" marL="0">
+              <a:buNone/>
+            </a:pPr>
+            <a:r>
+              <a:rPr lang="fa-IR" altLang="en-US" sz="1250" dirty="0">
+                <a:solidFill>
+                  <a:srgbClr val="CBD5E1"/>
+                </a:solidFill>
+                <a:latin typeface="Kalameh" pitchFamily="34" charset="0"/>
+                <a:ea typeface="Kalameh" pitchFamily="34" charset="-122"/>
+                <a:cs typeface="Kalameh" pitchFamily="34" charset="-120"/>
+              </a:rPr>
+              <a:t>گام‌های بعدی برای فراگیر شدن شارژ مفید در مراکز تجاری</a:t>
+            </a:r>
+            <a:endParaRPr lang="fa-IR" sz="1250" dirty="0"/>
+          </a:p>
+        </p:txBody>
+      </p:sp>
+      <p:sp>
+        <p:nvSpPr>
+          <p:cNvPr id="8" name="Shape 6"/>
           <p:cNvSpPr/>
           <p:nvPr/>
         </p:nvSpPr>
         <p:spPr>
           <a:xfrm>
             <a:off x="594360" y="2788920"/>
-            <a:ext cx="3505200" cy="2331720"/>
+            <a:ext cx="5372100" cy="2331720"/>
           </a:xfrm>
           <a:prstGeom prst="roundRect">
             <a:avLst/>
@@ -6388,7 +6841,7 @@
           </a:solidFill>
           <a:ln w="8890">
             <a:solidFill>
-              <a:srgbClr val="FFD166">
+              <a:srgbClr val="10B981">
                 <a:alpha val="65000"/>
               </a:srgbClr>
             </a:solidFill>
@@ -6398,7 +6851,7 @@
       </p:sp>
       <p:sp>
         <p:nvSpPr>
-          <p:cNvPr id="8" name="Text 6"/>
+          <p:cNvPr id="9" name="Text 7"/>
           <p:cNvSpPr txBox="1"/>
           <p:nvPr/>
         </p:nvSpPr>
@@ -6423,13 +6876,13 @@
             <a:r>
               <a:rPr lang="en-US" altLang="en-US" sz="1600" b="1" dirty="0">
                 <a:solidFill>
-                  <a:srgbClr val="FFD166"/>
-                </a:solidFill>
-                <a:latin typeface="Kalameh" pitchFamily="34" charset="0"/>
-                <a:ea typeface="Kalameh" pitchFamily="34" charset="-122"/>
-                <a:cs typeface="Kalameh" pitchFamily="34" charset="-120"/>
-              </a:rPr>
-              <a:t>03</a:t>
+                  <a:srgbClr val="10B981"/>
+                </a:solidFill>
+                <a:latin typeface="Kalameh" pitchFamily="34" charset="0"/>
+                <a:ea typeface="Kalameh" pitchFamily="34" charset="-122"/>
+                <a:cs typeface="Kalameh" pitchFamily="34" charset="-120"/>
+              </a:rPr>
+              <a:t>1</a:t>
             </a:r>
             <a:endParaRPr lang="en-US" sz="1600" dirty="0"/>
           </a:p>
@@ -6437,7 +6890,7 @@
       </p:sp>
       <p:pic>
         <p:nvPicPr>
-          <p:cNvPr id="9" name="Image 0" descr="preencoded.png">    </p:cNvPr>
+          <p:cNvPr id="10" name="Image 0" descr="preencoded.png">    </p:cNvPr>
           <p:cNvPicPr>
             <a:picLocks noChangeAspect="1"/>
           </p:cNvPicPr>
@@ -6457,7 +6910,7 @@
         </p:blipFill>
         <p:spPr>
           <a:xfrm>
-            <a:off x="3505200" y="2999232"/>
+            <a:off x="5372100" y="2999232"/>
             <a:ext cx="347472" cy="347472"/>
           </a:xfrm>
           <a:prstGeom prst="rect">
@@ -6467,14 +6920,14 @@
       </p:pic>
       <p:sp>
         <p:nvSpPr>
-          <p:cNvPr id="10" name="Text 7"/>
+          <p:cNvPr id="11" name="Text 8"/>
           <p:cNvSpPr txBox="1"/>
           <p:nvPr/>
         </p:nvSpPr>
         <p:spPr>
           <a:xfrm>
             <a:off x="822960" y="3657600"/>
-            <a:ext cx="3048000" cy="347472"/>
+            <a:ext cx="4914900" cy="347472"/>
           </a:xfrm>
           <a:prstGeom prst="rect">
             <a:avLst/>
@@ -6498,7 +6951,7 @@
                 <a:ea typeface="Kalameh" pitchFamily="34" charset="-122"/>
                 <a:cs typeface="Kalameh" pitchFamily="34" charset="-120"/>
               </a:rPr>
-              <a:t>سرمایه‌گذاری در زیرساخت‌های شارژ هوشمند و پایدار</a:t>
+              <a:t>یکپارچه‌سازی خدمات</a:t>
             </a:r>
             <a:endParaRPr lang="fa-IR" sz="1200" dirty="0"/>
           </a:p>
@@ -6506,14 +6959,14 @@
       </p:sp>
       <p:sp>
         <p:nvSpPr>
-          <p:cNvPr id="11" name="Text 8"/>
+          <p:cNvPr id="12" name="Text 9"/>
           <p:cNvSpPr txBox="1"/>
           <p:nvPr/>
         </p:nvSpPr>
         <p:spPr>
           <a:xfrm>
             <a:off x="822960" y="4133088"/>
-            <a:ext cx="3048000" cy="640080"/>
+            <a:ext cx="4914900" cy="640080"/>
           </a:xfrm>
           <a:prstGeom prst="rect">
             <a:avLst/>
@@ -6525,23 +6978,34 @@
           <a:bodyPr wrap="square" lIns="0" tIns="0" rIns="0" bIns="0" rtlCol="0" anchor="t"/>
           <a:lstStyle/>
           <a:p>
-            <a:pPr algn="l" indent="0" marL="0">
-              <a:buNone/>
-            </a:pPr>
-            <a:endParaRPr lang="en-US" sz="1050" dirty="0"/>
-          </a:p>
-        </p:txBody>
-      </p:sp>
-      <p:sp>
-        <p:nvSpPr>
-          <p:cNvPr id="12" name="Shape 9"/>
+            <a:pPr rtl="1" algn="r" indent="0" marL="0">
+              <a:buNone/>
+            </a:pPr>
+            <a:r>
+              <a:rPr lang="fa-IR" altLang="en-US" sz="1050" dirty="0">
+                <a:solidFill>
+                  <a:srgbClr val="B8C3D4"/>
+                </a:solidFill>
+                <a:latin typeface="Kalameh" pitchFamily="34" charset="0"/>
+                <a:ea typeface="Kalameh" pitchFamily="34" charset="-122"/>
+                <a:cs typeface="Kalameh" pitchFamily="34" charset="-120"/>
+              </a:rPr>
+              <a:t>توسعه روش‌های پرداخت واحد و دسترسی آسان به وضعیت شارژ از طریق اپلیکیشن‌ها.</a:t>
+            </a:r>
+            <a:endParaRPr lang="fa-IR" sz="1050" dirty="0"/>
+          </a:p>
+        </p:txBody>
+      </p:sp>
+      <p:sp>
+        <p:nvSpPr>
+          <p:cNvPr id="13" name="Shape 10"/>
           <p:cNvSpPr/>
           <p:nvPr/>
         </p:nvSpPr>
         <p:spPr>
           <a:xfrm>
-            <a:off x="4328160" y="2788920"/>
-            <a:ext cx="3505200" cy="2331720"/>
+            <a:off x="6195060" y="2788920"/>
+            <a:ext cx="5372100" cy="2331720"/>
           </a:xfrm>
           <a:prstGeom prst="roundRect">
             <a:avLst/>
@@ -6551,7 +7015,7 @@
           </a:solidFill>
           <a:ln w="8890">
             <a:solidFill>
-              <a:srgbClr val="EF476F">
+              <a:srgbClr val="F59E0B">
                 <a:alpha val="65000"/>
               </a:srgbClr>
             </a:solidFill>
@@ -6561,13 +7025,13 @@
       </p:sp>
       <p:sp>
         <p:nvSpPr>
-          <p:cNvPr id="13" name="Text 10"/>
-          <p:cNvSpPr txBox="1"/>
-          <p:nvPr/>
-        </p:nvSpPr>
-        <p:spPr>
-          <a:xfrm>
-            <a:off x="4529328" y="2971800"/>
+          <p:cNvPr id="14" name="Text 11"/>
+          <p:cNvSpPr txBox="1"/>
+          <p:nvPr/>
+        </p:nvSpPr>
+        <p:spPr>
+          <a:xfrm>
+            <a:off x="6396228" y="2971800"/>
             <a:ext cx="640080" cy="384048"/>
           </a:xfrm>
           <a:prstGeom prst="rect">
@@ -6586,13 +7050,13 @@
             <a:r>
               <a:rPr lang="en-US" altLang="en-US" sz="1600" b="1" dirty="0">
                 <a:solidFill>
-                  <a:srgbClr val="EF476F"/>
-                </a:solidFill>
-                <a:latin typeface="Kalameh" pitchFamily="34" charset="0"/>
-                <a:ea typeface="Kalameh" pitchFamily="34" charset="-122"/>
-                <a:cs typeface="Kalameh" pitchFamily="34" charset="-120"/>
-              </a:rPr>
-              <a:t>02</a:t>
+                  <a:srgbClr val="F59E0B"/>
+                </a:solidFill>
+                <a:latin typeface="Kalameh" pitchFamily="34" charset="0"/>
+                <a:ea typeface="Kalameh" pitchFamily="34" charset="-122"/>
+                <a:cs typeface="Kalameh" pitchFamily="34" charset="-120"/>
+              </a:rPr>
+              <a:t>2</a:t>
             </a:r>
             <a:endParaRPr lang="en-US" sz="1600" dirty="0"/>
           </a:p>
@@ -6600,7 +7064,7 @@
       </p:sp>
       <p:pic>
         <p:nvPicPr>
-          <p:cNvPr id="14" name="Image 1" descr="preencoded.png">    </p:cNvPr>
+          <p:cNvPr id="15" name="Image 1" descr="preencoded.png">    </p:cNvPr>
           <p:cNvPicPr>
             <a:picLocks noChangeAspect="1"/>
           </p:cNvPicPr>
@@ -6620,169 +7084,6 @@
         </p:blipFill>
         <p:spPr>
           <a:xfrm>
-            <a:off x="7239000" y="2999232"/>
-            <a:ext cx="347472" cy="347472"/>
-          </a:xfrm>
-          <a:prstGeom prst="rect">
-            <a:avLst/>
-          </a:prstGeom>
-        </p:spPr>
-      </p:pic>
-      <p:sp>
-        <p:nvSpPr>
-          <p:cNvPr id="15" name="Text 11"/>
-          <p:cNvSpPr txBox="1"/>
-          <p:nvPr/>
-        </p:nvSpPr>
-        <p:spPr>
-          <a:xfrm>
-            <a:off x="4556760" y="3657600"/>
-            <a:ext cx="3048000" cy="347472"/>
-          </a:xfrm>
-          <a:prstGeom prst="rect">
-            <a:avLst/>
-          </a:prstGeom>
-          <a:noFill/>
-          <a:ln/>
-        </p:spPr>
-        <p:txBody>
-          <a:bodyPr wrap="square" lIns="0" tIns="0" rIns="0" bIns="0" rtlCol="0" anchor="ctr"/>
-          <a:lstStyle/>
-          <a:p>
-            <a:pPr rtl="1" algn="r" indent="0" marL="0">
-              <a:buNone/>
-            </a:pPr>
-            <a:r>
-              <a:rPr lang="fa-IR" altLang="en-US" sz="1200" b="1" dirty="0">
-                <a:solidFill>
-                  <a:srgbClr val="FFFFFF"/>
-                </a:solidFill>
-                <a:latin typeface="Kalameh" pitchFamily="34" charset="0"/>
-                <a:ea typeface="Kalameh" pitchFamily="34" charset="-122"/>
-                <a:cs typeface="Kalameh" pitchFamily="34" charset="-120"/>
-              </a:rPr>
-              <a:t>همکاری فروشگاه‌ها با اپراتورهای شارژ برای ارائه خدمات بهتر</a:t>
-            </a:r>
-            <a:endParaRPr lang="fa-IR" sz="1200" dirty="0"/>
-          </a:p>
-        </p:txBody>
-      </p:sp>
-      <p:sp>
-        <p:nvSpPr>
-          <p:cNvPr id="16" name="Text 12"/>
-          <p:cNvSpPr txBox="1"/>
-          <p:nvPr/>
-        </p:nvSpPr>
-        <p:spPr>
-          <a:xfrm>
-            <a:off x="4556760" y="4133088"/>
-            <a:ext cx="3048000" cy="640080"/>
-          </a:xfrm>
-          <a:prstGeom prst="rect">
-            <a:avLst/>
-          </a:prstGeom>
-          <a:noFill/>
-          <a:ln/>
-        </p:spPr>
-        <p:txBody>
-          <a:bodyPr wrap="square" lIns="0" tIns="0" rIns="0" bIns="0" rtlCol="0" anchor="t"/>
-          <a:lstStyle/>
-          <a:p>
-            <a:pPr algn="l" indent="0" marL="0">
-              <a:buNone/>
-            </a:pPr>
-            <a:endParaRPr lang="en-US" sz="1050" dirty="0"/>
-          </a:p>
-        </p:txBody>
-      </p:sp>
-      <p:sp>
-        <p:nvSpPr>
-          <p:cNvPr id="17" name="Shape 13"/>
-          <p:cNvSpPr/>
-          <p:nvPr/>
-        </p:nvSpPr>
-        <p:spPr>
-          <a:xfrm>
-            <a:off x="8061960" y="2788920"/>
-            <a:ext cx="3505200" cy="2331720"/>
-          </a:xfrm>
-          <a:prstGeom prst="roundRect">
-            <a:avLst/>
-          </a:prstGeom>
-          <a:solidFill>
-            <a:srgbClr val="151F31"/>
-          </a:solidFill>
-          <a:ln w="8890">
-            <a:solidFill>
-              <a:srgbClr val="FFD166">
-                <a:alpha val="65000"/>
-              </a:srgbClr>
-            </a:solidFill>
-            <a:prstDash val="solid"/>
-          </a:ln>
-        </p:spPr>
-      </p:sp>
-      <p:sp>
-        <p:nvSpPr>
-          <p:cNvPr id="18" name="Text 14"/>
-          <p:cNvSpPr txBox="1"/>
-          <p:nvPr/>
-        </p:nvSpPr>
-        <p:spPr>
-          <a:xfrm>
-            <a:off x="8263128" y="2971800"/>
-            <a:ext cx="640080" cy="384048"/>
-          </a:xfrm>
-          <a:prstGeom prst="rect">
-            <a:avLst/>
-          </a:prstGeom>
-          <a:noFill/>
-          <a:ln/>
-        </p:spPr>
-        <p:txBody>
-          <a:bodyPr wrap="square" lIns="0" tIns="0" rIns="0" bIns="0" rtlCol="0" anchor="ctr"/>
-          <a:lstStyle/>
-          <a:p>
-            <a:pPr algn="l" indent="0" marL="0">
-              <a:buNone/>
-            </a:pPr>
-            <a:r>
-              <a:rPr lang="en-US" altLang="en-US" sz="1600" b="1" dirty="0">
-                <a:solidFill>
-                  <a:srgbClr val="FFD166"/>
-                </a:solidFill>
-                <a:latin typeface="Kalameh" pitchFamily="34" charset="0"/>
-                <a:ea typeface="Kalameh" pitchFamily="34" charset="-122"/>
-                <a:cs typeface="Kalameh" pitchFamily="34" charset="-120"/>
-              </a:rPr>
-              <a:t>01</a:t>
-            </a:r>
-            <a:endParaRPr lang="en-US" sz="1600" dirty="0"/>
-          </a:p>
-        </p:txBody>
-      </p:sp>
-      <p:pic>
-        <p:nvPicPr>
-          <p:cNvPr id="19" name="Image 2" descr="preencoded.png">    </p:cNvPr>
-          <p:cNvPicPr>
-            <a:picLocks noChangeAspect="1"/>
-          </p:cNvPicPr>
-          <p:nvPr/>
-        </p:nvPicPr>
-        <p:blipFill>
-          <a:blip r:embed="rId5">
-            <a:extLst>
-              <a:ext uri="{96DAC541-7B7A-43D3-8B79-37D633B846F1}">
-                <asvg:svgBlip xmlns:asvg="http://schemas.microsoft.com/office/drawing/2016/SVG/main" r:embed="rId6"/>
-              </a:ext>
-            </a:extLst>
-          </a:blip>
-          <a:stretch>
-            <a:fillRect/>
-          </a:stretch>
-        </p:blipFill>
-        <p:spPr>
-          <a:xfrm>
             <a:off x="10972800" y="2999232"/>
             <a:ext cx="347472" cy="347472"/>
           </a:xfrm>
@@ -6793,14 +7094,14 @@
       </p:pic>
       <p:sp>
         <p:nvSpPr>
-          <p:cNvPr id="20" name="Text 15"/>
-          <p:cNvSpPr txBox="1"/>
-          <p:nvPr/>
-        </p:nvSpPr>
-        <p:spPr>
-          <a:xfrm>
-            <a:off x="8290560" y="3657600"/>
-            <a:ext cx="3048000" cy="347472"/>
+          <p:cNvPr id="16" name="Text 12"/>
+          <p:cNvSpPr txBox="1"/>
+          <p:nvPr/>
+        </p:nvSpPr>
+        <p:spPr>
+          <a:xfrm>
+            <a:off x="6423660" y="3657600"/>
+            <a:ext cx="4914900" cy="347472"/>
           </a:xfrm>
           <a:prstGeom prst="rect">
             <a:avLst/>
@@ -6824,7 +7125,7 @@
                 <a:ea typeface="Kalameh" pitchFamily="34" charset="-122"/>
                 <a:cs typeface="Kalameh" pitchFamily="34" charset="-120"/>
               </a:rPr>
-              <a:t>آموزش رانندگان در مورد مزایای شارژ سریع در فروشگاه‌ها</a:t>
+              <a:t>گسترش ایستگاه‌های مقصد</a:t>
             </a:r>
             <a:endParaRPr lang="fa-IR" sz="1200" dirty="0"/>
           </a:p>
@@ -6832,14 +7133,14 @@
       </p:sp>
       <p:sp>
         <p:nvSpPr>
-          <p:cNvPr id="21" name="Text 16"/>
-          <p:cNvSpPr txBox="1"/>
-          <p:nvPr/>
-        </p:nvSpPr>
-        <p:spPr>
-          <a:xfrm>
-            <a:off x="8290560" y="4133088"/>
-            <a:ext cx="3048000" cy="640080"/>
+          <p:cNvPr id="17" name="Text 13"/>
+          <p:cNvSpPr txBox="1"/>
+          <p:nvPr/>
+        </p:nvSpPr>
+        <p:spPr>
+          <a:xfrm>
+            <a:off x="6423660" y="4133088"/>
+            <a:ext cx="4914900" cy="640080"/>
           </a:xfrm>
           <a:prstGeom prst="rect">
             <a:avLst/>
@@ -6851,16 +7152,27 @@
           <a:bodyPr wrap="square" lIns="0" tIns="0" rIns="0" bIns="0" rtlCol="0" anchor="t"/>
           <a:lstStyle/>
           <a:p>
-            <a:pPr algn="l" indent="0" marL="0">
-              <a:buNone/>
-            </a:pPr>
-            <a:endParaRPr lang="en-US" sz="1050" dirty="0"/>
-          </a:p>
-        </p:txBody>
-      </p:sp>
-      <p:sp>
-        <p:nvSpPr>
-          <p:cNvPr id="22" name="Text 17"/>
+            <a:pPr rtl="1" algn="r" indent="0" marL="0">
+              <a:buNone/>
+            </a:pPr>
+            <a:r>
+              <a:rPr lang="fa-IR" altLang="en-US" sz="1050" dirty="0">
+                <a:solidFill>
+                  <a:srgbClr val="B8C3D4"/>
+                </a:solidFill>
+                <a:latin typeface="Kalameh" pitchFamily="34" charset="0"/>
+                <a:ea typeface="Kalameh" pitchFamily="34" charset="-122"/>
+                <a:cs typeface="Kalameh" pitchFamily="34" charset="-120"/>
+              </a:rPr>
+              <a:t>افزایش تعداد شارژرهای سریع در تمامی مراکز خرید و تفریحی.</a:t>
+            </a:r>
+            <a:endParaRPr lang="fa-IR" sz="1050" dirty="0"/>
+          </a:p>
+        </p:txBody>
+      </p:sp>
+      <p:sp>
+        <p:nvSpPr>
+          <p:cNvPr id="18" name="Text 14"/>
           <p:cNvSpPr txBox="1"/>
           <p:nvPr/>
         </p:nvSpPr>
@@ -6899,7 +7211,7 @@
       </p:sp>
       <p:sp>
         <p:nvSpPr>
-          <p:cNvPr id="23" name="Text 18"/>
+          <p:cNvPr id="19" name="Text 15"/>
           <p:cNvSpPr txBox="1"/>
           <p:nvPr/>
         </p:nvSpPr>
@@ -6938,7 +7250,7 @@
       </p:sp>
       <p:sp>
         <p:nvSpPr>
-          <p:cNvPr id="24" name="Text 19"/>
+          <p:cNvPr id="20" name="Text 16"/>
           <p:cNvSpPr txBox="1"/>
           <p:nvPr/>
         </p:nvSpPr>
